--- a/presentation_editable-1780906961494.pptx
+++ b/presentation_editable-1780906961494.pptx
@@ -1119,7 +1119,7 @@
 </file>
 
 <file path=ppt/slides/slide1.xml><?xml version="1.0" encoding="utf-8"?>
-<p:sld xmlns:a="http://schemas.openxmlformats.org/drawingml/2006/main" xmlns:r="http://schemas.openxmlformats.org/officeDocument/2006/relationships" xmlns:p="http://schemas.openxmlformats.org/presentationml/2006/main">
+<p:sld xmlns:a="http://schemas.openxmlformats.org/drawingml/2006/main" xmlns:ns3="http://schemas.microsoft.com/office/drawing/2016/SVG/main" xmlns:p="http://schemas.openxmlformats.org/presentationml/2006/main" xmlns:r="http://schemas.openxmlformats.org/officeDocument/2006/relationships">
   <p:cSld name="Slide 1">
     <p:spTree>
       <p:nvGrpSpPr>
@@ -1143,8 +1143,8 @@
         </p:nvSpPr>
         <p:spPr>
           <a:xfrm>
-            <a:off x="0" y="1870805"/>
-            <a:ext cx="12161520" cy="3116390"/>
+            <a:off x="0" y="320040"/>
+            <a:ext cx="12161520" cy="6217920"/>
           </a:xfrm>
           <a:prstGeom prst="rect">
             <a:avLst/>
@@ -1163,8 +1163,8 @@
         </p:nvSpPr>
         <p:spPr>
           <a:xfrm>
-            <a:off x="405384" y="2163759"/>
-            <a:ext cx="11350752" cy="120348"/>
+            <a:off x="405384" y="904551"/>
+            <a:ext cx="11350752" cy="240122"/>
           </a:xfrm>
           <a:prstGeom prst="rect">
             <a:avLst/>
@@ -1181,7 +1181,7 @@
               <a:buNone/>
             </a:pPr>
             <a:r>
-              <a:rPr lang="en-US" sz="700" b="1" spc="100" kern="0" dirty="0">
+              <a:rPr lang="en-US" sz="875" b="1" spc="100" kern="0" dirty="0">
                 <a:solidFill>
                   <a:srgbClr val="478D54"/>
                 </a:solidFill>
@@ -1191,7 +1191,7 @@
               </a:rPr>
               <a:t>进度汇报</a:t>
             </a:r>
-            <a:endParaRPr lang="en-US" sz="700" dirty="0"/>
+            <a:endParaRPr lang="en-US" sz="875" dirty="0"/>
           </a:p>
         </p:txBody>
       </p:sp>
@@ -1203,8 +1203,8 @@
         </p:nvSpPr>
         <p:spPr>
           <a:xfrm>
-            <a:off x="405384" y="2309443"/>
-            <a:ext cx="11350752" cy="253365"/>
+            <a:off x="405384" y="1195224"/>
+            <a:ext cx="11350752" cy="505521"/>
           </a:xfrm>
           <a:prstGeom prst="rect">
             <a:avLst/>
@@ -1224,7 +1224,7 @@
               <a:buNone/>
             </a:pPr>
             <a:r>
-              <a:rPr lang="en-US" sz="1500" b="1" dirty="0">
+              <a:rPr lang="en-US" sz="1875" b="1" dirty="0">
                 <a:solidFill>
                   <a:srgbClr val="1F2A24"/>
                 </a:solidFill>
@@ -1234,7 +1234,7 @@
               </a:rPr>
               <a:t>AI 辅助自动化测试平台 · 进度汇报</a:t>
             </a:r>
-            <a:endParaRPr lang="en-US" sz="1500" dirty="0"/>
+            <a:endParaRPr lang="en-US" sz="1875" dirty="0"/>
           </a:p>
         </p:txBody>
       </p:sp>
@@ -1246,8 +1246,8 @@
         </p:nvSpPr>
         <p:spPr>
           <a:xfrm>
-            <a:off x="405384" y="2611898"/>
-            <a:ext cx="11350752" cy="145685"/>
+            <a:off x="405384" y="1798692"/>
+            <a:ext cx="11350752" cy="290675"/>
           </a:xfrm>
           <a:prstGeom prst="rect">
             <a:avLst/>
@@ -1267,7 +1267,7 @@
               <a:buNone/>
             </a:pPr>
             <a:r>
-              <a:rPr lang="en-US" sz="750" b="1" dirty="0">
+              <a:rPr lang="en-US" sz="937" b="1" dirty="0">
                 <a:solidFill>
                   <a:srgbClr val="52605A"/>
                 </a:solidFill>
@@ -1287,7 +1287,7 @@
               <a:buNone/>
             </a:pPr>
             <a:r>
-              <a:rPr lang="en-US" sz="750" dirty="0">
+              <a:rPr lang="en-US" sz="937" dirty="0">
                 <a:solidFill>
                   <a:srgbClr val="52605A"/>
                 </a:solidFill>
@@ -1304,7 +1304,7 @@
               <a:buNone/>
             </a:pPr>
             <a:r>
-              <a:rPr lang="en-US" sz="750" b="1" dirty="0">
+              <a:rPr lang="en-US" sz="937" b="1" dirty="0">
                 <a:solidFill>
                   <a:srgbClr val="52605A"/>
                 </a:solidFill>
@@ -1324,7 +1324,7 @@
               <a:buNone/>
             </a:pPr>
             <a:r>
-              <a:rPr lang="en-US" sz="750" dirty="0">
+              <a:rPr lang="en-US" sz="937" dirty="0">
                 <a:solidFill>
                   <a:srgbClr val="52605A"/>
                 </a:solidFill>
@@ -1334,7 +1334,7 @@
               </a:rPr>
               <a:t>内网 Web 业务回归长期依赖人工，自动化脚本编写门槛高、随页面改版频繁失效，维护成本压垮收益。</a:t>
             </a:r>
-            <a:endParaRPr lang="en-US" sz="750" dirty="0"/>
+            <a:endParaRPr lang="en-US" sz="937" dirty="0"/>
           </a:p>
         </p:txBody>
       </p:sp>
@@ -1346,8 +1346,8 @@
         </p:nvSpPr>
         <p:spPr>
           <a:xfrm>
-            <a:off x="405384" y="2832009"/>
-            <a:ext cx="380048" cy="25337"/>
+            <a:off x="405384" y="2237864"/>
+            <a:ext cx="380048" cy="50553"/>
           </a:xfrm>
           <a:prstGeom prst="roundRect">
             <a:avLst>
@@ -1368,8 +1368,8 @@
         </p:nvSpPr>
         <p:spPr>
           <a:xfrm>
-            <a:off x="1192053" y="2946023"/>
-            <a:ext cx="2039588" cy="316706"/>
+            <a:off x="1192053" y="2465348"/>
+            <a:ext cx="2039588" cy="631901"/>
           </a:xfrm>
           <a:prstGeom prst="roundRect">
             <a:avLst>
@@ -1391,7 +1391,7 @@
               <a:buNone/>
             </a:pPr>
             <a:r>
-              <a:rPr lang="en-US" sz="670" b="1" dirty="0">
+              <a:rPr lang="en-US" sz="837" b="1" dirty="0">
                 <a:solidFill>
                   <a:srgbClr val="FFFFFF"/>
                 </a:solidFill>
@@ -1408,7 +1408,7 @@
               <a:buNone/>
             </a:pPr>
             <a:r>
-              <a:rPr lang="en-US" sz="470" dirty="0">
+              <a:rPr lang="en-US" sz="587" dirty="0">
                 <a:solidFill>
                   <a:srgbClr val="FFFFFF"/>
                 </a:solidFill>
@@ -1418,7 +1418,7 @@
               </a:rPr>
               <a:t>REQUIREMENTS</a:t>
             </a:r>
-            <a:endParaRPr lang="en-US" sz="670" dirty="0"/>
+            <a:endParaRPr lang="en-US" sz="837" dirty="0"/>
           </a:p>
         </p:txBody>
       </p:sp>
@@ -1430,8 +1430,8 @@
         </p:nvSpPr>
         <p:spPr>
           <a:xfrm>
-            <a:off x="3322842" y="2946023"/>
-            <a:ext cx="2039588" cy="316706"/>
+            <a:off x="3322842" y="2465348"/>
+            <a:ext cx="2039588" cy="631901"/>
           </a:xfrm>
           <a:prstGeom prst="roundRect">
             <a:avLst>
@@ -1453,7 +1453,7 @@
               <a:buNone/>
             </a:pPr>
             <a:r>
-              <a:rPr lang="en-US" sz="670" b="1" dirty="0">
+              <a:rPr lang="en-US" sz="837" b="1" dirty="0">
                 <a:solidFill>
                   <a:srgbClr val="FFFFFF"/>
                 </a:solidFill>
@@ -1470,7 +1470,7 @@
               <a:buNone/>
             </a:pPr>
             <a:r>
-              <a:rPr lang="en-US" sz="470" dirty="0">
+              <a:rPr lang="en-US" sz="587" dirty="0">
                 <a:solidFill>
                   <a:srgbClr val="FFFFFF"/>
                 </a:solidFill>
@@ -1480,7 +1480,7 @@
               </a:rPr>
               <a:t>测试点 / 用例设计</a:t>
             </a:r>
-            <a:endParaRPr lang="en-US" sz="670" dirty="0"/>
+            <a:endParaRPr lang="en-US" sz="837" dirty="0"/>
           </a:p>
         </p:txBody>
       </p:sp>
@@ -1492,8 +1492,8 @@
         </p:nvSpPr>
         <p:spPr>
           <a:xfrm>
-            <a:off x="5453632" y="2946023"/>
-            <a:ext cx="2039588" cy="316706"/>
+            <a:off x="5453632" y="2465348"/>
+            <a:ext cx="2039588" cy="631901"/>
           </a:xfrm>
           <a:prstGeom prst="roundRect">
             <a:avLst>
@@ -1515,7 +1515,7 @@
               <a:buNone/>
             </a:pPr>
             <a:r>
-              <a:rPr lang="en-US" sz="670" b="1" dirty="0">
+              <a:rPr lang="en-US" sz="837" b="1" dirty="0">
                 <a:solidFill>
                   <a:srgbClr val="FFFFFF"/>
                 </a:solidFill>
@@ -1532,7 +1532,7 @@
               <a:buNone/>
             </a:pPr>
             <a:r>
-              <a:rPr lang="en-US" sz="470" dirty="0">
+              <a:rPr lang="en-US" sz="587" dirty="0">
                 <a:solidFill>
                   <a:srgbClr val="FFFFFF"/>
                 </a:solidFill>
@@ -1542,7 +1542,7 @@
               </a:rPr>
               <a:t>EXECUTION</a:t>
             </a:r>
-            <a:endParaRPr lang="en-US" sz="670" dirty="0"/>
+            <a:endParaRPr lang="en-US" sz="837" dirty="0"/>
           </a:p>
         </p:txBody>
       </p:sp>
@@ -1554,8 +1554,8 @@
         </p:nvSpPr>
         <p:spPr>
           <a:xfrm>
-            <a:off x="7584422" y="2946023"/>
-            <a:ext cx="2039588" cy="316706"/>
+            <a:off x="7584422" y="2465348"/>
+            <a:ext cx="2039588" cy="631901"/>
           </a:xfrm>
           <a:prstGeom prst="roundRect">
             <a:avLst>
@@ -1577,7 +1577,7 @@
               <a:buNone/>
             </a:pPr>
             <a:r>
-              <a:rPr lang="en-US" sz="670" b="1" dirty="0">
+              <a:rPr lang="en-US" sz="837" b="1" dirty="0">
                 <a:solidFill>
                   <a:srgbClr val="FFFFFF"/>
                 </a:solidFill>
@@ -1594,7 +1594,7 @@
               <a:buNone/>
             </a:pPr>
             <a:r>
-              <a:rPr lang="en-US" sz="470" dirty="0">
+              <a:rPr lang="en-US" sz="587" dirty="0">
                 <a:solidFill>
                   <a:srgbClr val="FFFFFF"/>
                 </a:solidFill>
@@ -1604,7 +1604,7 @@
               </a:rPr>
               <a:t>报告 / 报表</a:t>
             </a:r>
-            <a:endParaRPr lang="en-US" sz="670" dirty="0"/>
+            <a:endParaRPr lang="en-US" sz="837" dirty="0"/>
           </a:p>
         </p:txBody>
       </p:sp>
@@ -1616,8 +1616,8 @@
         </p:nvSpPr>
         <p:spPr>
           <a:xfrm>
-            <a:off x="9715212" y="2946023"/>
-            <a:ext cx="2039588" cy="316706"/>
+            <a:off x="9715212" y="2465348"/>
+            <a:ext cx="2039588" cy="631901"/>
           </a:xfrm>
           <a:prstGeom prst="roundRect">
             <a:avLst>
@@ -1639,7 +1639,7 @@
               <a:buNone/>
             </a:pPr>
             <a:r>
-              <a:rPr lang="en-US" sz="670" b="1" dirty="0">
+              <a:rPr lang="en-US" sz="837" b="1" dirty="0">
                 <a:solidFill>
                   <a:srgbClr val="FFFFFF"/>
                 </a:solidFill>
@@ -1656,7 +1656,7 @@
               <a:buNone/>
             </a:pPr>
             <a:r>
-              <a:rPr lang="en-US" sz="470" dirty="0">
+              <a:rPr lang="en-US" sz="587" dirty="0">
                 <a:solidFill>
                   <a:srgbClr val="FFFFFF"/>
                 </a:solidFill>
@@ -1666,7 +1666,7 @@
               </a:rPr>
               <a:t>ASSETS</a:t>
             </a:r>
-            <a:endParaRPr lang="en-US" sz="670" dirty="0"/>
+            <a:endParaRPr lang="en-US" sz="837" dirty="0"/>
           </a:p>
         </p:txBody>
       </p:sp>
@@ -1678,8 +1678,8 @@
         </p:nvSpPr>
         <p:spPr>
           <a:xfrm>
-            <a:off x="405384" y="3620607"/>
-            <a:ext cx="291370" cy="538401"/>
+            <a:off x="405384" y="3811300"/>
+            <a:ext cx="291370" cy="1074234"/>
           </a:xfrm>
           <a:prstGeom prst="roundRect">
             <a:avLst>
@@ -1701,7 +1701,7 @@
               <a:buNone/>
             </a:pPr>
             <a:r>
-              <a:rPr lang="en-US" sz="620" b="1" spc="150" kern="0" dirty="0">
+              <a:rPr lang="en-US" sz="775" b="1" spc="150" kern="0" dirty="0">
                 <a:solidFill>
                   <a:srgbClr val="FFFFFF"/>
                 </a:solidFill>
@@ -1711,7 +1711,7 @@
               </a:rPr>
               <a:t>测试需求</a:t>
             </a:r>
-            <a:endParaRPr lang="en-US" sz="620" dirty="0"/>
+            <a:endParaRPr lang="en-US" sz="775" dirty="0"/>
           </a:p>
         </p:txBody>
       </p:sp>
@@ -1727,7 +1727,7 @@
           <a:blip r:embed="rId1">
             <a:extLst>
               <a:ext uri="{96DAC541-7B7A-43D3-8B79-37D633B846F1}">
-                <asvg:svgBlip xmlns:asvg="http://schemas.microsoft.com/office/drawing/2016/SVG/main" r:embed="rId2"/>
+                <ns3:svgBlip r:embed="rId2"/>
               </a:ext>
             </a:extLst>
           </a:blip>
@@ -1737,7 +1737,7 @@
         </p:blipFill>
         <p:spPr>
           <a:xfrm>
-            <a:off x="405384" y="3351407"/>
+            <a:off x="405384" y="3810017"/>
             <a:ext cx="696754" cy="1076801"/>
           </a:xfrm>
           <a:prstGeom prst="rect">
@@ -1753,8 +1753,8 @@
         </p:nvSpPr>
         <p:spPr>
           <a:xfrm>
-            <a:off x="1191013" y="3378030"/>
-            <a:ext cx="817102" cy="120348"/>
+            <a:off x="1191013" y="3327303"/>
+            <a:ext cx="817102" cy="240122"/>
           </a:xfrm>
           <a:prstGeom prst="roundRect">
             <a:avLst>
@@ -1776,7 +1776,7 @@
               <a:buNone/>
             </a:pPr>
             <a:r>
-              <a:rPr lang="en-US" sz="550" b="1" dirty="0">
+              <a:rPr lang="en-US" sz="687" b="1" dirty="0">
                 <a:solidFill>
                   <a:srgbClr val="FFFFFF"/>
                 </a:solidFill>
@@ -1786,7 +1786,7 @@
               </a:rPr>
               <a:t>1 期计划（当前项目）</a:t>
             </a:r>
-            <a:endParaRPr lang="en-US" sz="550" dirty="0"/>
+            <a:endParaRPr lang="en-US" sz="687" dirty="0"/>
           </a:p>
         </p:txBody>
       </p:sp>
@@ -1798,8 +1798,8 @@
         </p:nvSpPr>
         <p:spPr>
           <a:xfrm>
-            <a:off x="1190172" y="3535097"/>
-            <a:ext cx="4174188" cy="272367"/>
+            <a:off x="1190172" y="3640688"/>
+            <a:ext cx="4174188" cy="543435"/>
           </a:xfrm>
           <a:prstGeom prst="roundRect">
             <a:avLst>
@@ -1829,7 +1829,7 @@
               <a:buNone/>
             </a:pPr>
             <a:r>
-              <a:rPr lang="en-US" sz="550" b="1" dirty="0">
+              <a:rPr lang="en-US" sz="687" b="1" dirty="0">
                 <a:solidFill>
                   <a:srgbClr val="356B41"/>
                 </a:solidFill>
@@ -1842,7 +1842,7 @@
             <a:pPr algn="ctr" indent="0" marL="0">
               <a:buNone/>
             </a:pPr>
-            <a:endParaRPr lang="en-US" sz="550" dirty="0"/>
+            <a:endParaRPr lang="en-US" sz="687" dirty="0"/>
           </a:p>
           <a:p>
             <a:pPr algn="ctr" indent="0" marL="0">
@@ -1852,7 +1852,7 @@
               <a:buNone/>
             </a:pPr>
             <a:r>
-              <a:rPr lang="en-US" sz="500" dirty="0">
+              <a:rPr lang="en-US" sz="625" dirty="0">
                 <a:solidFill>
                   <a:srgbClr val="356B41"/>
                 </a:solidFill>
@@ -1862,7 +1862,7 @@
               </a:rPr>
               <a:t>替代「需求文档 + 测试设计」的方案</a:t>
             </a:r>
-            <a:endParaRPr lang="en-US" sz="550" dirty="0"/>
+            <a:endParaRPr lang="en-US" sz="687" dirty="0"/>
           </a:p>
         </p:txBody>
       </p:sp>
@@ -1874,8 +1874,8 @@
         </p:nvSpPr>
         <p:spPr>
           <a:xfrm>
-            <a:off x="5453632" y="3455920"/>
-            <a:ext cx="2039588" cy="272367"/>
+            <a:off x="5453632" y="3482711"/>
+            <a:ext cx="2039588" cy="543435"/>
           </a:xfrm>
           <a:prstGeom prst="roundRect">
             <a:avLst>
@@ -1905,7 +1905,7 @@
               <a:buNone/>
             </a:pPr>
             <a:r>
-              <a:rPr lang="en-US" sz="550" b="1" dirty="0">
+              <a:rPr lang="en-US" sz="687" b="1" dirty="0">
                 <a:solidFill>
                   <a:srgbClr val="356B41"/>
                 </a:solidFill>
@@ -1918,7 +1918,7 @@
             <a:pPr algn="ctr" indent="0" marL="0">
               <a:buNone/>
             </a:pPr>
-            <a:endParaRPr lang="en-US" sz="550" dirty="0"/>
+            <a:endParaRPr lang="en-US" sz="687" dirty="0"/>
           </a:p>
           <a:p>
             <a:pPr algn="ctr" indent="0" marL="0">
@@ -1928,7 +1928,7 @@
               <a:buNone/>
             </a:pPr>
             <a:r>
-              <a:rPr lang="en-US" sz="500" dirty="0">
+              <a:rPr lang="en-US" sz="625" dirty="0">
                 <a:solidFill>
                   <a:srgbClr val="1F2A24"/>
                 </a:solidFill>
@@ -1938,7 +1938,7 @@
               </a:rPr>
               <a:t>ReAct·护栏·AI自愈 + 确定性断言判定（规则引擎·非眼判）</a:t>
             </a:r>
-            <a:endParaRPr lang="en-US" sz="550" dirty="0"/>
+            <a:endParaRPr lang="en-US" sz="687" dirty="0"/>
           </a:p>
         </p:txBody>
       </p:sp>
@@ -1950,8 +1950,8 @@
         </p:nvSpPr>
         <p:spPr>
           <a:xfrm>
-            <a:off x="7584422" y="3455920"/>
-            <a:ext cx="2039588" cy="272367"/>
+            <a:off x="7584422" y="3482711"/>
+            <a:ext cx="2039588" cy="543435"/>
           </a:xfrm>
           <a:prstGeom prst="roundRect">
             <a:avLst>
@@ -1981,7 +1981,7 @@
               <a:buNone/>
             </a:pPr>
             <a:r>
-              <a:rPr lang="en-US" sz="550" b="1" dirty="0">
+              <a:rPr lang="en-US" sz="687" b="1" dirty="0">
                 <a:solidFill>
                   <a:srgbClr val="356B41"/>
                 </a:solidFill>
@@ -1994,7 +1994,7 @@
             <a:pPr algn="ctr" indent="0" marL="0">
               <a:buNone/>
             </a:pPr>
-            <a:endParaRPr lang="en-US" sz="550" dirty="0"/>
+            <a:endParaRPr lang="en-US" sz="687" dirty="0"/>
           </a:p>
           <a:p>
             <a:pPr algn="ctr" indent="0" marL="0">
@@ -2004,7 +2004,7 @@
               <a:buNone/>
             </a:pPr>
             <a:r>
-              <a:rPr lang="en-US" sz="500" dirty="0">
+              <a:rPr lang="en-US" sz="625" dirty="0">
                 <a:solidFill>
                   <a:srgbClr val="1F2A24"/>
                 </a:solidFill>
@@ -2014,7 +2014,7 @@
               </a:rPr>
               <a:t>通过率·断言详情·截图</a:t>
             </a:r>
-            <a:endParaRPr lang="en-US" sz="550" dirty="0"/>
+            <a:endParaRPr lang="en-US" sz="687" dirty="0"/>
           </a:p>
         </p:txBody>
       </p:sp>
@@ -2026,8 +2026,8 @@
         </p:nvSpPr>
         <p:spPr>
           <a:xfrm>
-            <a:off x="9715212" y="3455920"/>
-            <a:ext cx="2039588" cy="272367"/>
+            <a:off x="9715212" y="3482711"/>
+            <a:ext cx="2039588" cy="543435"/>
           </a:xfrm>
           <a:prstGeom prst="roundRect">
             <a:avLst>
@@ -2057,7 +2057,7 @@
               <a:buNone/>
             </a:pPr>
             <a:r>
-              <a:rPr lang="en-US" sz="550" b="1" dirty="0">
+              <a:rPr lang="en-US" sz="687" b="1" dirty="0">
                 <a:solidFill>
                   <a:srgbClr val="356B41"/>
                 </a:solidFill>
@@ -2070,7 +2070,7 @@
             <a:pPr algn="ctr" indent="0" marL="0">
               <a:buNone/>
             </a:pPr>
-            <a:endParaRPr lang="en-US" sz="550" dirty="0"/>
+            <a:endParaRPr lang="en-US" sz="687" dirty="0"/>
           </a:p>
           <a:p>
             <a:pPr algn="ctr" indent="0" marL="0">
@@ -2080,7 +2080,7 @@
               <a:buNone/>
             </a:pPr>
             <a:r>
-              <a:rPr lang="en-US" sz="500" dirty="0">
+              <a:rPr lang="en-US" sz="625" dirty="0">
                 <a:solidFill>
                   <a:srgbClr val="1F2A24"/>
                 </a:solidFill>
@@ -2090,7 +2090,7 @@
               </a:rPr>
               <a:t>pytest-bdd + 词汇表沉淀</a:t>
             </a:r>
-            <a:endParaRPr lang="en-US" sz="550" dirty="0"/>
+            <a:endParaRPr lang="en-US" sz="687" dirty="0"/>
           </a:p>
         </p:txBody>
       </p:sp>
@@ -2102,8 +2102,8 @@
         </p:nvSpPr>
         <p:spPr>
           <a:xfrm>
-            <a:off x="1190816" y="3973438"/>
-            <a:ext cx="475059" cy="120348"/>
+            <a:off x="1190816" y="4515279"/>
+            <a:ext cx="475059" cy="240122"/>
           </a:xfrm>
           <a:prstGeom prst="roundRect">
             <a:avLst>
@@ -2125,7 +2125,7 @@
               <a:buNone/>
             </a:pPr>
             <a:r>
-              <a:rPr lang="en-US" sz="550" b="1" dirty="0">
+              <a:rPr lang="en-US" sz="687" b="1" dirty="0">
                 <a:solidFill>
                   <a:srgbClr val="828D85"/>
                 </a:solidFill>
@@ -2135,7 +2135,7 @@
               </a:rPr>
               <a:t>目标工作流</a:t>
             </a:r>
-            <a:endParaRPr lang="en-US" sz="550" dirty="0"/>
+            <a:endParaRPr lang="en-US" sz="687" dirty="0"/>
           </a:p>
         </p:txBody>
       </p:sp>
@@ -2147,8 +2147,8 @@
         </p:nvSpPr>
         <p:spPr>
           <a:xfrm>
-            <a:off x="1192053" y="4130504"/>
-            <a:ext cx="2039588" cy="272367"/>
+            <a:off x="1192053" y="4828662"/>
+            <a:ext cx="2039588" cy="543435"/>
           </a:xfrm>
           <a:prstGeom prst="roundRect">
             <a:avLst>
@@ -2178,7 +2178,7 @@
               <a:buNone/>
             </a:pPr>
             <a:r>
-              <a:rPr lang="en-US" sz="550" dirty="0">
+              <a:rPr lang="en-US" sz="687" dirty="0">
                 <a:solidFill>
                   <a:srgbClr val="76817A"/>
                 </a:solidFill>
@@ -2191,7 +2191,7 @@
             <a:pPr algn="ctr" indent="0" marL="0">
               <a:buNone/>
             </a:pPr>
-            <a:endParaRPr lang="en-US" sz="550" dirty="0"/>
+            <a:endParaRPr lang="en-US" sz="687" dirty="0"/>
           </a:p>
           <a:p>
             <a:pPr algn="ctr" indent="0" marL="0">
@@ -2201,7 +2201,7 @@
               <a:buNone/>
             </a:pPr>
             <a:r>
-              <a:rPr lang="en-US" sz="500" dirty="0">
+              <a:rPr lang="en-US" sz="625" dirty="0">
                 <a:solidFill>
                   <a:srgbClr val="76817A"/>
                 </a:solidFill>
@@ -2211,7 +2211,7 @@
               </a:rPr>
               <a:t>baseUrl · 登录aw · api docs</a:t>
             </a:r>
-            <a:endParaRPr lang="en-US" sz="550" dirty="0"/>
+            <a:endParaRPr lang="en-US" sz="687" dirty="0"/>
           </a:p>
         </p:txBody>
       </p:sp>
@@ -2223,8 +2223,8 @@
         </p:nvSpPr>
         <p:spPr>
           <a:xfrm>
-            <a:off x="3322842" y="3946815"/>
-            <a:ext cx="2039588" cy="481394"/>
+            <a:off x="3322842" y="4462160"/>
+            <a:ext cx="2039588" cy="960492"/>
           </a:xfrm>
           <a:prstGeom prst="roundRect">
             <a:avLst>
@@ -2250,8 +2250,8 @@
         </p:nvSpPr>
         <p:spPr>
           <a:xfrm>
-            <a:off x="3373515" y="3991154"/>
-            <a:ext cx="1938242" cy="88678"/>
+            <a:off x="3373515" y="4550627"/>
+            <a:ext cx="1938242" cy="176933"/>
           </a:xfrm>
           <a:prstGeom prst="rect">
             <a:avLst/>
@@ -2268,7 +2268,7 @@
               <a:buNone/>
             </a:pPr>
             <a:r>
-              <a:rPr lang="en-US" sz="500" b="1" dirty="0">
+              <a:rPr lang="en-US" sz="625" b="1" dirty="0">
                 <a:solidFill>
                   <a:srgbClr val="76817A"/>
                 </a:solidFill>
@@ -2278,7 +2278,7 @@
               </a:rPr>
               <a:t>测试点 / 用例设计</a:t>
             </a:r>
-            <a:endParaRPr lang="en-US" sz="500" dirty="0"/>
+            <a:endParaRPr lang="en-US" sz="625" dirty="0"/>
           </a:p>
         </p:txBody>
       </p:sp>
@@ -2290,8 +2290,8 @@
         </p:nvSpPr>
         <p:spPr>
           <a:xfrm>
-            <a:off x="3373515" y="4105168"/>
-            <a:ext cx="1938242" cy="126683"/>
+            <a:off x="3373515" y="4778111"/>
+            <a:ext cx="1938242" cy="252761"/>
           </a:xfrm>
           <a:prstGeom prst="roundRect">
             <a:avLst>
@@ -2321,7 +2321,7 @@
               <a:buNone/>
             </a:pPr>
             <a:r>
-              <a:rPr lang="en-US" sz="500" dirty="0">
+              <a:rPr lang="en-US" sz="625" dirty="0">
                 <a:solidFill>
                   <a:srgbClr val="6C776F"/>
                 </a:solidFill>
@@ -2331,7 +2331,7 @@
               </a:rPr>
               <a:t>xmind 测试点设计</a:t>
             </a:r>
-            <a:endParaRPr lang="en-US" sz="500" dirty="0"/>
+            <a:endParaRPr lang="en-US" sz="625" dirty="0"/>
           </a:p>
         </p:txBody>
       </p:sp>
@@ -2343,8 +2343,8 @@
         </p:nvSpPr>
         <p:spPr>
           <a:xfrm>
-            <a:off x="3373515" y="4257187"/>
-            <a:ext cx="1938242" cy="126683"/>
+            <a:off x="3373515" y="5081424"/>
+            <a:ext cx="1938242" cy="252761"/>
           </a:xfrm>
           <a:prstGeom prst="roundRect">
             <a:avLst>
@@ -2374,7 +2374,7 @@
               <a:buNone/>
             </a:pPr>
             <a:r>
-              <a:rPr lang="en-US" sz="500" dirty="0">
+              <a:rPr lang="en-US" sz="625" dirty="0">
                 <a:solidFill>
                   <a:srgbClr val="6C776F"/>
                 </a:solidFill>
@@ -2384,7 +2384,7 @@
               </a:rPr>
               <a:t>测试用例设计 + 审核</a:t>
             </a:r>
-            <a:endParaRPr lang="en-US" sz="500" dirty="0"/>
+            <a:endParaRPr lang="en-US" sz="625" dirty="0"/>
           </a:p>
         </p:txBody>
       </p:sp>
@@ -2396,8 +2396,8 @@
         </p:nvSpPr>
         <p:spPr>
           <a:xfrm>
-            <a:off x="5453632" y="4051328"/>
-            <a:ext cx="2039588" cy="272367"/>
+            <a:off x="5453632" y="4670688"/>
+            <a:ext cx="2039588" cy="543435"/>
           </a:xfrm>
           <a:prstGeom prst="roundRect">
             <a:avLst>
@@ -2427,7 +2427,7 @@
               <a:buNone/>
             </a:pPr>
             <a:r>
-              <a:rPr lang="en-US" sz="550" dirty="0">
+              <a:rPr lang="en-US" sz="687" dirty="0">
                 <a:solidFill>
                   <a:srgbClr val="76817A"/>
                 </a:solidFill>
@@ -2440,7 +2440,7 @@
             <a:pPr algn="ctr" indent="0" marL="0">
               <a:buNone/>
             </a:pPr>
-            <a:endParaRPr lang="en-US" sz="550" dirty="0"/>
+            <a:endParaRPr lang="en-US" sz="687" dirty="0"/>
           </a:p>
           <a:p>
             <a:pPr algn="ctr" indent="0" marL="0">
@@ -2450,7 +2450,7 @@
               <a:buNone/>
             </a:pPr>
             <a:r>
-              <a:rPr lang="en-US" sz="550" dirty="0">
+              <a:rPr lang="en-US" sz="687" dirty="0">
                 <a:solidFill>
                   <a:srgbClr val="76817A"/>
                 </a:solidFill>
@@ -2460,7 +2460,7 @@
               </a:rPr>
               <a:t>代码生成 → 下发执行机</a:t>
             </a:r>
-            <a:endParaRPr lang="en-US" sz="550" dirty="0"/>
+            <a:endParaRPr lang="en-US" sz="687" dirty="0"/>
           </a:p>
         </p:txBody>
       </p:sp>
@@ -2472,8 +2472,8 @@
         </p:nvSpPr>
         <p:spPr>
           <a:xfrm>
-            <a:off x="7584422" y="4098784"/>
-            <a:ext cx="2039588" cy="177355"/>
+            <a:off x="7584422" y="4765374"/>
+            <a:ext cx="2039588" cy="353864"/>
           </a:xfrm>
           <a:prstGeom prst="roundRect">
             <a:avLst>
@@ -2503,7 +2503,7 @@
               <a:buNone/>
             </a:pPr>
             <a:r>
-              <a:rPr lang="en-US" sz="550" dirty="0">
+              <a:rPr lang="en-US" sz="687" dirty="0">
                 <a:solidFill>
                   <a:srgbClr val="76817A"/>
                 </a:solidFill>
@@ -2513,7 +2513,7 @@
               </a:rPr>
               <a:t>结果判定 → 测试报告</a:t>
             </a:r>
-            <a:endParaRPr lang="en-US" sz="550" dirty="0"/>
+            <a:endParaRPr lang="en-US" sz="687" dirty="0"/>
           </a:p>
         </p:txBody>
       </p:sp>
@@ -2525,8 +2525,8 @@
         </p:nvSpPr>
         <p:spPr>
           <a:xfrm>
-            <a:off x="9715212" y="4098784"/>
-            <a:ext cx="2039588" cy="177355"/>
+            <a:off x="9715212" y="4765374"/>
+            <a:ext cx="2039588" cy="353864"/>
           </a:xfrm>
           <a:prstGeom prst="roundRect">
             <a:avLst>
@@ -2556,7 +2556,7 @@
               <a:buNone/>
             </a:pPr>
             <a:r>
-              <a:rPr lang="en-US" sz="550" dirty="0">
+              <a:rPr lang="en-US" sz="687" dirty="0">
                 <a:solidFill>
                   <a:srgbClr val="76817A"/>
                 </a:solidFill>
@@ -2566,7 +2566,7 @@
               </a:rPr>
               <a:t>结果回传 / 资产</a:t>
             </a:r>
-            <a:endParaRPr lang="en-US" sz="550" dirty="0"/>
+            <a:endParaRPr lang="en-US" sz="687" dirty="0"/>
           </a:p>
         </p:txBody>
       </p:sp>
@@ -2578,7 +2578,7 @@
         </p:nvSpPr>
         <p:spPr>
           <a:xfrm>
-            <a:off x="405384" y="4494717"/>
+            <a:off x="405384" y="5593176"/>
             <a:ext cx="114014" cy="76010"/>
           </a:xfrm>
           <a:prstGeom prst="roundRect">
@@ -2605,8 +2605,8 @@
         </p:nvSpPr>
         <p:spPr>
           <a:xfrm>
-            <a:off x="563836" y="4485215"/>
-            <a:ext cx="722090" cy="95012"/>
+            <a:off x="563836" y="5536393"/>
+            <a:ext cx="722090" cy="189570"/>
           </a:xfrm>
           <a:prstGeom prst="rect">
             <a:avLst/>
@@ -2623,7 +2623,7 @@
               <a:buNone/>
             </a:pPr>
             <a:r>
-              <a:rPr lang="en-US" sz="570" b="1" dirty="0">
+              <a:rPr lang="en-US" sz="712" b="1" dirty="0">
                 <a:solidFill>
                   <a:srgbClr val="356B41"/>
                 </a:solidFill>
@@ -2633,7 +2633,7 @@
               </a:rPr>
               <a:t>1 期计划（当前项目）</a:t>
             </a:r>
-            <a:endParaRPr lang="en-US" sz="570" dirty="0"/>
+            <a:endParaRPr lang="en-US" sz="712" dirty="0"/>
           </a:p>
         </p:txBody>
       </p:sp>
@@ -2645,7 +2645,7 @@
         </p:nvSpPr>
         <p:spPr>
           <a:xfrm>
-            <a:off x="1425376" y="4494717"/>
+            <a:off x="1425376" y="5593176"/>
             <a:ext cx="114014" cy="76010"/>
           </a:xfrm>
           <a:prstGeom prst="roundRect">
@@ -2672,8 +2672,8 @@
         </p:nvSpPr>
         <p:spPr>
           <a:xfrm>
-            <a:off x="1583729" y="4485215"/>
-            <a:ext cx="2103028" cy="95012"/>
+            <a:off x="1583729" y="5536393"/>
+            <a:ext cx="2103028" cy="189570"/>
           </a:xfrm>
           <a:prstGeom prst="rect">
             <a:avLst/>
@@ -2691,7 +2691,7 @@
               <a:buNone/>
             </a:pPr>
             <a:r>
-              <a:rPr lang="en-US" sz="570" dirty="0">
+              <a:rPr lang="en-US" sz="712" dirty="0">
                 <a:solidFill>
                   <a:srgbClr val="52605A"/>
                 </a:solidFill>
@@ -2701,7 +2701,7 @@
               </a:rPr>
               <a:t>目标工作流（愿景 · 含接口分支 / 需求→测试设计 / 下发执行机）</a:t>
             </a:r>
-            <a:endParaRPr lang="en-US" sz="570" dirty="0"/>
+            <a:endParaRPr lang="en-US" sz="712" dirty="0"/>
           </a:p>
         </p:txBody>
       </p:sp>
@@ -2713,8 +2713,8 @@
         </p:nvSpPr>
         <p:spPr>
           <a:xfrm>
-            <a:off x="9103325" y="4485215"/>
-            <a:ext cx="2653998" cy="95012"/>
+            <a:off x="9103325" y="5536393"/>
+            <a:ext cx="2653998" cy="189570"/>
           </a:xfrm>
           <a:prstGeom prst="rect">
             <a:avLst/>
@@ -2731,7 +2731,7 @@
               <a:buNone/>
             </a:pPr>
             <a:r>
-              <a:rPr lang="en-US" sz="570" b="1" dirty="0">
+              <a:rPr lang="en-US" sz="712" b="1" dirty="0">
                 <a:solidFill>
                   <a:srgbClr val="356B41"/>
                 </a:solidFill>
@@ -2741,7 +2741,7 @@
               </a:rPr>
               <a:t>1 期以 Excel 用例导入替代「需求 + 测试设计」，打通「执行→评估→资产」闭环</a:t>
             </a:r>
-            <a:endParaRPr lang="en-US" sz="570" dirty="0"/>
+            <a:endParaRPr lang="en-US" sz="712" dirty="0"/>
           </a:p>
         </p:txBody>
       </p:sp>
@@ -2753,7 +2753,7 @@
         </p:nvSpPr>
         <p:spPr>
           <a:xfrm>
-            <a:off x="403850" y="8491549"/>
+            <a:off x="403850" y="6498000"/>
             <a:ext cx="1146477" cy="95012"/>
           </a:xfrm>
           <a:prstGeom prst="rect">
@@ -2771,7 +2771,7 @@
               <a:buNone/>
             </a:pPr>
             <a:r>
-              <a:rPr lang="en-US" sz="550" dirty="0">
+              <a:rPr lang="en-US" sz="687" dirty="0">
                 <a:solidFill>
                   <a:srgbClr val="8A948E"/>
                 </a:solidFill>
@@ -2781,7 +2781,7 @@
               </a:rPr>
               <a:t>T-Agent 进展汇报 · 第 1 页 / 共 4 页</a:t>
             </a:r>
-            <a:endParaRPr lang="en-US" sz="550" dirty="0"/>
+            <a:endParaRPr lang="en-US" sz="687" dirty="0"/>
           </a:p>
         </p:txBody>
       </p:sp>
@@ -2794,7 +2794,7 @@
 </file>
 
 <file path=ppt/slides/slide2.xml><?xml version="1.0" encoding="utf-8"?>
-<p:sld xmlns:a="http://schemas.openxmlformats.org/drawingml/2006/main" xmlns:r="http://schemas.openxmlformats.org/officeDocument/2006/relationships" xmlns:p="http://schemas.openxmlformats.org/presentationml/2006/main">
+<p:sld xmlns:a="http://schemas.openxmlformats.org/drawingml/2006/main" xmlns:ns2="http://schemas.microsoft.com/office/powerpoint/2010/main" xmlns:ns4="http://schemas.microsoft.com/office/drawing/2016/SVG/main" xmlns:p="http://schemas.openxmlformats.org/presentationml/2006/main" xmlns:r="http://schemas.openxmlformats.org/officeDocument/2006/relationships">
   <p:cSld name="Slide 2">
     <p:spTree>
       <p:nvGrpSpPr>
@@ -2818,8 +2818,8 @@
         </p:nvSpPr>
         <p:spPr>
           <a:xfrm>
-            <a:off x="0" y="965025"/>
-            <a:ext cx="12161520" cy="4927949"/>
+            <a:off x="0" y="320040"/>
+            <a:ext cx="12161520" cy="6217920"/>
           </a:xfrm>
           <a:prstGeom prst="rect">
             <a:avLst/>
@@ -2838,8 +2838,8 @@
         </p:nvSpPr>
         <p:spPr>
           <a:xfrm>
-            <a:off x="405384" y="1256395"/>
-            <a:ext cx="11350752" cy="120348"/>
+            <a:off x="405384" y="687680"/>
+            <a:ext cx="11350752" cy="151851"/>
           </a:xfrm>
           <a:prstGeom prst="rect">
             <a:avLst/>
@@ -2856,7 +2856,7 @@
               <a:buNone/>
             </a:pPr>
             <a:r>
-              <a:rPr lang="en-US" sz="700" b="1" spc="100" kern="0" dirty="0">
+              <a:rPr lang="en-US" sz="875" b="1" spc="100" kern="0" dirty="0">
                 <a:solidFill>
                   <a:srgbClr val="478D54"/>
                 </a:solidFill>
@@ -2866,7 +2866,7 @@
               </a:rPr>
               <a:t>调研与技术路线</a:t>
             </a:r>
-            <a:endParaRPr lang="en-US" sz="700" dirty="0"/>
+            <a:endParaRPr lang="en-US" sz="875" dirty="0"/>
           </a:p>
         </p:txBody>
       </p:sp>
@@ -2878,8 +2878,8 @@
         </p:nvSpPr>
         <p:spPr>
           <a:xfrm>
-            <a:off x="405384" y="1402080"/>
-            <a:ext cx="11350752" cy="253365"/>
+            <a:off x="405384" y="871501"/>
+            <a:ext cx="11350752" cy="319687"/>
           </a:xfrm>
           <a:prstGeom prst="rect">
             <a:avLst/>
@@ -2899,7 +2899,7 @@
               <a:buNone/>
             </a:pPr>
             <a:r>
-              <a:rPr lang="en-US" sz="1500" b="1" dirty="0">
+              <a:rPr lang="en-US" sz="1875" b="1" dirty="0">
                 <a:solidFill>
                   <a:srgbClr val="1F2A24"/>
                 </a:solidFill>
@@ -2909,7 +2909,7 @@
               </a:rPr>
               <a:t>openclaw 试点效果 &amp; 路线选择</a:t>
             </a:r>
-            <a:endParaRPr lang="en-US" sz="1500" dirty="0"/>
+            <a:endParaRPr lang="en-US" sz="1875" dirty="0"/>
           </a:p>
         </p:txBody>
       </p:sp>
@@ -2921,8 +2921,8 @@
         </p:nvSpPr>
         <p:spPr>
           <a:xfrm>
-            <a:off x="405384" y="1731455"/>
-            <a:ext cx="380048" cy="25337"/>
+            <a:off x="405384" y="1287095"/>
+            <a:ext cx="380048" cy="31969"/>
           </a:xfrm>
           <a:prstGeom prst="roundRect">
             <a:avLst>
@@ -2943,8 +2943,8 @@
         </p:nvSpPr>
         <p:spPr>
           <a:xfrm>
-            <a:off x="405384" y="1832801"/>
-            <a:ext cx="11350752" cy="120348"/>
+            <a:off x="405384" y="1414970"/>
+            <a:ext cx="11350752" cy="151851"/>
           </a:xfrm>
           <a:prstGeom prst="rect">
             <a:avLst/>
@@ -2964,7 +2964,7 @@
               <a:buNone/>
             </a:pPr>
             <a:r>
-              <a:rPr lang="en-US" sz="700" b="1" dirty="0">
+              <a:rPr lang="en-US" sz="875" b="1" dirty="0">
                 <a:solidFill>
                   <a:srgbClr val="356B41"/>
                 </a:solidFill>
@@ -2974,7 +2974,7 @@
               </a:rPr>
               <a:t>① openclaw 试点效果</a:t>
             </a:r>
-            <a:endParaRPr lang="en-US" sz="700" dirty="0"/>
+            <a:endParaRPr lang="en-US" sz="875" dirty="0"/>
           </a:p>
         </p:txBody>
       </p:sp>
@@ -2986,8 +2986,8 @@
         </p:nvSpPr>
         <p:spPr>
           <a:xfrm>
-            <a:off x="405681" y="2003822"/>
-            <a:ext cx="7499604" cy="1140143"/>
+            <a:off x="405681" y="1630759"/>
+            <a:ext cx="7499604" cy="1438594"/>
           </a:xfrm>
           <a:prstGeom prst="roundRect">
             <a:avLst>
@@ -3020,8 +3020,8 @@
         </p:nvSpPr>
         <p:spPr>
           <a:xfrm>
-            <a:off x="538698" y="2124170"/>
-            <a:ext cx="7233571" cy="101346"/>
+            <a:off x="538698" y="1782610"/>
+            <a:ext cx="7233571" cy="127874"/>
           </a:xfrm>
           <a:prstGeom prst="rect">
             <a:avLst/>
@@ -3038,7 +3038,7 @@
               <a:buNone/>
             </a:pPr>
             <a:r>
-              <a:rPr lang="en-US" sz="620" b="1" dirty="0">
+              <a:rPr lang="en-US" sz="775" b="1" dirty="0">
                 <a:solidFill>
                   <a:srgbClr val="356B41"/>
                 </a:solidFill>
@@ -3055,7 +3055,7 @@
               <a:buNone/>
             </a:pPr>
             <a:r>
-              <a:rPr lang="en-US" sz="620" dirty="0">
+              <a:rPr lang="en-US" sz="775" dirty="0">
                 <a:solidFill>
                   <a:srgbClr val="1F2A24"/>
                 </a:solidFill>
@@ -3069,7 +3069,7 @@
               <a:buNone/>
             </a:pPr>
             <a:r>
-              <a:rPr lang="en-US" sz="620" b="1" dirty="0">
+              <a:rPr lang="en-US" sz="775" b="1" dirty="0">
                 <a:solidFill>
                   <a:srgbClr val="1F2A24"/>
                 </a:solidFill>
@@ -3086,7 +3086,7 @@
               <a:buNone/>
             </a:pPr>
             <a:r>
-              <a:rPr lang="en-US" sz="620" dirty="0">
+              <a:rPr lang="en-US" sz="775" dirty="0">
                 <a:solidFill>
                   <a:srgbClr val="1F2A24"/>
                 </a:solidFill>
@@ -3096,7 +3096,7 @@
               </a:rPr>
               <a:t>。 试点方式：用其浏览器能力直接跑 Web 自动化用例。</a:t>
             </a:r>
-            <a:endParaRPr lang="en-US" sz="620" dirty="0"/>
+            <a:endParaRPr lang="en-US" sz="775" dirty="0"/>
           </a:p>
         </p:txBody>
       </p:sp>
@@ -3108,8 +3108,8 @@
         </p:nvSpPr>
         <p:spPr>
           <a:xfrm>
-            <a:off x="538698" y="2269855"/>
-            <a:ext cx="7233571" cy="120348"/>
+            <a:off x="538698" y="1966430"/>
+            <a:ext cx="7233571" cy="151851"/>
           </a:xfrm>
           <a:prstGeom prst="rect">
             <a:avLst/>
@@ -3132,7 +3132,7 @@
               <a:buNone/>
             </a:pPr>
             <a:r>
-              <a:rPr lang="en-US" sz="550" b="1" dirty="0">
+              <a:rPr lang="en-US" sz="687" b="1" dirty="0">
                 <a:solidFill>
                   <a:srgbClr val="FFFFFF"/>
                 </a:solidFill>
@@ -3152,7 +3152,7 @@
               <a:buNone/>
             </a:pPr>
             <a:r>
-              <a:rPr lang="en-US" sz="620" dirty="0">
+              <a:rPr lang="en-US" sz="775" dirty="0">
                 <a:solidFill>
                   <a:srgbClr val="1F2A24"/>
                 </a:solidFill>
@@ -3162,7 +3162,7 @@
               </a:rPr>
               <a:t>简单流程能跑通——AI 可自主操作浏览器完成点击/输入</a:t>
             </a:r>
-            <a:endParaRPr lang="en-US" sz="550" dirty="0"/>
+            <a:endParaRPr lang="en-US" sz="687" dirty="0"/>
           </a:p>
         </p:txBody>
       </p:sp>
@@ -3174,8 +3174,8 @@
         </p:nvSpPr>
         <p:spPr>
           <a:xfrm>
-            <a:off x="538698" y="2428208"/>
-            <a:ext cx="7233571" cy="120348"/>
+            <a:off x="538698" y="2166235"/>
+            <a:ext cx="7233571" cy="151851"/>
           </a:xfrm>
           <a:prstGeom prst="rect">
             <a:avLst/>
@@ -3198,7 +3198,7 @@
               <a:buNone/>
             </a:pPr>
             <a:r>
-              <a:rPr lang="en-US" sz="550" b="1" dirty="0">
+              <a:rPr lang="en-US" sz="687" b="1" dirty="0">
                 <a:solidFill>
                   <a:srgbClr val="FFFFFF"/>
                 </a:solidFill>
@@ -3218,7 +3218,7 @@
               <a:buNone/>
             </a:pPr>
             <a:r>
-              <a:rPr lang="en-US" sz="620" dirty="0">
+              <a:rPr lang="en-US" sz="775" dirty="0">
                 <a:solidFill>
                   <a:srgbClr val="1F2A24"/>
                 </a:solidFill>
@@ -3235,7 +3235,7 @@
               <a:buNone/>
             </a:pPr>
             <a:r>
-              <a:rPr lang="en-US" sz="620" b="1" dirty="0">
+              <a:rPr lang="en-US" sz="775" b="1" dirty="0">
                 <a:solidFill>
                   <a:srgbClr val="1F2A24"/>
                 </a:solidFill>
@@ -3245,7 +3245,7 @@
               </a:rPr>
               <a:t>不可复现</a:t>
             </a:r>
-            <a:endParaRPr lang="en-US" sz="550" dirty="0"/>
+            <a:endParaRPr lang="en-US" sz="687" dirty="0"/>
           </a:p>
         </p:txBody>
       </p:sp>
@@ -3257,8 +3257,8 @@
         </p:nvSpPr>
         <p:spPr>
           <a:xfrm>
-            <a:off x="538698" y="2586561"/>
-            <a:ext cx="7233571" cy="120348"/>
+            <a:off x="538698" y="2366039"/>
+            <a:ext cx="7233571" cy="151851"/>
           </a:xfrm>
           <a:prstGeom prst="rect">
             <a:avLst/>
@@ -3281,7 +3281,7 @@
               <a:buNone/>
             </a:pPr>
             <a:r>
-              <a:rPr lang="en-US" sz="550" b="1" dirty="0">
+              <a:rPr lang="en-US" sz="687" b="1" dirty="0">
                 <a:solidFill>
                   <a:srgbClr val="FFFFFF"/>
                 </a:solidFill>
@@ -3301,7 +3301,7 @@
               <a:buNone/>
             </a:pPr>
             <a:r>
-              <a:rPr lang="en-US" sz="620" dirty="0">
+              <a:rPr lang="en-US" sz="775" dirty="0">
                 <a:solidFill>
                   <a:srgbClr val="1F2A24"/>
                 </a:solidFill>
@@ -3318,7 +3318,7 @@
               <a:buNone/>
             </a:pPr>
             <a:r>
-              <a:rPr lang="en-US" sz="620" b="1" dirty="0">
+              <a:rPr lang="en-US" sz="775" b="1" dirty="0">
                 <a:solidFill>
                   <a:srgbClr val="1F2A24"/>
                 </a:solidFill>
@@ -3335,7 +3335,7 @@
               <a:buNone/>
             </a:pPr>
             <a:r>
-              <a:rPr lang="en-US" sz="620" dirty="0">
+              <a:rPr lang="en-US" sz="775" dirty="0">
                 <a:solidFill>
                   <a:srgbClr val="1F2A24"/>
                 </a:solidFill>
@@ -3345,7 +3345,7 @@
               </a:rPr>
               <a:t>，回归每次重烧算力</a:t>
             </a:r>
-            <a:endParaRPr lang="en-US" sz="550" dirty="0"/>
+            <a:endParaRPr lang="en-US" sz="687" dirty="0"/>
           </a:p>
         </p:txBody>
       </p:sp>
@@ -3357,8 +3357,8 @@
         </p:nvSpPr>
         <p:spPr>
           <a:xfrm>
-            <a:off x="538698" y="2744915"/>
-            <a:ext cx="7233571" cy="120348"/>
+            <a:off x="538698" y="2565845"/>
+            <a:ext cx="7233571" cy="151851"/>
           </a:xfrm>
           <a:prstGeom prst="rect">
             <a:avLst/>
@@ -3381,7 +3381,7 @@
               <a:buNone/>
             </a:pPr>
             <a:r>
-              <a:rPr lang="en-US" sz="550" b="1" dirty="0">
+              <a:rPr lang="en-US" sz="687" b="1" dirty="0">
                 <a:solidFill>
                   <a:srgbClr val="FFFFFF"/>
                 </a:solidFill>
@@ -3401,7 +3401,7 @@
               <a:buNone/>
             </a:pPr>
             <a:r>
-              <a:rPr lang="en-US" sz="620" dirty="0">
+              <a:rPr lang="en-US" sz="775" dirty="0">
                 <a:solidFill>
                   <a:srgbClr val="1F2A24"/>
                 </a:solidFill>
@@ -3418,7 +3418,7 @@
               <a:buNone/>
             </a:pPr>
             <a:r>
-              <a:rPr lang="en-US" sz="620" b="1" dirty="0">
+              <a:rPr lang="en-US" sz="775" b="1" dirty="0">
                 <a:solidFill>
                   <a:srgbClr val="1F2A24"/>
                 </a:solidFill>
@@ -3428,7 +3428,7 @@
               </a:rPr>
               <a:t>测试工程能力</a:t>
             </a:r>
-            <a:endParaRPr lang="en-US" sz="550" dirty="0"/>
+            <a:endParaRPr lang="en-US" sz="687" dirty="0"/>
           </a:p>
         </p:txBody>
       </p:sp>
@@ -3440,8 +3440,8 @@
         </p:nvSpPr>
         <p:spPr>
           <a:xfrm>
-            <a:off x="538698" y="2903268"/>
-            <a:ext cx="7233571" cy="120348"/>
+            <a:off x="538698" y="2765649"/>
+            <a:ext cx="7233571" cy="151851"/>
           </a:xfrm>
           <a:prstGeom prst="rect">
             <a:avLst/>
@@ -3464,7 +3464,7 @@
               <a:buNone/>
             </a:pPr>
             <a:r>
-              <a:rPr lang="en-US" sz="550" b="1" dirty="0">
+              <a:rPr lang="en-US" sz="687" b="1" dirty="0">
                 <a:solidFill>
                   <a:srgbClr val="FFFFFF"/>
                 </a:solidFill>
@@ -3484,7 +3484,7 @@
               <a:buNone/>
             </a:pPr>
             <a:r>
-              <a:rPr lang="en-US" sz="620" dirty="0">
+              <a:rPr lang="en-US" sz="775" dirty="0">
                 <a:solidFill>
                   <a:srgbClr val="1F2A24"/>
                 </a:solidFill>
@@ -3501,7 +3501,7 @@
               <a:buNone/>
             </a:pPr>
             <a:r>
-              <a:rPr lang="en-US" sz="620" b="1" dirty="0">
+              <a:rPr lang="en-US" sz="775" b="1" dirty="0">
                 <a:solidFill>
                   <a:srgbClr val="1F2A24"/>
                 </a:solidFill>
@@ -3511,7 +3511,7 @@
               </a:rPr>
               <a:t>内网部署与合规裁剪成本高</a:t>
             </a:r>
-            <a:endParaRPr lang="en-US" sz="550" dirty="0"/>
+            <a:endParaRPr lang="en-US" sz="687" dirty="0"/>
           </a:p>
         </p:txBody>
       </p:sp>
@@ -3523,8 +3523,8 @@
         </p:nvSpPr>
         <p:spPr>
           <a:xfrm>
-            <a:off x="8019299" y="2003822"/>
-            <a:ext cx="3737134" cy="1140143"/>
+            <a:off x="8019299" y="1630759"/>
+            <a:ext cx="3737134" cy="1438594"/>
           </a:xfrm>
           <a:prstGeom prst="roundRect">
             <a:avLst>
@@ -3551,7 +3551,7 @@
               <a:buNone/>
             </a:pPr>
             <a:r>
-              <a:rPr lang="en-US" sz="650" dirty="0">
+              <a:rPr lang="en-US" sz="812" dirty="0">
                 <a:solidFill>
                   <a:srgbClr val="8A948E"/>
                 </a:solidFill>
@@ -3561,7 +3561,7 @@
               </a:rPr>
               <a:t>试点录屏（待插入）</a:t>
             </a:r>
-            <a:endParaRPr lang="en-US" sz="650" dirty="0"/>
+            <a:endParaRPr lang="en-US" sz="812" dirty="0"/>
           </a:p>
         </p:txBody>
       </p:sp>
@@ -3573,8 +3573,8 @@
         </p:nvSpPr>
         <p:spPr>
           <a:xfrm>
-            <a:off x="405384" y="3232642"/>
-            <a:ext cx="11350752" cy="120348"/>
+            <a:off x="405384" y="3181242"/>
+            <a:ext cx="11350752" cy="151851"/>
           </a:xfrm>
           <a:prstGeom prst="rect">
             <a:avLst/>
@@ -3594,7 +3594,7 @@
               <a:buNone/>
             </a:pPr>
             <a:r>
-              <a:rPr lang="en-US" sz="700" b="1" dirty="0">
+              <a:rPr lang="en-US" sz="875" b="1" dirty="0">
                 <a:solidFill>
                   <a:srgbClr val="356B41"/>
                 </a:solidFill>
@@ -3604,7 +3604,7 @@
               </a:rPr>
               <a:t>② 基于 openclaw 二次开发　vs　自研 AI-Agent</a:t>
             </a:r>
-            <a:endParaRPr lang="en-US" sz="700" dirty="0"/>
+            <a:endParaRPr lang="en-US" sz="875" dirty="0"/>
           </a:p>
         </p:txBody>
       </p:sp>
@@ -3617,14 +3617,14 @@
           <p:nvPr>
             <p:extLst>
               <p:ext uri="{D42A27DB-BD31-4B8C-83A1-F6EECF244321}">
-                <p14:modId xmlns:p14="http://schemas.microsoft.com/office/powerpoint/2010/main" val="1579011935"/>
+                <ns2:modId val="1579011935"/>
               </p:ext>
             </p:extLst>
           </p:nvPr>
         </p:nvGraphicFramePr>
         <p:xfrm>
-          <a:off x="405384" y="3397329"/>
-          <a:ext cx="11350752" cy="914400"/>
+          <a:off x="405384" y="3389039"/>
+          <a:ext cx="11350752" cy="1153759"/>
         </p:xfrm>
         <a:graphic>
           <a:graphicData uri="http://schemas.openxmlformats.org/drawingml/2006/table">
@@ -3645,7 +3645,7 @@
                         <a:buNone/>
                       </a:pPr>
                       <a:r>
-                        <a:rPr lang="en-US" sz="640" b="1" dirty="0">
+                        <a:rPr lang="en-US" sz="800" b="1" dirty="0">
                           <a:solidFill>
                             <a:srgbClr val="FFFFFF"/>
                           </a:solidFill>
@@ -3658,7 +3658,7 @@
                         </a:rPr>
                         <a:t>维度</a:t>
                       </a:r>
-                      <a:endParaRPr lang="en-US" sz="640" dirty="0">
+                      <a:endParaRPr lang="en-US" sz="800" dirty="0">
                         <a:latin typeface="Microsoft YaHei" charset="0"/>
                         <a:ea typeface="Microsoft YaHei" charset="0"/>
                         <a:cs typeface="Microsoft YaHei" charset="0"/>
@@ -3716,7 +3716,7 @@
                         <a:buNone/>
                       </a:pPr>
                       <a:r>
-                        <a:rPr lang="en-US" sz="640" b="1" dirty="0">
+                        <a:rPr lang="en-US" sz="800" b="1" dirty="0">
                           <a:solidFill>
                             <a:srgbClr val="FFFFFF"/>
                           </a:solidFill>
@@ -3729,7 +3729,7 @@
                         </a:rPr>
                         <a:t>基于 openclaw 二次开发</a:t>
                       </a:r>
-                      <a:endParaRPr lang="en-US" sz="640" dirty="0">
+                      <a:endParaRPr lang="en-US" sz="800" dirty="0">
                         <a:latin typeface="Microsoft YaHei" charset="0"/>
                         <a:ea typeface="Microsoft YaHei" charset="0"/>
                         <a:cs typeface="Microsoft YaHei" charset="0"/>
@@ -3787,7 +3787,7 @@
                         <a:buNone/>
                       </a:pPr>
                       <a:r>
-                        <a:rPr lang="en-US" sz="640" b="1" dirty="0">
+                        <a:rPr lang="en-US" sz="800" b="1" dirty="0">
                           <a:solidFill>
                             <a:srgbClr val="FFFFFF"/>
                           </a:solidFill>
@@ -3800,7 +3800,7 @@
                         </a:rPr>
                         <a:t>自研 AI-Agent（T-Agent）</a:t>
                       </a:r>
-                      <a:endParaRPr lang="en-US" sz="640" dirty="0">
+                      <a:endParaRPr lang="en-US" sz="800" dirty="0">
                         <a:latin typeface="Microsoft YaHei" charset="0"/>
                         <a:ea typeface="Microsoft YaHei" charset="0"/>
                         <a:cs typeface="Microsoft YaHei" charset="0"/>
@@ -3860,7 +3860,7 @@
                         <a:buNone/>
                       </a:pPr>
                       <a:r>
-                        <a:rPr lang="en-US" sz="640" dirty="0">
+                        <a:rPr lang="en-US" sz="800" dirty="0">
                           <a:solidFill>
                             <a:srgbClr val="1F2A24"/>
                           </a:solidFill>
@@ -3870,7 +3870,7 @@
                         </a:rPr>
                         <a:t>起步速度</a:t>
                       </a:r>
-                      <a:endParaRPr lang="en-US" sz="640" dirty="0">
+                      <a:endParaRPr lang="en-US" sz="800" dirty="0">
                         <a:latin typeface="Microsoft YaHei" charset="0"/>
                         <a:ea typeface="Microsoft YaHei" charset="0"/>
                         <a:cs typeface="Microsoft YaHei" charset="0"/>
@@ -3930,7 +3930,7 @@
                         <a:buNone/>
                       </a:pPr>
                       <a:r>
-                        <a:rPr lang="en-US" sz="640" b="1" dirty="0">
+                        <a:rPr lang="en-US" sz="800" b="1" dirty="0">
                           <a:solidFill>
                             <a:srgbClr val="1F2A24"/>
                           </a:solidFill>
@@ -3940,7 +3940,7 @@
                         </a:rPr>
                         <a:t>快——复用现成 Agent</a:t>
                       </a:r>
-                      <a:endParaRPr lang="en-US" sz="640" dirty="0">
+                      <a:endParaRPr lang="en-US" sz="800" dirty="0">
                         <a:latin typeface="Microsoft YaHei" charset="0"/>
                         <a:ea typeface="Microsoft YaHei" charset="0"/>
                         <a:cs typeface="Microsoft YaHei" charset="0"/>
@@ -4000,7 +4000,7 @@
                         <a:buNone/>
                       </a:pPr>
                       <a:r>
-                        <a:rPr lang="en-US" sz="640" dirty="0">
+                        <a:rPr lang="en-US" sz="800" dirty="0">
                           <a:solidFill>
                             <a:srgbClr val="52605A"/>
                           </a:solidFill>
@@ -4010,7 +4010,7 @@
                         </a:rPr>
                         <a:t>慢——执行/断言/codegen 从 0 搭</a:t>
                       </a:r>
-                      <a:endParaRPr lang="en-US" sz="640" dirty="0">
+                      <a:endParaRPr lang="en-US" sz="800" dirty="0">
                         <a:latin typeface="Microsoft YaHei" charset="0"/>
                         <a:ea typeface="Microsoft YaHei" charset="0"/>
                         <a:cs typeface="Microsoft YaHei" charset="0"/>
@@ -4072,7 +4072,7 @@
                         <a:buNone/>
                       </a:pPr>
                       <a:r>
-                        <a:rPr lang="en-US" sz="640" b="1" dirty="0">
+                        <a:rPr lang="en-US" sz="800" b="1" dirty="0">
                           <a:solidFill>
                             <a:srgbClr val="C47F1A"/>
                           </a:solidFill>
@@ -4085,7 +4085,7 @@
                         </a:rPr>
                         <a:t>架构契合</a:t>
                       </a:r>
-                      <a:endParaRPr lang="en-US" sz="640" dirty="0">
+                      <a:endParaRPr lang="en-US" sz="800" dirty="0">
                         <a:latin typeface="Microsoft YaHei" charset="0"/>
                         <a:ea typeface="Microsoft YaHei" charset="0"/>
                         <a:cs typeface="Microsoft YaHei" charset="0"/>
@@ -4143,7 +4143,7 @@
                         <a:buNone/>
                       </a:pPr>
                       <a:r>
-                        <a:rPr lang="en-US" sz="640" b="1" dirty="0">
+                        <a:rPr lang="en-US" sz="800" b="1" dirty="0">
                           <a:solidFill>
                             <a:srgbClr val="1F2A24"/>
                           </a:solidFill>
@@ -4156,7 +4156,7 @@
                         </a:rPr>
                         <a:t>个人助手框架(消息/语音/多Agent)，与测试场景错配，二开=削足适履</a:t>
                       </a:r>
-                      <a:endParaRPr lang="en-US" sz="640" dirty="0">
+                      <a:endParaRPr lang="en-US" sz="800" dirty="0">
                         <a:latin typeface="Microsoft YaHei" charset="0"/>
                         <a:ea typeface="Microsoft YaHei" charset="0"/>
                         <a:cs typeface="Microsoft YaHei" charset="0"/>
@@ -4214,7 +4214,7 @@
                         <a:buNone/>
                       </a:pPr>
                       <a:r>
-                        <a:rPr lang="en-US" sz="640" b="1" dirty="0">
+                        <a:rPr lang="en-US" sz="800" b="1" dirty="0">
                           <a:solidFill>
                             <a:srgbClr val="1F2A24"/>
                           </a:solidFill>
@@ -4227,7 +4227,7 @@
                         </a:rPr>
                         <a:t>为测试而生，架构对口</a:t>
                       </a:r>
-                      <a:endParaRPr lang="en-US" sz="640" dirty="0">
+                      <a:endParaRPr lang="en-US" sz="800" dirty="0">
                         <a:latin typeface="Microsoft YaHei" charset="0"/>
                         <a:ea typeface="Microsoft YaHei" charset="0"/>
                         <a:cs typeface="Microsoft YaHei" charset="0"/>
@@ -4287,7 +4287,7 @@
                         <a:buNone/>
                       </a:pPr>
                       <a:r>
-                        <a:rPr lang="en-US" sz="640" b="1" dirty="0">
+                        <a:rPr lang="en-US" sz="800" b="1" dirty="0">
                           <a:solidFill>
                             <a:srgbClr val="C47F1A"/>
                           </a:solidFill>
@@ -4300,7 +4300,7 @@
                         </a:rPr>
                         <a:t>结果判定</a:t>
                       </a:r>
-                      <a:endParaRPr lang="en-US" sz="640" dirty="0">
+                      <a:endParaRPr lang="en-US" sz="800" dirty="0">
                         <a:latin typeface="Microsoft YaHei" charset="0"/>
                         <a:ea typeface="Microsoft YaHei" charset="0"/>
                         <a:cs typeface="Microsoft YaHei" charset="0"/>
@@ -4358,7 +4358,7 @@
                         <a:buNone/>
                       </a:pPr>
                       <a:r>
-                        <a:rPr lang="en-US" sz="640" b="1" dirty="0">
+                        <a:rPr lang="en-US" sz="800" b="1" dirty="0">
                           <a:solidFill>
                             <a:srgbClr val="1F2A24"/>
                           </a:solidFill>
@@ -4371,7 +4371,7 @@
                         </a:rPr>
                         <a:t>受其「AI 自述」范式约束，硬塞确定性断言层改造深</a:t>
                       </a:r>
-                      <a:endParaRPr lang="en-US" sz="640" dirty="0">
+                      <a:endParaRPr lang="en-US" sz="800" dirty="0">
                         <a:latin typeface="Microsoft YaHei" charset="0"/>
                         <a:ea typeface="Microsoft YaHei" charset="0"/>
                         <a:cs typeface="Microsoft YaHei" charset="0"/>
@@ -4429,7 +4429,7 @@
                         <a:buNone/>
                       </a:pPr>
                       <a:r>
-                        <a:rPr lang="en-US" sz="640" b="1" dirty="0">
+                        <a:rPr lang="en-US" sz="800" b="1" dirty="0">
                           <a:solidFill>
                             <a:srgbClr val="1F2A24"/>
                           </a:solidFill>
@@ -4442,7 +4442,7 @@
                         </a:rPr>
                         <a:t>原生规则引擎确定性裁决</a:t>
                       </a:r>
-                      <a:endParaRPr lang="en-US" sz="640" dirty="0">
+                      <a:endParaRPr lang="en-US" sz="800" dirty="0">
                         <a:latin typeface="Microsoft YaHei" charset="0"/>
                         <a:ea typeface="Microsoft YaHei" charset="0"/>
                         <a:cs typeface="Microsoft YaHei" charset="0"/>
@@ -4502,7 +4502,7 @@
                         <a:buNone/>
                       </a:pPr>
                       <a:r>
-                        <a:rPr lang="en-US" sz="640" dirty="0">
+                        <a:rPr lang="en-US" sz="800" dirty="0">
                           <a:solidFill>
                             <a:srgbClr val="1F2A24"/>
                           </a:solidFill>
@@ -4512,7 +4512,7 @@
                         </a:rPr>
                         <a:t>代码沉淀</a:t>
                       </a:r>
-                      <a:endParaRPr lang="en-US" sz="640" dirty="0">
+                      <a:endParaRPr lang="en-US" sz="800" dirty="0">
                         <a:latin typeface="Microsoft YaHei" charset="0"/>
                         <a:ea typeface="Microsoft YaHei" charset="0"/>
                         <a:cs typeface="Microsoft YaHei" charset="0"/>
@@ -4572,7 +4572,7 @@
                         <a:buNone/>
                       </a:pPr>
                       <a:r>
-                        <a:rPr lang="en-US" sz="640" dirty="0">
+                        <a:rPr lang="en-US" sz="800" dirty="0">
                           <a:solidFill>
                             <a:srgbClr val="52605A"/>
                           </a:solidFill>
@@ -4582,7 +4582,7 @@
                         </a:rPr>
                         <a:t>无此概念，需大改</a:t>
                       </a:r>
-                      <a:endParaRPr lang="en-US" sz="640" dirty="0">
+                      <a:endParaRPr lang="en-US" sz="800" dirty="0">
                         <a:latin typeface="Microsoft YaHei" charset="0"/>
                         <a:ea typeface="Microsoft YaHei" charset="0"/>
                         <a:cs typeface="Microsoft YaHei" charset="0"/>
@@ -4642,7 +4642,7 @@
                         <a:buNone/>
                       </a:pPr>
                       <a:r>
-                        <a:rPr lang="en-US" sz="640" b="1" dirty="0">
+                        <a:rPr lang="en-US" sz="800" b="1" dirty="0">
                           <a:solidFill>
                             <a:srgbClr val="356B41"/>
                           </a:solidFill>
@@ -4652,7 +4652,7 @@
                         </a:rPr>
                         <a:t>原生转译 pytest-bdd 可回放</a:t>
                       </a:r>
-                      <a:endParaRPr lang="en-US" sz="640" dirty="0">
+                      <a:endParaRPr lang="en-US" sz="800" dirty="0">
                         <a:latin typeface="Microsoft YaHei" charset="0"/>
                         <a:ea typeface="Microsoft YaHei" charset="0"/>
                         <a:cs typeface="Microsoft YaHei" charset="0"/>
@@ -4714,7 +4714,7 @@
                         <a:buNone/>
                       </a:pPr>
                       <a:r>
-                        <a:rPr lang="en-US" sz="640" dirty="0">
+                        <a:rPr lang="en-US" sz="800" dirty="0">
                           <a:solidFill>
                             <a:srgbClr val="1F2A24"/>
                           </a:solidFill>
@@ -4724,7 +4724,7 @@
                         </a:rPr>
                         <a:t>可控 / 合规</a:t>
                       </a:r>
-                      <a:endParaRPr lang="en-US" sz="640" dirty="0">
+                      <a:endParaRPr lang="en-US" sz="800" dirty="0">
                         <a:latin typeface="Microsoft YaHei" charset="0"/>
                         <a:ea typeface="Microsoft YaHei" charset="0"/>
                         <a:cs typeface="Microsoft YaHei" charset="0"/>
@@ -4784,7 +4784,7 @@
                         <a:buNone/>
                       </a:pPr>
                       <a:r>
-                        <a:rPr lang="en-US" sz="640" dirty="0">
+                        <a:rPr lang="en-US" sz="800" dirty="0">
                           <a:solidFill>
                             <a:srgbClr val="52605A"/>
                           </a:solidFill>
@@ -4794,7 +4794,7 @@
                         </a:rPr>
                         <a:t>依赖上游开源 + Node/TS 栈，内网合规裁剪难</a:t>
                       </a:r>
-                      <a:endParaRPr lang="en-US" sz="640" dirty="0">
+                      <a:endParaRPr lang="en-US" sz="800" dirty="0">
                         <a:latin typeface="Microsoft YaHei" charset="0"/>
                         <a:ea typeface="Microsoft YaHei" charset="0"/>
                         <a:cs typeface="Microsoft YaHei" charset="0"/>
@@ -4854,7 +4854,7 @@
                         <a:buNone/>
                       </a:pPr>
                       <a:r>
-                        <a:rPr lang="en-US" sz="640" b="1" dirty="0">
+                        <a:rPr lang="en-US" sz="800" b="1" dirty="0">
                           <a:solidFill>
                             <a:srgbClr val="356B41"/>
                           </a:solidFill>
@@ -4864,7 +4864,7 @@
                         </a:rPr>
                         <a:t>完全自主 · Python 栈 · 内网 stdio</a:t>
                       </a:r>
-                      <a:endParaRPr lang="en-US" sz="640" dirty="0">
+                      <a:endParaRPr lang="en-US" sz="800" dirty="0">
                         <a:latin typeface="Microsoft YaHei" charset="0"/>
                         <a:ea typeface="Microsoft YaHei" charset="0"/>
                         <a:cs typeface="Microsoft YaHei" charset="0"/>
@@ -4926,7 +4926,7 @@
                         <a:buNone/>
                       </a:pPr>
                       <a:r>
-                        <a:rPr lang="en-US" sz="640" dirty="0">
+                        <a:rPr lang="en-US" sz="800" dirty="0">
                           <a:solidFill>
                             <a:srgbClr val="1F2A24"/>
                           </a:solidFill>
@@ -4936,7 +4936,7 @@
                         </a:rPr>
                         <a:t>维护 / 演进</a:t>
                       </a:r>
-                      <a:endParaRPr lang="en-US" sz="640" dirty="0">
+                      <a:endParaRPr lang="en-US" sz="800" dirty="0">
                         <a:latin typeface="Microsoft YaHei" charset="0"/>
                         <a:ea typeface="Microsoft YaHei" charset="0"/>
                         <a:cs typeface="Microsoft YaHei" charset="0"/>
@@ -4996,7 +4996,7 @@
                         <a:buNone/>
                       </a:pPr>
                       <a:r>
-                        <a:rPr lang="en-US" sz="640" dirty="0">
+                        <a:rPr lang="en-US" sz="800" dirty="0">
                           <a:solidFill>
                             <a:srgbClr val="52605A"/>
                           </a:solidFill>
@@ -5006,7 +5006,7 @@
                         </a:rPr>
                         <a:t>受上游路线牵制，定制易与上游冲突</a:t>
                       </a:r>
-                      <a:endParaRPr lang="en-US" sz="640" dirty="0">
+                      <a:endParaRPr lang="en-US" sz="800" dirty="0">
                         <a:latin typeface="Microsoft YaHei" charset="0"/>
                         <a:ea typeface="Microsoft YaHei" charset="0"/>
                         <a:cs typeface="Microsoft YaHei" charset="0"/>
@@ -5066,7 +5066,7 @@
                         <a:buNone/>
                       </a:pPr>
                       <a:r>
-                        <a:rPr lang="en-US" sz="640" b="1" dirty="0">
+                        <a:rPr lang="en-US" sz="800" b="1" dirty="0">
                           <a:solidFill>
                             <a:srgbClr val="356B41"/>
                           </a:solidFill>
@@ -5076,7 +5076,7 @@
                         </a:rPr>
                         <a:t>自主演进，贴合内网业务</a:t>
                       </a:r>
-                      <a:endParaRPr lang="en-US" sz="640" dirty="0">
+                      <a:endParaRPr lang="en-US" sz="800" dirty="0">
                         <a:latin typeface="Microsoft YaHei" charset="0"/>
                         <a:ea typeface="Microsoft YaHei" charset="0"/>
                         <a:cs typeface="Microsoft YaHei" charset="0"/>
@@ -5138,7 +5138,7 @@
                         <a:buNone/>
                       </a:pPr>
                       <a:r>
-                        <a:rPr lang="en-US" sz="640" dirty="0">
+                        <a:rPr lang="en-US" sz="800" dirty="0">
                           <a:solidFill>
                             <a:srgbClr val="1F2A24"/>
                           </a:solidFill>
@@ -5148,7 +5148,7 @@
                         </a:rPr>
                         <a:t>长期成本</a:t>
                       </a:r>
-                      <a:endParaRPr lang="en-US" sz="640" dirty="0">
+                      <a:endParaRPr lang="en-US" sz="800" dirty="0">
                         <a:latin typeface="Microsoft YaHei" charset="0"/>
                         <a:ea typeface="Microsoft YaHei" charset="0"/>
                         <a:cs typeface="Microsoft YaHei" charset="0"/>
@@ -5208,7 +5208,7 @@
                         <a:buNone/>
                       </a:pPr>
                       <a:r>
-                        <a:rPr lang="en-US" sz="640" dirty="0">
+                        <a:rPr lang="en-US" sz="800" dirty="0">
                           <a:solidFill>
                             <a:srgbClr val="52605A"/>
                           </a:solidFill>
@@ -5218,7 +5218,7 @@
                         </a:rPr>
                         <a:t>二开包袱 + 持续适配上游</a:t>
                       </a:r>
-                      <a:endParaRPr lang="en-US" sz="640" dirty="0">
+                      <a:endParaRPr lang="en-US" sz="800" dirty="0">
                         <a:latin typeface="Microsoft YaHei" charset="0"/>
                         <a:ea typeface="Microsoft YaHei" charset="0"/>
                         <a:cs typeface="Microsoft YaHei" charset="0"/>
@@ -5278,7 +5278,7 @@
                         <a:buNone/>
                       </a:pPr>
                       <a:r>
-                        <a:rPr lang="en-US" sz="640" b="1" dirty="0">
+                        <a:rPr lang="en-US" sz="800" b="1" dirty="0">
                           <a:solidFill>
                             <a:srgbClr val="356B41"/>
                           </a:solidFill>
@@ -5288,7 +5288,7 @@
                         </a:rPr>
                         <a:t>一次自建、可控</a:t>
                       </a:r>
-                      <a:endParaRPr lang="en-US" sz="640" dirty="0">
+                      <a:endParaRPr lang="en-US" sz="800" dirty="0">
                         <a:latin typeface="Microsoft YaHei" charset="0"/>
                         <a:ea typeface="Microsoft YaHei" charset="0"/>
                         <a:cs typeface="Microsoft YaHei" charset="0"/>
@@ -5352,8 +5352,8 @@
         </p:nvSpPr>
         <p:spPr>
           <a:xfrm>
-            <a:off x="405384" y="5202555"/>
-            <a:ext cx="11350752" cy="285036"/>
+            <a:off x="405384" y="5666812"/>
+            <a:ext cx="11350752" cy="359648"/>
           </a:xfrm>
           <a:prstGeom prst="roundRect">
             <a:avLst>
@@ -5381,7 +5381,7 @@
               <a:buNone/>
             </a:pPr>
             <a:r>
-              <a:rPr lang="en-US" sz="700" b="1" dirty="0">
+              <a:rPr lang="en-US" sz="875" b="1" dirty="0">
                 <a:solidFill>
                   <a:srgbClr val="FFFFFF"/>
                 </a:solidFill>
@@ -5398,7 +5398,7 @@
               <a:buNone/>
             </a:pPr>
             <a:r>
-              <a:rPr lang="en-US" sz="700" b="1" dirty="0">
+              <a:rPr lang="en-US" sz="875" b="1" dirty="0">
                 <a:solidFill>
                   <a:srgbClr val="BFE7C7"/>
                 </a:solidFill>
@@ -5418,7 +5418,7 @@
               <a:buNone/>
             </a:pPr>
             <a:r>
-              <a:rPr lang="en-US" sz="700" b="1" dirty="0">
+              <a:rPr lang="en-US" sz="875" b="1" dirty="0">
                 <a:solidFill>
                   <a:srgbClr val="FFFFFF"/>
                 </a:solidFill>
@@ -5435,7 +5435,7 @@
               <a:buNone/>
             </a:pPr>
             <a:r>
-              <a:rPr lang="en-US" sz="700" b="1" dirty="0">
+              <a:rPr lang="en-US" sz="875" b="1" dirty="0">
                 <a:solidFill>
                   <a:srgbClr val="BFE7C7"/>
                 </a:solidFill>
@@ -5455,7 +5455,7 @@
               <a:buNone/>
             </a:pPr>
             <a:r>
-              <a:rPr lang="en-US" sz="700" b="1" dirty="0">
+              <a:rPr lang="en-US" sz="875" b="1" dirty="0">
                 <a:solidFill>
                   <a:srgbClr val="FFFFFF"/>
                 </a:solidFill>
@@ -5472,7 +5472,7 @@
               <a:buNone/>
             </a:pPr>
             <a:r>
-              <a:rPr lang="en-US" sz="700" b="1" dirty="0">
+              <a:rPr lang="en-US" sz="875" b="1" dirty="0">
                 <a:solidFill>
                   <a:srgbClr val="FFFFFF"/>
                 </a:solidFill>
@@ -5492,7 +5492,7 @@
               <a:buNone/>
             </a:pPr>
             <a:r>
-              <a:rPr lang="en-US" sz="700" b="1" dirty="0">
+              <a:rPr lang="en-US" sz="875" b="1" dirty="0">
                 <a:solidFill>
                   <a:srgbClr val="FFFFFF"/>
                 </a:solidFill>
@@ -5502,7 +5502,7 @@
               </a:rPr>
               <a:t>。</a:t>
             </a:r>
-            <a:endParaRPr lang="en-US" sz="700" dirty="0"/>
+            <a:endParaRPr lang="en-US" sz="875" dirty="0"/>
           </a:p>
         </p:txBody>
       </p:sp>
@@ -5514,7 +5514,7 @@
         </p:nvSpPr>
         <p:spPr>
           <a:xfrm>
-            <a:off x="403850" y="4470964"/>
+            <a:off x="403850" y="6498000"/>
             <a:ext cx="1146477" cy="95012"/>
           </a:xfrm>
           <a:prstGeom prst="rect">
@@ -5532,7 +5532,7 @@
               <a:buNone/>
             </a:pPr>
             <a:r>
-              <a:rPr lang="en-US" sz="550" dirty="0">
+              <a:rPr lang="en-US" sz="687" dirty="0">
                 <a:solidFill>
                   <a:srgbClr val="8A948E"/>
                 </a:solidFill>
@@ -5542,7 +5542,7 @@
               </a:rPr>
               <a:t>T-Agent 进展汇报 · 第 2 页 / 共 4 页</a:t>
             </a:r>
-            <a:endParaRPr lang="en-US" sz="550" dirty="0"/>
+            <a:endParaRPr lang="en-US" sz="687" dirty="0"/>
           </a:p>
         </p:txBody>
       </p:sp>
@@ -5558,7 +5558,7 @@
           <a:blip r:embed="rId1">
             <a:extLst>
               <a:ext uri="{96DAC541-7B7A-43D3-8B79-37D633B846F1}">
-                <asvg:svgBlip xmlns:asvg="http://schemas.microsoft.com/office/drawing/2016/SVG/main" r:embed="rId2"/>
+                <ns4:svgBlip r:embed="rId2"/>
               </a:ext>
             </a:extLst>
           </a:blip>
@@ -5568,7 +5568,7 @@
         </p:blipFill>
         <p:spPr>
           <a:xfrm>
-            <a:off x="405384" y="1832801"/>
+            <a:off x="405384" y="1430722"/>
             <a:ext cx="11350752" cy="120348"/>
           </a:xfrm>
           <a:prstGeom prst="rect">
@@ -5588,7 +5588,7 @@
           <a:blip r:embed="rId3">
             <a:extLst>
               <a:ext uri="{96DAC541-7B7A-43D3-8B79-37D633B846F1}">
-                <asvg:svgBlip xmlns:asvg="http://schemas.microsoft.com/office/drawing/2016/SVG/main" r:embed="rId4"/>
+                <ns4:svgBlip r:embed="rId4"/>
               </a:ext>
             </a:extLst>
           </a:blip>
@@ -5598,7 +5598,7 @@
         </p:blipFill>
         <p:spPr>
           <a:xfrm>
-            <a:off x="405384" y="3232642"/>
+            <a:off x="405384" y="3196994"/>
             <a:ext cx="11350752" cy="120348"/>
           </a:xfrm>
           <a:prstGeom prst="rect">
@@ -5615,7 +5615,7 @@
 </file>
 
 <file path=ppt/slides/slide3.xml><?xml version="1.0" encoding="utf-8"?>
-<p:sld xmlns:a="http://schemas.openxmlformats.org/drawingml/2006/main" xmlns:r="http://schemas.openxmlformats.org/officeDocument/2006/relationships" xmlns:p="http://schemas.openxmlformats.org/presentationml/2006/main">
+<p:sld xmlns:a="http://schemas.openxmlformats.org/drawingml/2006/main" xmlns:ns3="http://schemas.microsoft.com/office/drawing/2016/SVG/main" xmlns:p="http://schemas.openxmlformats.org/presentationml/2006/main" xmlns:r="http://schemas.openxmlformats.org/officeDocument/2006/relationships">
   <p:cSld name="Slide 3">
     <p:spTree>
       <p:nvGrpSpPr>
@@ -5639,8 +5639,8 @@
         </p:nvSpPr>
         <p:spPr>
           <a:xfrm>
-            <a:off x="0" y="1357741"/>
-            <a:ext cx="12161520" cy="4142518"/>
+            <a:off x="0" y="320040"/>
+            <a:ext cx="12161520" cy="6217920"/>
           </a:xfrm>
           <a:prstGeom prst="rect">
             <a:avLst/>
@@ -5659,8 +5659,8 @@
         </p:nvSpPr>
         <p:spPr>
           <a:xfrm>
-            <a:off x="405384" y="1648913"/>
-            <a:ext cx="11350752" cy="120348"/>
+            <a:off x="405384" y="757089"/>
+            <a:ext cx="11350752" cy="180642"/>
           </a:xfrm>
           <a:prstGeom prst="rect">
             <a:avLst/>
@@ -5677,7 +5677,7 @@
               <a:buNone/>
             </a:pPr>
             <a:r>
-              <a:rPr lang="en-US" sz="700" b="1" spc="100" kern="0" dirty="0">
+              <a:rPr lang="en-US" sz="875" b="1" spc="100" kern="0" dirty="0">
                 <a:solidFill>
                   <a:srgbClr val="478D54"/>
                 </a:solidFill>
@@ -5687,7 +5687,7 @@
               </a:rPr>
               <a:t>自研方案</a:t>
             </a:r>
-            <a:endParaRPr lang="en-US" sz="700" dirty="0"/>
+            <a:endParaRPr lang="en-US" sz="875" dirty="0"/>
           </a:p>
         </p:txBody>
       </p:sp>
@@ -5699,8 +5699,8 @@
         </p:nvSpPr>
         <p:spPr>
           <a:xfrm>
-            <a:off x="405384" y="1794598"/>
-            <a:ext cx="11350752" cy="253365"/>
+            <a:off x="405384" y="975762"/>
+            <a:ext cx="11350752" cy="380300"/>
           </a:xfrm>
           <a:prstGeom prst="rect">
             <a:avLst/>
@@ -5720,7 +5720,7 @@
               <a:buNone/>
             </a:pPr>
             <a:r>
-              <a:rPr lang="en-US" sz="1500" b="1" dirty="0">
+              <a:rPr lang="en-US" sz="1875" b="1" dirty="0">
                 <a:solidFill>
                   <a:srgbClr val="1F2A24"/>
                 </a:solidFill>
@@ -5730,7 +5730,7 @@
               </a:rPr>
               <a:t>执行工作流</a:t>
             </a:r>
-            <a:endParaRPr lang="en-US" sz="1500" dirty="0"/>
+            <a:endParaRPr lang="en-US" sz="1875" dirty="0"/>
           </a:p>
         </p:txBody>
       </p:sp>
@@ -5742,8 +5742,8 @@
         </p:nvSpPr>
         <p:spPr>
           <a:xfrm>
-            <a:off x="405384" y="2123972"/>
-            <a:ext cx="380048" cy="25337"/>
+            <a:off x="405384" y="1470152"/>
+            <a:ext cx="380048" cy="38030"/>
           </a:xfrm>
           <a:prstGeom prst="roundRect">
             <a:avLst>
@@ -5764,7 +5764,7 @@
         </p:nvSpPr>
         <p:spPr>
           <a:xfrm>
-            <a:off x="405384" y="2226259"/>
+            <a:off x="405384" y="1696673"/>
             <a:ext cx="190024" cy="291370"/>
           </a:xfrm>
           <a:prstGeom prst="roundRect">
@@ -5787,7 +5787,7 @@
               <a:buNone/>
             </a:pPr>
             <a:r>
-              <a:rPr lang="en-US" sz="650" b="1" dirty="0">
+              <a:rPr lang="en-US" sz="812" b="1" dirty="0">
                 <a:solidFill>
                   <a:srgbClr val="FFFFFF"/>
                 </a:solidFill>
@@ -5797,7 +5797,7 @@
               </a:rPr>
               <a:t>0</a:t>
             </a:r>
-            <a:endParaRPr lang="en-US" sz="650" dirty="0"/>
+            <a:endParaRPr lang="en-US" sz="812" dirty="0"/>
           </a:p>
         </p:txBody>
       </p:sp>
@@ -5813,7 +5813,7 @@
           <a:blip r:embed="rId1">
             <a:extLst>
               <a:ext uri="{96DAC541-7B7A-43D3-8B79-37D633B846F1}">
-                <asvg:svgBlip xmlns:asvg="http://schemas.microsoft.com/office/drawing/2016/SVG/main" r:embed="rId2"/>
+                <ns3:svgBlip r:embed="rId2"/>
               </a:ext>
             </a:extLst>
           </a:blip>
@@ -5823,7 +5823,7 @@
         </p:blipFill>
         <p:spPr>
           <a:xfrm>
-            <a:off x="595556" y="2226259"/>
+            <a:off x="595556" y="1696673"/>
             <a:ext cx="7379256" cy="291370"/>
           </a:xfrm>
           <a:prstGeom prst="rect">
@@ -5839,8 +5839,8 @@
         </p:nvSpPr>
         <p:spPr>
           <a:xfrm>
-            <a:off x="665232" y="2269657"/>
-            <a:ext cx="7233571" cy="107680"/>
+            <a:off x="665232" y="1688826"/>
+            <a:ext cx="7233571" cy="161627"/>
           </a:xfrm>
           <a:prstGeom prst="rect">
             <a:avLst/>
@@ -5857,7 +5857,7 @@
               <a:buNone/>
             </a:pPr>
             <a:r>
-              <a:rPr lang="en-US" sz="640" b="1" dirty="0">
+              <a:rPr lang="en-US" sz="800" b="1" dirty="0">
                 <a:solidFill>
                   <a:srgbClr val="1F2A24"/>
                 </a:solidFill>
@@ -5867,7 +5867,7 @@
               </a:rPr>
               <a:t>用例输入</a:t>
             </a:r>
-            <a:endParaRPr lang="en-US" sz="640" dirty="0"/>
+            <a:endParaRPr lang="en-US" sz="800" dirty="0"/>
           </a:p>
         </p:txBody>
       </p:sp>
@@ -5879,8 +5879,8 @@
         </p:nvSpPr>
         <p:spPr>
           <a:xfrm>
-            <a:off x="665232" y="2384612"/>
-            <a:ext cx="7233571" cy="88678"/>
+            <a:off x="665232" y="1861373"/>
+            <a:ext cx="7233571" cy="133105"/>
           </a:xfrm>
           <a:prstGeom prst="rect">
             <a:avLst/>
@@ -5903,7 +5903,7 @@
               <a:buNone/>
             </a:pPr>
             <a:r>
-              <a:rPr lang="en-US" sz="550" dirty="0">
+              <a:rPr lang="en-US" sz="687" dirty="0">
                 <a:solidFill>
                   <a:srgbClr val="52605A"/>
                 </a:solidFill>
@@ -5920,7 +5920,7 @@
               <a:buNone/>
             </a:pPr>
             <a:r>
-              <a:rPr lang="en-US" sz="500" dirty="0">
+              <a:rPr lang="en-US" sz="625" dirty="0">
                 <a:solidFill>
                   <a:srgbClr val="356B41"/>
                 </a:solidFill>
@@ -5930,7 +5930,7 @@
               </a:rPr>
               <a:t>工程化：前端上传→API→SQLModel 落库</a:t>
             </a:r>
-            <a:endParaRPr lang="en-US" sz="550" dirty="0"/>
+            <a:endParaRPr lang="en-US" sz="687" dirty="0"/>
           </a:p>
         </p:txBody>
       </p:sp>
@@ -5942,7 +5942,7 @@
         </p:nvSpPr>
         <p:spPr>
           <a:xfrm>
-            <a:off x="405384" y="2563848"/>
+            <a:off x="405384" y="2203394"/>
             <a:ext cx="190024" cy="291370"/>
           </a:xfrm>
           <a:prstGeom prst="roundRect">
@@ -5965,7 +5965,7 @@
               <a:buNone/>
             </a:pPr>
             <a:r>
-              <a:rPr lang="en-US" sz="650" b="1" dirty="0">
+              <a:rPr lang="en-US" sz="812" b="1" dirty="0">
                 <a:solidFill>
                   <a:srgbClr val="FFFFFF"/>
                 </a:solidFill>
@@ -5975,7 +5975,7 @@
               </a:rPr>
               <a:t>1</a:t>
             </a:r>
-            <a:endParaRPr lang="en-US" sz="650" dirty="0"/>
+            <a:endParaRPr lang="en-US" sz="812" dirty="0"/>
           </a:p>
         </p:txBody>
       </p:sp>
@@ -5991,7 +5991,7 @@
           <a:blip r:embed="rId3">
             <a:extLst>
               <a:ext uri="{96DAC541-7B7A-43D3-8B79-37D633B846F1}">
-                <asvg:svgBlip xmlns:asvg="http://schemas.microsoft.com/office/drawing/2016/SVG/main" r:embed="rId4"/>
+                <ns3:svgBlip r:embed="rId4"/>
               </a:ext>
             </a:extLst>
           </a:blip>
@@ -6001,7 +6001,7 @@
         </p:blipFill>
         <p:spPr>
           <a:xfrm>
-            <a:off x="595556" y="2563848"/>
+            <a:off x="595556" y="2203394"/>
             <a:ext cx="7379256" cy="291370"/>
           </a:xfrm>
           <a:prstGeom prst="rect">
@@ -6017,8 +6017,8 @@
         </p:nvSpPr>
         <p:spPr>
           <a:xfrm>
-            <a:off x="665232" y="2607246"/>
-            <a:ext cx="7233571" cy="107680"/>
+            <a:off x="665232" y="2195547"/>
+            <a:ext cx="7233571" cy="161627"/>
           </a:xfrm>
           <a:prstGeom prst="rect">
             <a:avLst/>
@@ -6035,7 +6035,7 @@
               <a:buNone/>
             </a:pPr>
             <a:r>
-              <a:rPr lang="en-US" sz="640" b="1" dirty="0">
+              <a:rPr lang="en-US" sz="800" b="1" dirty="0">
                 <a:solidFill>
                   <a:srgbClr val="1F2A24"/>
                 </a:solidFill>
@@ -6045,7 +6045,7 @@
               </a:rPr>
               <a:t>用例预解析（AI 翻译 · 人工可审）</a:t>
             </a:r>
-            <a:endParaRPr lang="en-US" sz="640" dirty="0"/>
+            <a:endParaRPr lang="en-US" sz="800" dirty="0"/>
           </a:p>
         </p:txBody>
       </p:sp>
@@ -6057,8 +6057,8 @@
         </p:nvSpPr>
         <p:spPr>
           <a:xfrm>
-            <a:off x="665232" y="2722201"/>
-            <a:ext cx="7233571" cy="88678"/>
+            <a:off x="665232" y="2368094"/>
+            <a:ext cx="7233571" cy="133105"/>
           </a:xfrm>
           <a:prstGeom prst="rect">
             <a:avLst/>
@@ -6081,7 +6081,7 @@
               <a:buNone/>
             </a:pPr>
             <a:r>
-              <a:rPr lang="en-US" sz="550" dirty="0">
+              <a:rPr lang="en-US" sz="687" dirty="0">
                 <a:solidFill>
                   <a:srgbClr val="52605A"/>
                 </a:solidFill>
@@ -6098,7 +6098,7 @@
               <a:buNone/>
             </a:pPr>
             <a:r>
-              <a:rPr lang="en-US" sz="500" dirty="0">
+              <a:rPr lang="en-US" sz="625" dirty="0">
                 <a:solidFill>
                   <a:srgbClr val="356B41"/>
                 </a:solidFill>
@@ -6108,7 +6108,7 @@
               </a:rPr>
               <a:t>[precondition / pre_analysis / intelligence]</a:t>
             </a:r>
-            <a:endParaRPr lang="en-US" sz="550" dirty="0"/>
+            <a:endParaRPr lang="en-US" sz="687" dirty="0"/>
           </a:p>
         </p:txBody>
       </p:sp>
@@ -6120,7 +6120,7 @@
         </p:nvSpPr>
         <p:spPr>
           <a:xfrm>
-            <a:off x="405384" y="2901437"/>
+            <a:off x="405384" y="2710116"/>
             <a:ext cx="190024" cy="291370"/>
           </a:xfrm>
           <a:prstGeom prst="roundRect">
@@ -6143,7 +6143,7 @@
               <a:buNone/>
             </a:pPr>
             <a:r>
-              <a:rPr lang="en-US" sz="650" b="1" dirty="0">
+              <a:rPr lang="en-US" sz="812" b="1" dirty="0">
                 <a:solidFill>
                   <a:srgbClr val="FFFFFF"/>
                 </a:solidFill>
@@ -6153,7 +6153,7 @@
               </a:rPr>
               <a:t>2</a:t>
             </a:r>
-            <a:endParaRPr lang="en-US" sz="650" dirty="0"/>
+            <a:endParaRPr lang="en-US" sz="812" dirty="0"/>
           </a:p>
         </p:txBody>
       </p:sp>
@@ -6169,7 +6169,7 @@
           <a:blip r:embed="rId5">
             <a:extLst>
               <a:ext uri="{96DAC541-7B7A-43D3-8B79-37D633B846F1}">
-                <asvg:svgBlip xmlns:asvg="http://schemas.microsoft.com/office/drawing/2016/SVG/main" r:embed="rId6"/>
+                <ns3:svgBlip r:embed="rId6"/>
               </a:ext>
             </a:extLst>
           </a:blip>
@@ -6179,7 +6179,7 @@
         </p:blipFill>
         <p:spPr>
           <a:xfrm>
-            <a:off x="595556" y="2901437"/>
+            <a:off x="595556" y="2710116"/>
             <a:ext cx="7379256" cy="291370"/>
           </a:xfrm>
           <a:prstGeom prst="rect">
@@ -6195,8 +6195,8 @@
         </p:nvSpPr>
         <p:spPr>
           <a:xfrm>
-            <a:off x="665232" y="2944835"/>
-            <a:ext cx="7233571" cy="107680"/>
+            <a:off x="665232" y="2702268"/>
+            <a:ext cx="7233571" cy="161627"/>
           </a:xfrm>
           <a:prstGeom prst="rect">
             <a:avLst/>
@@ -6213,7 +6213,7 @@
               <a:buNone/>
             </a:pPr>
             <a:r>
-              <a:rPr lang="en-US" sz="640" b="1" dirty="0">
+              <a:rPr lang="en-US" sz="800" b="1" dirty="0">
                 <a:solidFill>
                   <a:srgbClr val="1F2A24"/>
                 </a:solidFill>
@@ -6223,7 +6223,7 @@
               </a:rPr>
               <a:t>执行准备</a:t>
             </a:r>
-            <a:endParaRPr lang="en-US" sz="640" dirty="0"/>
+            <a:endParaRPr lang="en-US" sz="800" dirty="0"/>
           </a:p>
         </p:txBody>
       </p:sp>
@@ -6235,8 +6235,8 @@
         </p:nvSpPr>
         <p:spPr>
           <a:xfrm>
-            <a:off x="665232" y="3059790"/>
-            <a:ext cx="7233571" cy="88678"/>
+            <a:off x="665232" y="2874815"/>
+            <a:ext cx="7233571" cy="133105"/>
           </a:xfrm>
           <a:prstGeom prst="rect">
             <a:avLst/>
@@ -6259,7 +6259,7 @@
               <a:buNone/>
             </a:pPr>
             <a:r>
-              <a:rPr lang="en-US" sz="550" dirty="0">
+              <a:rPr lang="en-US" sz="687" dirty="0">
                 <a:solidFill>
                   <a:srgbClr val="52605A"/>
                 </a:solidFill>
@@ -6276,7 +6276,7 @@
               <a:buNone/>
             </a:pPr>
             <a:r>
-              <a:rPr lang="en-US" sz="500" dirty="0">
+              <a:rPr lang="en-US" sz="625" dirty="0">
                 <a:solidFill>
                   <a:srgbClr val="356B41"/>
                 </a:solidFill>
@@ -6286,7 +6286,7 @@
               </a:rPr>
               <a:t>[session / skills / mcp_client]</a:t>
             </a:r>
-            <a:endParaRPr lang="en-US" sz="550" dirty="0"/>
+            <a:endParaRPr lang="en-US" sz="687" dirty="0"/>
           </a:p>
         </p:txBody>
       </p:sp>
@@ -6298,7 +6298,7 @@
         </p:nvSpPr>
         <p:spPr>
           <a:xfrm>
-            <a:off x="405384" y="3239026"/>
+            <a:off x="405384" y="3216837"/>
             <a:ext cx="190024" cy="291370"/>
           </a:xfrm>
           <a:prstGeom prst="roundRect">
@@ -6321,7 +6321,7 @@
               <a:buNone/>
             </a:pPr>
             <a:r>
-              <a:rPr lang="en-US" sz="650" b="1" dirty="0">
+              <a:rPr lang="en-US" sz="812" b="1" dirty="0">
                 <a:solidFill>
                   <a:srgbClr val="FFFFFF"/>
                 </a:solidFill>
@@ -6331,7 +6331,7 @@
               </a:rPr>
               <a:t>3</a:t>
             </a:r>
-            <a:endParaRPr lang="en-US" sz="650" dirty="0"/>
+            <a:endParaRPr lang="en-US" sz="812" dirty="0"/>
           </a:p>
         </p:txBody>
       </p:sp>
@@ -6347,7 +6347,7 @@
           <a:blip r:embed="rId7">
             <a:extLst>
               <a:ext uri="{96DAC541-7B7A-43D3-8B79-37D633B846F1}">
-                <asvg:svgBlip xmlns:asvg="http://schemas.microsoft.com/office/drawing/2016/SVG/main" r:embed="rId8"/>
+                <ns3:svgBlip r:embed="rId8"/>
               </a:ext>
             </a:extLst>
           </a:blip>
@@ -6357,7 +6357,7 @@
         </p:blipFill>
         <p:spPr>
           <a:xfrm>
-            <a:off x="595556" y="3239026"/>
+            <a:off x="595556" y="3216837"/>
             <a:ext cx="7379256" cy="291370"/>
           </a:xfrm>
           <a:prstGeom prst="rect">
@@ -6373,8 +6373,8 @@
         </p:nvSpPr>
         <p:spPr>
           <a:xfrm>
-            <a:off x="665232" y="3282424"/>
-            <a:ext cx="7233571" cy="107680"/>
+            <a:off x="665232" y="3208989"/>
+            <a:ext cx="7233571" cy="161627"/>
           </a:xfrm>
           <a:prstGeom prst="rect">
             <a:avLst/>
@@ -6391,7 +6391,7 @@
               <a:buNone/>
             </a:pPr>
             <a:r>
-              <a:rPr lang="en-US" sz="640" b="1" dirty="0">
+              <a:rPr lang="en-US" sz="800" b="1" dirty="0">
                 <a:solidFill>
                   <a:srgbClr val="1F2A24"/>
                 </a:solidFill>
@@ -6401,7 +6401,7 @@
               </a:rPr>
               <a:t>ReAct 自动化执行循环（逐步）</a:t>
             </a:r>
-            <a:endParaRPr lang="en-US" sz="640" dirty="0"/>
+            <a:endParaRPr lang="en-US" sz="800" dirty="0"/>
           </a:p>
         </p:txBody>
       </p:sp>
@@ -6413,8 +6413,8 @@
         </p:nvSpPr>
         <p:spPr>
           <a:xfrm>
-            <a:off x="665232" y="3397379"/>
-            <a:ext cx="7233571" cy="88678"/>
+            <a:off x="665232" y="3381536"/>
+            <a:ext cx="7233571" cy="133105"/>
           </a:xfrm>
           <a:prstGeom prst="rect">
             <a:avLst/>
@@ -6437,7 +6437,7 @@
               <a:buNone/>
             </a:pPr>
             <a:r>
-              <a:rPr lang="en-US" sz="550" dirty="0">
+              <a:rPr lang="en-US" sz="687" dirty="0">
                 <a:solidFill>
                   <a:srgbClr val="52605A"/>
                 </a:solidFill>
@@ -6454,7 +6454,7 @@
               <a:buNone/>
             </a:pPr>
             <a:r>
-              <a:rPr lang="en-US" sz="500" dirty="0">
+              <a:rPr lang="en-US" sz="625" dirty="0">
                 <a:solidFill>
                   <a:srgbClr val="356B41"/>
                 </a:solidFill>
@@ -6464,7 +6464,7 @@
               </a:rPr>
               <a:t>[react_loop / prompt / llm / permission / page_probe]</a:t>
             </a:r>
-            <a:endParaRPr lang="en-US" sz="550" dirty="0"/>
+            <a:endParaRPr lang="en-US" sz="687" dirty="0"/>
           </a:p>
         </p:txBody>
       </p:sp>
@@ -6476,7 +6476,7 @@
         </p:nvSpPr>
         <p:spPr>
           <a:xfrm>
-            <a:off x="405384" y="3576615"/>
+            <a:off x="405384" y="3723558"/>
             <a:ext cx="190024" cy="291370"/>
           </a:xfrm>
           <a:prstGeom prst="roundRect">
@@ -6499,7 +6499,7 @@
               <a:buNone/>
             </a:pPr>
             <a:r>
-              <a:rPr lang="en-US" sz="650" b="1" dirty="0">
+              <a:rPr lang="en-US" sz="812" b="1" dirty="0">
                 <a:solidFill>
                   <a:srgbClr val="FFFFFF"/>
                 </a:solidFill>
@@ -6509,7 +6509,7 @@
               </a:rPr>
               <a:t>↘</a:t>
             </a:r>
-            <a:endParaRPr lang="en-US" sz="650" dirty="0"/>
+            <a:endParaRPr lang="en-US" sz="812" dirty="0"/>
           </a:p>
         </p:txBody>
       </p:sp>
@@ -6525,7 +6525,7 @@
           <a:blip r:embed="rId9">
             <a:extLst>
               <a:ext uri="{96DAC541-7B7A-43D3-8B79-37D633B846F1}">
-                <asvg:svgBlip xmlns:asvg="http://schemas.microsoft.com/office/drawing/2016/SVG/main" r:embed="rId10"/>
+                <ns3:svgBlip r:embed="rId10"/>
               </a:ext>
             </a:extLst>
           </a:blip>
@@ -6535,7 +6535,7 @@
         </p:blipFill>
         <p:spPr>
           <a:xfrm>
-            <a:off x="595556" y="3576615"/>
+            <a:off x="595556" y="3723558"/>
             <a:ext cx="7379256" cy="291370"/>
           </a:xfrm>
           <a:prstGeom prst="rect">
@@ -6551,8 +6551,8 @@
         </p:nvSpPr>
         <p:spPr>
           <a:xfrm>
-            <a:off x="665133" y="3620954"/>
-            <a:ext cx="3585115" cy="202692"/>
+            <a:off x="665133" y="3717122"/>
+            <a:ext cx="3585115" cy="304240"/>
           </a:xfrm>
           <a:prstGeom prst="rect">
             <a:avLst/>
@@ -6568,8 +6568,8 @@
         </p:nvSpPr>
         <p:spPr>
           <a:xfrm>
-            <a:off x="734808" y="3620013"/>
-            <a:ext cx="3515439" cy="107680"/>
+            <a:off x="734808" y="3715710"/>
+            <a:ext cx="3515439" cy="161627"/>
           </a:xfrm>
           <a:prstGeom prst="rect">
             <a:avLst/>
@@ -6586,7 +6586,7 @@
               <a:buNone/>
             </a:pPr>
             <a:r>
-              <a:rPr lang="en-US" sz="640" b="1" dirty="0">
+              <a:rPr lang="en-US" sz="800" b="1" dirty="0">
                 <a:solidFill>
                   <a:srgbClr val="C47F1A"/>
                 </a:solidFill>
@@ -6596,7 +6596,7 @@
               </a:rPr>
               <a:t>动作报错 / 元素找不到 → AI 自愈</a:t>
             </a:r>
-            <a:endParaRPr lang="en-US" sz="640" dirty="0"/>
+            <a:endParaRPr lang="en-US" sz="800" dirty="0"/>
           </a:p>
         </p:txBody>
       </p:sp>
@@ -6608,8 +6608,8 @@
         </p:nvSpPr>
         <p:spPr>
           <a:xfrm>
-            <a:off x="734808" y="3734968"/>
-            <a:ext cx="3515439" cy="88678"/>
+            <a:off x="734808" y="3888258"/>
+            <a:ext cx="3515439" cy="133105"/>
           </a:xfrm>
           <a:prstGeom prst="rect">
             <a:avLst/>
@@ -6632,7 +6632,7 @@
               <a:buNone/>
             </a:pPr>
             <a:r>
-              <a:rPr lang="en-US" sz="550" dirty="0">
+              <a:rPr lang="en-US" sz="687" dirty="0">
                 <a:solidFill>
                   <a:srgbClr val="52605A"/>
                 </a:solidFill>
@@ -6649,7 +6649,7 @@
               <a:buNone/>
             </a:pPr>
             <a:r>
-              <a:rPr lang="en-US" sz="500" dirty="0">
+              <a:rPr lang="en-US" sz="625" dirty="0">
                 <a:solidFill>
                   <a:srgbClr val="356B41"/>
                 </a:solidFill>
@@ -6659,7 +6659,7 @@
               </a:rPr>
               <a:t>[healing]</a:t>
             </a:r>
-            <a:endParaRPr lang="en-US" sz="550" dirty="0"/>
+            <a:endParaRPr lang="en-US" sz="687" dirty="0"/>
           </a:p>
         </p:txBody>
       </p:sp>
@@ -6671,8 +6671,8 @@
         </p:nvSpPr>
         <p:spPr>
           <a:xfrm>
-            <a:off x="4313737" y="3620954"/>
-            <a:ext cx="3585115" cy="202692"/>
+            <a:off x="4313737" y="3717122"/>
+            <a:ext cx="3585115" cy="304240"/>
           </a:xfrm>
           <a:prstGeom prst="rect">
             <a:avLst/>
@@ -6688,8 +6688,8 @@
         </p:nvSpPr>
         <p:spPr>
           <a:xfrm>
-            <a:off x="4383412" y="3620013"/>
-            <a:ext cx="3515439" cy="107680"/>
+            <a:off x="4383412" y="3715710"/>
+            <a:ext cx="3515439" cy="161627"/>
           </a:xfrm>
           <a:prstGeom prst="rect">
             <a:avLst/>
@@ -6706,7 +6706,7 @@
               <a:buNone/>
             </a:pPr>
             <a:r>
-              <a:rPr lang="en-US" sz="640" b="1" dirty="0">
+              <a:rPr lang="en-US" sz="800" b="1" dirty="0">
                 <a:solidFill>
                   <a:srgbClr val="356B41"/>
                 </a:solidFill>
@@ -6716,7 +6716,7 @@
               </a:rPr>
               <a:t>步骤正常完成</a:t>
             </a:r>
-            <a:endParaRPr lang="en-US" sz="640" dirty="0"/>
+            <a:endParaRPr lang="en-US" sz="800" dirty="0"/>
           </a:p>
         </p:txBody>
       </p:sp>
@@ -6728,8 +6728,8 @@
         </p:nvSpPr>
         <p:spPr>
           <a:xfrm>
-            <a:off x="4383412" y="3734968"/>
-            <a:ext cx="3515439" cy="88678"/>
+            <a:off x="4383412" y="3888258"/>
+            <a:ext cx="3515439" cy="133105"/>
           </a:xfrm>
           <a:prstGeom prst="rect">
             <a:avLst/>
@@ -6752,7 +6752,7 @@
               <a:buNone/>
             </a:pPr>
             <a:r>
-              <a:rPr lang="en-US" sz="550" dirty="0">
+              <a:rPr lang="en-US" sz="687" dirty="0">
                 <a:solidFill>
                   <a:srgbClr val="52605A"/>
                 </a:solidFill>
@@ -6762,7 +6762,7 @@
               </a:rPr>
               <a:t>mark_step_done → 进入断言</a:t>
             </a:r>
-            <a:endParaRPr lang="en-US" sz="550" dirty="0"/>
+            <a:endParaRPr lang="en-US" sz="687" dirty="0"/>
           </a:p>
         </p:txBody>
       </p:sp>
@@ -6774,7 +6774,7 @@
         </p:nvSpPr>
         <p:spPr>
           <a:xfrm>
-            <a:off x="405384" y="3914204"/>
+            <a:off x="405384" y="4230279"/>
             <a:ext cx="190024" cy="291370"/>
           </a:xfrm>
           <a:prstGeom prst="roundRect">
@@ -6797,7 +6797,7 @@
               <a:buNone/>
             </a:pPr>
             <a:r>
-              <a:rPr lang="en-US" sz="650" b="1" dirty="0">
+              <a:rPr lang="en-US" sz="812" b="1" dirty="0">
                 <a:solidFill>
                   <a:srgbClr val="FFFFFF"/>
                 </a:solidFill>
@@ -6807,7 +6807,7 @@
               </a:rPr>
               <a:t>4★</a:t>
             </a:r>
-            <a:endParaRPr lang="en-US" sz="650" dirty="0"/>
+            <a:endParaRPr lang="en-US" sz="812" dirty="0"/>
           </a:p>
         </p:txBody>
       </p:sp>
@@ -6823,7 +6823,7 @@
           <a:blip r:embed="rId11">
             <a:extLst>
               <a:ext uri="{96DAC541-7B7A-43D3-8B79-37D633B846F1}">
-                <asvg:svgBlip xmlns:asvg="http://schemas.microsoft.com/office/drawing/2016/SVG/main" r:embed="rId12"/>
+                <ns3:svgBlip r:embed="rId12"/>
               </a:ext>
             </a:extLst>
           </a:blip>
@@ -6833,7 +6833,7 @@
         </p:blipFill>
         <p:spPr>
           <a:xfrm>
-            <a:off x="595556" y="3914204"/>
+            <a:off x="595556" y="4230279"/>
             <a:ext cx="7379256" cy="291370"/>
           </a:xfrm>
           <a:prstGeom prst="rect">
@@ -6849,8 +6849,8 @@
         </p:nvSpPr>
         <p:spPr>
           <a:xfrm>
-            <a:off x="665232" y="3957603"/>
-            <a:ext cx="7233571" cy="107680"/>
+            <a:off x="665232" y="4222433"/>
+            <a:ext cx="7233571" cy="161627"/>
           </a:xfrm>
           <a:prstGeom prst="rect">
             <a:avLst/>
@@ -6867,7 +6867,7 @@
               <a:buNone/>
             </a:pPr>
             <a:r>
-              <a:rPr lang="en-US" sz="640" b="1" dirty="0">
+              <a:rPr lang="en-US" sz="800" b="1" dirty="0">
                 <a:solidFill>
                   <a:srgbClr val="1F2A24"/>
                 </a:solidFill>
@@ -6877,7 +6877,7 @@
               </a:rPr>
               <a:t>确定性断言验证（规则引擎，非 AI 眼判）</a:t>
             </a:r>
-            <a:endParaRPr lang="en-US" sz="640" dirty="0"/>
+            <a:endParaRPr lang="en-US" sz="800" dirty="0"/>
           </a:p>
         </p:txBody>
       </p:sp>
@@ -6889,8 +6889,8 @@
         </p:nvSpPr>
         <p:spPr>
           <a:xfrm>
-            <a:off x="665232" y="4072557"/>
-            <a:ext cx="7233571" cy="88678"/>
+            <a:off x="665232" y="4394979"/>
+            <a:ext cx="7233571" cy="133105"/>
           </a:xfrm>
           <a:prstGeom prst="rect">
             <a:avLst/>
@@ -6913,7 +6913,7 @@
               <a:buNone/>
             </a:pPr>
             <a:r>
-              <a:rPr lang="en-US" sz="550" dirty="0">
+              <a:rPr lang="en-US" sz="687" dirty="0">
                 <a:solidFill>
                   <a:srgbClr val="52605A"/>
                 </a:solidFill>
@@ -6930,7 +6930,7 @@
               <a:buNone/>
             </a:pPr>
             <a:r>
-              <a:rPr lang="en-US" sz="500" dirty="0">
+              <a:rPr lang="en-US" sz="625" dirty="0">
                 <a:solidFill>
                   <a:srgbClr val="356B41"/>
                 </a:solidFill>
@@ -6940,7 +6940,7 @@
               </a:rPr>
               <a:t>[assertion]</a:t>
             </a:r>
-            <a:endParaRPr lang="en-US" sz="550" dirty="0"/>
+            <a:endParaRPr lang="en-US" sz="687" dirty="0"/>
           </a:p>
         </p:txBody>
       </p:sp>
@@ -6952,7 +6952,7 @@
         </p:nvSpPr>
         <p:spPr>
           <a:xfrm>
-            <a:off x="405384" y="4251793"/>
+            <a:off x="405384" y="4737000"/>
             <a:ext cx="190024" cy="291370"/>
           </a:xfrm>
           <a:prstGeom prst="roundRect">
@@ -6975,7 +6975,7 @@
               <a:buNone/>
             </a:pPr>
             <a:r>
-              <a:rPr lang="en-US" sz="650" b="1" dirty="0">
+              <a:rPr lang="en-US" sz="812" b="1" dirty="0">
                 <a:solidFill>
                   <a:srgbClr val="FFFFFF"/>
                 </a:solidFill>
@@ -6985,7 +6985,7 @@
               </a:rPr>
               <a:t>5</a:t>
             </a:r>
-            <a:endParaRPr lang="en-US" sz="650" dirty="0"/>
+            <a:endParaRPr lang="en-US" sz="812" dirty="0"/>
           </a:p>
         </p:txBody>
       </p:sp>
@@ -7001,7 +7001,7 @@
           <a:blip r:embed="rId13">
             <a:extLst>
               <a:ext uri="{96DAC541-7B7A-43D3-8B79-37D633B846F1}">
-                <asvg:svgBlip xmlns:asvg="http://schemas.microsoft.com/office/drawing/2016/SVG/main" r:embed="rId14"/>
+                <ns3:svgBlip r:embed="rId14"/>
               </a:ext>
             </a:extLst>
           </a:blip>
@@ -7011,7 +7011,7 @@
         </p:blipFill>
         <p:spPr>
           <a:xfrm>
-            <a:off x="595556" y="4251793"/>
+            <a:off x="595556" y="4737000"/>
             <a:ext cx="7379256" cy="291370"/>
           </a:xfrm>
           <a:prstGeom prst="rect">
@@ -7027,8 +7027,8 @@
         </p:nvSpPr>
         <p:spPr>
           <a:xfrm>
-            <a:off x="665133" y="4296132"/>
-            <a:ext cx="3585115" cy="202692"/>
+            <a:off x="665133" y="4730565"/>
+            <a:ext cx="3585115" cy="304240"/>
           </a:xfrm>
           <a:prstGeom prst="rect">
             <a:avLst/>
@@ -7044,8 +7044,8 @@
         </p:nvSpPr>
         <p:spPr>
           <a:xfrm>
-            <a:off x="734808" y="4295192"/>
-            <a:ext cx="3515439" cy="107680"/>
+            <a:off x="734808" y="4729154"/>
+            <a:ext cx="3515439" cy="161627"/>
           </a:xfrm>
           <a:prstGeom prst="rect">
             <a:avLst/>
@@ -7062,7 +7062,7 @@
               <a:buNone/>
             </a:pPr>
             <a:r>
-              <a:rPr lang="en-US" sz="640" b="1" dirty="0">
+              <a:rPr lang="en-US" sz="800" b="1" dirty="0">
                 <a:solidFill>
                   <a:srgbClr val="356B41"/>
                 </a:solidFill>
@@ -7072,7 +7072,7 @@
               </a:rPr>
               <a:t>成功 → 转译代码生成</a:t>
             </a:r>
-            <a:endParaRPr lang="en-US" sz="640" dirty="0"/>
+            <a:endParaRPr lang="en-US" sz="800" dirty="0"/>
           </a:p>
         </p:txBody>
       </p:sp>
@@ -7084,8 +7084,8 @@
         </p:nvSpPr>
         <p:spPr>
           <a:xfrm>
-            <a:off x="734808" y="4410146"/>
-            <a:ext cx="3515439" cy="88678"/>
+            <a:off x="734808" y="4901700"/>
+            <a:ext cx="3515439" cy="133105"/>
           </a:xfrm>
           <a:prstGeom prst="rect">
             <a:avLst/>
@@ -7108,7 +7108,7 @@
               <a:buNone/>
             </a:pPr>
             <a:r>
-              <a:rPr lang="en-US" sz="550" dirty="0">
+              <a:rPr lang="en-US" sz="687" dirty="0">
                 <a:solidFill>
                   <a:srgbClr val="52605A"/>
                 </a:solidFill>
@@ -7125,7 +7125,7 @@
               <a:buNone/>
             </a:pPr>
             <a:r>
-              <a:rPr lang="en-US" sz="500" dirty="0">
+              <a:rPr lang="en-US" sz="625" dirty="0">
                 <a:solidFill>
                   <a:srgbClr val="356B41"/>
                 </a:solidFill>
@@ -7135,7 +7135,7 @@
               </a:rPr>
               <a:t>[codegen]</a:t>
             </a:r>
-            <a:endParaRPr lang="en-US" sz="550" dirty="0"/>
+            <a:endParaRPr lang="en-US" sz="687" dirty="0"/>
           </a:p>
         </p:txBody>
       </p:sp>
@@ -7147,8 +7147,8 @@
         </p:nvSpPr>
         <p:spPr>
           <a:xfrm>
-            <a:off x="4313737" y="4296132"/>
-            <a:ext cx="3585115" cy="202692"/>
+            <a:off x="4313737" y="4730565"/>
+            <a:ext cx="3585115" cy="304240"/>
           </a:xfrm>
           <a:prstGeom prst="rect">
             <a:avLst/>
@@ -7164,8 +7164,8 @@
         </p:nvSpPr>
         <p:spPr>
           <a:xfrm>
-            <a:off x="4383412" y="4295192"/>
-            <a:ext cx="3515439" cy="107680"/>
+            <a:off x="4383412" y="4729154"/>
+            <a:ext cx="3515439" cy="161627"/>
           </a:xfrm>
           <a:prstGeom prst="rect">
             <a:avLst/>
@@ -7182,7 +7182,7 @@
               <a:buNone/>
             </a:pPr>
             <a:r>
-              <a:rPr lang="en-US" sz="640" b="1" dirty="0">
+              <a:rPr lang="en-US" sz="800" b="1" dirty="0">
                 <a:solidFill>
                   <a:srgbClr val="C47F1A"/>
                 </a:solidFill>
@@ -7192,7 +7192,7 @@
               </a:rPr>
               <a:t>失败 → 失败留痕</a:t>
             </a:r>
-            <a:endParaRPr lang="en-US" sz="640" dirty="0"/>
+            <a:endParaRPr lang="en-US" sz="800" dirty="0"/>
           </a:p>
         </p:txBody>
       </p:sp>
@@ -7204,8 +7204,8 @@
         </p:nvSpPr>
         <p:spPr>
           <a:xfrm>
-            <a:off x="4383412" y="4410146"/>
-            <a:ext cx="3515439" cy="88678"/>
+            <a:off x="4383412" y="4901700"/>
+            <a:ext cx="3515439" cy="133105"/>
           </a:xfrm>
           <a:prstGeom prst="rect">
             <a:avLst/>
@@ -7228,7 +7228,7 @@
               <a:buNone/>
             </a:pPr>
             <a:r>
-              <a:rPr lang="en-US" sz="550" dirty="0">
+              <a:rPr lang="en-US" sz="687" dirty="0">
                 <a:solidFill>
                   <a:srgbClr val="52605A"/>
                 </a:solidFill>
@@ -7238,7 +7238,7 @@
               </a:rPr>
               <a:t>断言差异+截图+prompt+自愈过程</a:t>
             </a:r>
-            <a:endParaRPr lang="en-US" sz="550" dirty="0"/>
+            <a:endParaRPr lang="en-US" sz="687" dirty="0"/>
           </a:p>
         </p:txBody>
       </p:sp>
@@ -7250,7 +7250,7 @@
         </p:nvSpPr>
         <p:spPr>
           <a:xfrm>
-            <a:off x="405384" y="4589382"/>
+            <a:off x="405384" y="5243721"/>
             <a:ext cx="190024" cy="291370"/>
           </a:xfrm>
           <a:prstGeom prst="roundRect">
@@ -7273,7 +7273,7 @@
               <a:buNone/>
             </a:pPr>
             <a:r>
-              <a:rPr lang="en-US" sz="650" b="1" dirty="0">
+              <a:rPr lang="en-US" sz="812" b="1" dirty="0">
                 <a:solidFill>
                   <a:srgbClr val="FFFFFF"/>
                 </a:solidFill>
@@ -7283,7 +7283,7 @@
               </a:rPr>
               <a:t>6</a:t>
             </a:r>
-            <a:endParaRPr lang="en-US" sz="650" dirty="0"/>
+            <a:endParaRPr lang="en-US" sz="812" dirty="0"/>
           </a:p>
         </p:txBody>
       </p:sp>
@@ -7299,7 +7299,7 @@
           <a:blip r:embed="rId15">
             <a:extLst>
               <a:ext uri="{96DAC541-7B7A-43D3-8B79-37D633B846F1}">
-                <asvg:svgBlip xmlns:asvg="http://schemas.microsoft.com/office/drawing/2016/SVG/main" r:embed="rId16"/>
+                <ns3:svgBlip r:embed="rId16"/>
               </a:ext>
             </a:extLst>
           </a:blip>
@@ -7309,7 +7309,7 @@
         </p:blipFill>
         <p:spPr>
           <a:xfrm>
-            <a:off x="595556" y="4589382"/>
+            <a:off x="595556" y="5243721"/>
             <a:ext cx="7379256" cy="291370"/>
           </a:xfrm>
           <a:prstGeom prst="rect">
@@ -7325,8 +7325,8 @@
         </p:nvSpPr>
         <p:spPr>
           <a:xfrm>
-            <a:off x="665232" y="4632781"/>
-            <a:ext cx="7233571" cy="107680"/>
+            <a:off x="665232" y="5235875"/>
+            <a:ext cx="7233571" cy="161627"/>
           </a:xfrm>
           <a:prstGeom prst="rect">
             <a:avLst/>
@@ -7343,7 +7343,7 @@
               <a:buNone/>
             </a:pPr>
             <a:r>
-              <a:rPr lang="en-US" sz="640" b="1" dirty="0">
+              <a:rPr lang="en-US" sz="800" b="1" dirty="0">
                 <a:solidFill>
                   <a:srgbClr val="1F2A24"/>
                 </a:solidFill>
@@ -7353,7 +7353,7 @@
               </a:rPr>
               <a:t>结果报告 + 资产沉淀</a:t>
             </a:r>
-            <a:endParaRPr lang="en-US" sz="640" dirty="0"/>
+            <a:endParaRPr lang="en-US" sz="800" dirty="0"/>
           </a:p>
         </p:txBody>
       </p:sp>
@@ -7365,8 +7365,8 @@
         </p:nvSpPr>
         <p:spPr>
           <a:xfrm>
-            <a:off x="665232" y="4747735"/>
-            <a:ext cx="7233571" cy="88678"/>
+            <a:off x="665232" y="5408421"/>
+            <a:ext cx="7233571" cy="133105"/>
           </a:xfrm>
           <a:prstGeom prst="rect">
             <a:avLst/>
@@ -7389,7 +7389,7 @@
               <a:buNone/>
             </a:pPr>
             <a:r>
-              <a:rPr lang="en-US" sz="550" dirty="0">
+              <a:rPr lang="en-US" sz="687" dirty="0">
                 <a:solidFill>
                   <a:srgbClr val="52605A"/>
                 </a:solidFill>
@@ -7406,7 +7406,7 @@
               <a:buNone/>
             </a:pPr>
             <a:r>
-              <a:rPr lang="en-US" sz="500" dirty="0">
+              <a:rPr lang="en-US" sz="625" dirty="0">
                 <a:solidFill>
                   <a:srgbClr val="356B41"/>
                 </a:solidFill>
@@ -7416,7 +7416,7 @@
               </a:rPr>
               <a:t>[recorder / session]</a:t>
             </a:r>
-            <a:endParaRPr lang="en-US" sz="550" dirty="0"/>
+            <a:endParaRPr lang="en-US" sz="687" dirty="0"/>
           </a:p>
         </p:txBody>
       </p:sp>
@@ -7428,8 +7428,8 @@
         </p:nvSpPr>
         <p:spPr>
           <a:xfrm>
-            <a:off x="405532" y="4925041"/>
-            <a:ext cx="7569279" cy="171021"/>
+            <a:off x="405532" y="5674557"/>
+            <a:ext cx="7569279" cy="256702"/>
           </a:xfrm>
           <a:prstGeom prst="roundRect">
             <a:avLst>
@@ -7454,7 +7454,7 @@
               <a:buNone/>
             </a:pPr>
             <a:r>
-              <a:rPr lang="en-US" sz="520" b="1" dirty="0">
+              <a:rPr lang="en-US" sz="650" b="1" dirty="0">
                 <a:solidFill>
                   <a:srgbClr val="D8E6DC"/>
                 </a:solidFill>
@@ -7471,7 +7471,7 @@
               <a:buNone/>
             </a:pPr>
             <a:r>
-              <a:rPr lang="en-US" sz="520" dirty="0">
+              <a:rPr lang="en-US" sz="650" dirty="0">
                 <a:solidFill>
                   <a:srgbClr val="D8E6DC"/>
                 </a:solidFill>
@@ -7481,7 +7481,7 @@
               </a:rPr>
               <a:t>orchestrator 并发调度 + 用例间隔离｜execution_worker 每 run 独立线程/事件循环/存储（根治执行期 API 卡顿）</a:t>
             </a:r>
-            <a:endParaRPr lang="en-US" sz="520" dirty="0"/>
+            <a:endParaRPr lang="en-US" sz="650" dirty="0"/>
           </a:p>
         </p:txBody>
       </p:sp>
@@ -7493,8 +7493,8 @@
         </p:nvSpPr>
         <p:spPr>
           <a:xfrm>
-            <a:off x="8063490" y="2225318"/>
-            <a:ext cx="3692795" cy="107680"/>
+            <a:off x="8063490" y="1622273"/>
+            <a:ext cx="3692795" cy="161627"/>
           </a:xfrm>
           <a:prstGeom prst="rect">
             <a:avLst/>
@@ -7511,7 +7511,7 @@
               <a:buNone/>
             </a:pPr>
             <a:r>
-              <a:rPr lang="en-US" sz="650" b="1" dirty="0">
+              <a:rPr lang="en-US" sz="812" b="1" dirty="0">
                 <a:solidFill>
                   <a:srgbClr val="356B41"/>
                 </a:solidFill>
@@ -7521,7 +7521,7 @@
               </a:rPr>
               <a:t>工程化优点 · 可用 / 可管 / 可沉淀</a:t>
             </a:r>
-            <a:endParaRPr lang="en-US" sz="650" dirty="0"/>
+            <a:endParaRPr lang="en-US" sz="812" dirty="0"/>
           </a:p>
         </p:txBody>
       </p:sp>
@@ -7533,8 +7533,8 @@
         </p:nvSpPr>
         <p:spPr>
           <a:xfrm>
-            <a:off x="8063490" y="2395845"/>
-            <a:ext cx="3692795" cy="329375"/>
+            <a:off x="8063490" y="1878234"/>
+            <a:ext cx="3692795" cy="494391"/>
           </a:xfrm>
           <a:prstGeom prst="roundRect">
             <a:avLst>
@@ -7555,8 +7555,8 @@
         </p:nvSpPr>
         <p:spPr>
           <a:xfrm>
-            <a:off x="8164836" y="2453347"/>
-            <a:ext cx="3509105" cy="101346"/>
+            <a:off x="8164836" y="1964544"/>
+            <a:ext cx="3509105" cy="152120"/>
           </a:xfrm>
           <a:prstGeom prst="rect">
             <a:avLst/>
@@ -7573,7 +7573,7 @@
               <a:buNone/>
             </a:pPr>
             <a:r>
-              <a:rPr lang="en-US" sz="620" b="1" dirty="0">
+              <a:rPr lang="en-US" sz="775" b="1" dirty="0">
                 <a:solidFill>
                   <a:srgbClr val="356B41"/>
                 </a:solidFill>
@@ -7587,7 +7587,7 @@
               <a:buNone/>
             </a:pPr>
             <a:r>
-              <a:rPr lang="en-US" sz="470" b="1" dirty="0">
+              <a:rPr lang="en-US" sz="587" b="1" dirty="0">
                 <a:solidFill>
                   <a:srgbClr val="FFFFFF"/>
                 </a:solidFill>
@@ -7600,7 +7600,7 @@
               </a:rPr>
               <a:t>阶段 2 · 6</a:t>
             </a:r>
-            <a:endParaRPr lang="en-US" sz="620" dirty="0"/>
+            <a:endParaRPr lang="en-US" sz="775" dirty="0"/>
           </a:p>
         </p:txBody>
       </p:sp>
@@ -7612,8 +7612,8 @@
         </p:nvSpPr>
         <p:spPr>
           <a:xfrm>
-            <a:off x="8164836" y="2573200"/>
-            <a:ext cx="3509105" cy="95012"/>
+            <a:off x="8164836" y="2144444"/>
+            <a:ext cx="3509105" cy="142613"/>
           </a:xfrm>
           <a:prstGeom prst="rect">
             <a:avLst/>
@@ -7636,7 +7636,7 @@
               <a:buNone/>
             </a:pPr>
             <a:r>
-              <a:rPr lang="en-US" sz="550" dirty="0">
+              <a:rPr lang="en-US" sz="687" dirty="0">
                 <a:solidFill>
                   <a:srgbClr val="52605A"/>
                 </a:solidFill>
@@ -7653,7 +7653,7 @@
               <a:buNone/>
             </a:pPr>
             <a:r>
-              <a:rPr lang="en-US" sz="550" b="1" dirty="0">
+              <a:rPr lang="en-US" sz="687" b="1" dirty="0">
                 <a:solidFill>
                   <a:srgbClr val="52605A"/>
                 </a:solidFill>
@@ -7673,7 +7673,7 @@
               <a:buNone/>
             </a:pPr>
             <a:r>
-              <a:rPr lang="en-US" sz="550" dirty="0">
+              <a:rPr lang="en-US" sz="687" dirty="0">
                 <a:solidFill>
                   <a:srgbClr val="52605A"/>
                 </a:solidFill>
@@ -7683,7 +7683,7 @@
               </a:rPr>
               <a:t>。</a:t>
             </a:r>
-            <a:endParaRPr lang="en-US" sz="550" dirty="0"/>
+            <a:endParaRPr lang="en-US" sz="687" dirty="0"/>
           </a:p>
         </p:txBody>
       </p:sp>
@@ -7695,8 +7695,8 @@
         </p:nvSpPr>
         <p:spPr>
           <a:xfrm>
-            <a:off x="8063490" y="2787571"/>
-            <a:ext cx="3692795" cy="329375"/>
+            <a:off x="8063490" y="2466214"/>
+            <a:ext cx="3692795" cy="494391"/>
           </a:xfrm>
           <a:prstGeom prst="roundRect">
             <a:avLst>
@@ -7717,8 +7717,8 @@
         </p:nvSpPr>
         <p:spPr>
           <a:xfrm>
-            <a:off x="8164836" y="2845073"/>
-            <a:ext cx="3509105" cy="101346"/>
+            <a:off x="8164836" y="2552525"/>
+            <a:ext cx="3509105" cy="152120"/>
           </a:xfrm>
           <a:prstGeom prst="rect">
             <a:avLst/>
@@ -7735,7 +7735,7 @@
               <a:buNone/>
             </a:pPr>
             <a:r>
-              <a:rPr lang="en-US" sz="620" b="1" dirty="0">
+              <a:rPr lang="en-US" sz="775" b="1" dirty="0">
                 <a:solidFill>
                   <a:srgbClr val="356B41"/>
                 </a:solidFill>
@@ -7749,7 +7749,7 @@
               <a:buNone/>
             </a:pPr>
             <a:r>
-              <a:rPr lang="en-US" sz="470" b="1" dirty="0">
+              <a:rPr lang="en-US" sz="587" b="1" dirty="0">
                 <a:solidFill>
                   <a:srgbClr val="FFFFFF"/>
                 </a:solidFill>
@@ -7762,7 +7762,7 @@
               </a:rPr>
               <a:t>阶段 2</a:t>
             </a:r>
-            <a:endParaRPr lang="en-US" sz="620" dirty="0"/>
+            <a:endParaRPr lang="en-US" sz="775" dirty="0"/>
           </a:p>
         </p:txBody>
       </p:sp>
@@ -7774,8 +7774,8 @@
         </p:nvSpPr>
         <p:spPr>
           <a:xfrm>
-            <a:off x="8164836" y="2964926"/>
-            <a:ext cx="3509105" cy="95012"/>
+            <a:off x="8164836" y="2732424"/>
+            <a:ext cx="3509105" cy="142613"/>
           </a:xfrm>
           <a:prstGeom prst="rect">
             <a:avLst/>
@@ -7798,7 +7798,7 @@
               <a:buNone/>
             </a:pPr>
             <a:r>
-              <a:rPr lang="en-US" sz="550" dirty="0">
+              <a:rPr lang="en-US" sz="687" dirty="0">
                 <a:solidFill>
                   <a:srgbClr val="52605A"/>
                 </a:solidFill>
@@ -7815,7 +7815,7 @@
               <a:buNone/>
             </a:pPr>
             <a:r>
-              <a:rPr lang="en-US" sz="550" b="1" dirty="0">
+              <a:rPr lang="en-US" sz="687" b="1" dirty="0">
                 <a:solidFill>
                   <a:srgbClr val="52605A"/>
                 </a:solidFill>
@@ -7835,7 +7835,7 @@
               <a:buNone/>
             </a:pPr>
             <a:r>
-              <a:rPr lang="en-US" sz="550" dirty="0">
+              <a:rPr lang="en-US" sz="687" dirty="0">
                 <a:solidFill>
                   <a:srgbClr val="52605A"/>
                 </a:solidFill>
@@ -7845,7 +7845,7 @@
               </a:rPr>
               <a:t>，一处定义处处复用。</a:t>
             </a:r>
-            <a:endParaRPr lang="en-US" sz="550" dirty="0"/>
+            <a:endParaRPr lang="en-US" sz="687" dirty="0"/>
           </a:p>
         </p:txBody>
       </p:sp>
@@ -7857,8 +7857,8 @@
         </p:nvSpPr>
         <p:spPr>
           <a:xfrm>
-            <a:off x="8063490" y="3179297"/>
-            <a:ext cx="3692795" cy="329375"/>
+            <a:off x="8063490" y="3054195"/>
+            <a:ext cx="3692795" cy="494391"/>
           </a:xfrm>
           <a:prstGeom prst="roundRect">
             <a:avLst>
@@ -7879,8 +7879,8 @@
         </p:nvSpPr>
         <p:spPr>
           <a:xfrm>
-            <a:off x="8164836" y="3236799"/>
-            <a:ext cx="3509105" cy="101346"/>
+            <a:off x="8164836" y="3140506"/>
+            <a:ext cx="3509105" cy="152120"/>
           </a:xfrm>
           <a:prstGeom prst="rect">
             <a:avLst/>
@@ -7897,7 +7897,7 @@
               <a:buNone/>
             </a:pPr>
             <a:r>
-              <a:rPr lang="en-US" sz="620" b="1" dirty="0">
+              <a:rPr lang="en-US" sz="775" b="1" dirty="0">
                 <a:solidFill>
                   <a:srgbClr val="356B41"/>
                 </a:solidFill>
@@ -7911,7 +7911,7 @@
               <a:buNone/>
             </a:pPr>
             <a:r>
-              <a:rPr lang="en-US" sz="470" b="1" dirty="0">
+              <a:rPr lang="en-US" sz="587" b="1" dirty="0">
                 <a:solidFill>
                   <a:srgbClr val="FFFFFF"/>
                 </a:solidFill>
@@ -7924,7 +7924,7 @@
               </a:rPr>
               <a:t>阶段 3 · 4</a:t>
             </a:r>
-            <a:endParaRPr lang="en-US" sz="620" dirty="0"/>
+            <a:endParaRPr lang="en-US" sz="775" dirty="0"/>
           </a:p>
         </p:txBody>
       </p:sp>
@@ -7936,8 +7936,8 @@
         </p:nvSpPr>
         <p:spPr>
           <a:xfrm>
-            <a:off x="8164836" y="3356652"/>
-            <a:ext cx="3509105" cy="95012"/>
+            <a:off x="8164836" y="3320405"/>
+            <a:ext cx="3509105" cy="142613"/>
           </a:xfrm>
           <a:prstGeom prst="rect">
             <a:avLst/>
@@ -7960,7 +7960,7 @@
               <a:buNone/>
             </a:pPr>
             <a:r>
-              <a:rPr lang="en-US" sz="550" dirty="0">
+              <a:rPr lang="en-US" sz="687" dirty="0">
                 <a:solidFill>
                   <a:srgbClr val="52605A"/>
                 </a:solidFill>
@@ -7977,7 +7977,7 @@
               <a:buNone/>
             </a:pPr>
             <a:r>
-              <a:rPr lang="en-US" sz="550" b="1" dirty="0">
+              <a:rPr lang="en-US" sz="687" b="1" dirty="0">
                 <a:solidFill>
                   <a:srgbClr val="52605A"/>
                 </a:solidFill>
@@ -7997,7 +7997,7 @@
               <a:buNone/>
             </a:pPr>
             <a:r>
-              <a:rPr lang="en-US" sz="550" dirty="0">
+              <a:rPr lang="en-US" sz="687" dirty="0">
                 <a:solidFill>
                   <a:srgbClr val="52605A"/>
                 </a:solidFill>
@@ -8014,7 +8014,7 @@
               <a:buNone/>
             </a:pPr>
             <a:r>
-              <a:rPr lang="en-US" sz="550" b="1" dirty="0">
+              <a:rPr lang="en-US" sz="687" b="1" dirty="0">
                 <a:solidFill>
                   <a:srgbClr val="52605A"/>
                 </a:solidFill>
@@ -8034,7 +8034,7 @@
               <a:buNone/>
             </a:pPr>
             <a:r>
-              <a:rPr lang="en-US" sz="550" dirty="0">
+              <a:rPr lang="en-US" sz="687" dirty="0">
                 <a:solidFill>
                   <a:srgbClr val="52605A"/>
                 </a:solidFill>
@@ -8044,7 +8044,7 @@
               </a:rPr>
               <a:t>取业务真值。</a:t>
             </a:r>
-            <a:endParaRPr lang="en-US" sz="550" dirty="0"/>
+            <a:endParaRPr lang="en-US" sz="687" dirty="0"/>
           </a:p>
         </p:txBody>
       </p:sp>
@@ -8056,8 +8056,8 @@
         </p:nvSpPr>
         <p:spPr>
           <a:xfrm>
-            <a:off x="8063490" y="3571023"/>
-            <a:ext cx="3692795" cy="329375"/>
+            <a:off x="8063490" y="3642176"/>
+            <a:ext cx="3692795" cy="494391"/>
           </a:xfrm>
           <a:prstGeom prst="roundRect">
             <a:avLst>
@@ -8078,8 +8078,8 @@
         </p:nvSpPr>
         <p:spPr>
           <a:xfrm>
-            <a:off x="8164836" y="3628525"/>
-            <a:ext cx="3509105" cy="101346"/>
+            <a:off x="8164836" y="3728487"/>
+            <a:ext cx="3509105" cy="152120"/>
           </a:xfrm>
           <a:prstGeom prst="rect">
             <a:avLst/>
@@ -8096,7 +8096,7 @@
               <a:buNone/>
             </a:pPr>
             <a:r>
-              <a:rPr lang="en-US" sz="620" b="1" dirty="0">
+              <a:rPr lang="en-US" sz="775" b="1" dirty="0">
                 <a:solidFill>
                   <a:srgbClr val="356B41"/>
                 </a:solidFill>
@@ -8110,7 +8110,7 @@
               <a:buNone/>
             </a:pPr>
             <a:r>
-              <a:rPr lang="en-US" sz="470" b="1" dirty="0">
+              <a:rPr lang="en-US" sz="587" b="1" dirty="0">
                 <a:solidFill>
                   <a:srgbClr val="FFFFFF"/>
                 </a:solidFill>
@@ -8123,7 +8123,7 @@
               </a:rPr>
               <a:t>阶段 1 · 3 · 5</a:t>
             </a:r>
-            <a:endParaRPr lang="en-US" sz="620" dirty="0"/>
+            <a:endParaRPr lang="en-US" sz="775" dirty="0"/>
           </a:p>
         </p:txBody>
       </p:sp>
@@ -8135,8 +8135,8 @@
         </p:nvSpPr>
         <p:spPr>
           <a:xfrm>
-            <a:off x="8164836" y="3748378"/>
-            <a:ext cx="3509105" cy="95012"/>
+            <a:off x="8164836" y="3908386"/>
+            <a:ext cx="3509105" cy="142613"/>
           </a:xfrm>
           <a:prstGeom prst="rect">
             <a:avLst/>
@@ -8159,7 +8159,7 @@
               <a:buNone/>
             </a:pPr>
             <a:r>
-              <a:rPr lang="en-US" sz="550" dirty="0">
+              <a:rPr lang="en-US" sz="687" dirty="0">
                 <a:solidFill>
                   <a:srgbClr val="52605A"/>
                 </a:solidFill>
@@ -8176,7 +8176,7 @@
               <a:buNone/>
             </a:pPr>
             <a:r>
-              <a:rPr lang="en-US" sz="550" b="1" dirty="0">
+              <a:rPr lang="en-US" sz="687" b="1" dirty="0">
                 <a:solidFill>
                   <a:srgbClr val="52605A"/>
                 </a:solidFill>
@@ -8196,7 +8196,7 @@
               <a:buNone/>
             </a:pPr>
             <a:r>
-              <a:rPr lang="en-US" sz="550" dirty="0">
+              <a:rPr lang="en-US" sz="687" dirty="0">
                 <a:solidFill>
                   <a:srgbClr val="52605A"/>
                 </a:solidFill>
@@ -8206,7 +8206,7 @@
               </a:rPr>
               <a:t>定位；执行期增量沉淀、可前端维护。</a:t>
             </a:r>
-            <a:endParaRPr lang="en-US" sz="550" dirty="0"/>
+            <a:endParaRPr lang="en-US" sz="687" dirty="0"/>
           </a:p>
         </p:txBody>
       </p:sp>
@@ -8218,8 +8218,8 @@
         </p:nvSpPr>
         <p:spPr>
           <a:xfrm>
-            <a:off x="8063490" y="4893173"/>
-            <a:ext cx="3692795" cy="202692"/>
+            <a:off x="8063490" y="5626723"/>
+            <a:ext cx="3692795" cy="304240"/>
           </a:xfrm>
           <a:prstGeom prst="roundRect">
             <a:avLst>
@@ -8244,7 +8244,7 @@
               <a:buNone/>
             </a:pPr>
             <a:r>
-              <a:rPr lang="en-US" sz="520" b="1" dirty="0">
+              <a:rPr lang="en-US" sz="650" b="1" dirty="0">
                 <a:solidFill>
                   <a:srgbClr val="52605A"/>
                 </a:solidFill>
@@ -8264,7 +8264,7 @@
               <a:buNone/>
             </a:pPr>
             <a:r>
-              <a:rPr lang="en-US" sz="520" dirty="0">
+              <a:rPr lang="en-US" sz="650" dirty="0">
                 <a:solidFill>
                   <a:srgbClr val="52605A"/>
                 </a:solidFill>
@@ -8281,7 +8281,7 @@
               <a:buNone/>
             </a:pPr>
             <a:r>
-              <a:rPr lang="en-US" sz="520" b="1" dirty="0">
+              <a:rPr lang="en-US" sz="650" b="1" dirty="0">
                 <a:solidFill>
                   <a:srgbClr val="52605A"/>
                 </a:solidFill>
@@ -8301,7 +8301,7 @@
               <a:buNone/>
             </a:pPr>
             <a:r>
-              <a:rPr lang="en-US" sz="520" dirty="0">
+              <a:rPr lang="en-US" sz="650" dirty="0">
                 <a:solidFill>
                   <a:srgbClr val="52605A"/>
                 </a:solidFill>
@@ -8318,7 +8318,7 @@
               <a:buNone/>
             </a:pPr>
             <a:r>
-              <a:rPr lang="en-US" sz="520" b="1" dirty="0">
+              <a:rPr lang="en-US" sz="650" b="1" dirty="0">
                 <a:solidFill>
                   <a:srgbClr val="52605A"/>
                 </a:solidFill>
@@ -8338,7 +8338,7 @@
               <a:buNone/>
             </a:pPr>
             <a:r>
-              <a:rPr lang="en-US" sz="520" dirty="0">
+              <a:rPr lang="en-US" sz="650" dirty="0">
                 <a:solidFill>
                   <a:srgbClr val="52605A"/>
                 </a:solidFill>
@@ -8355,7 +8355,7 @@
               <a:buNone/>
             </a:pPr>
             <a:r>
-              <a:rPr lang="en-US" sz="520" b="1" dirty="0">
+              <a:rPr lang="en-US" sz="650" b="1" dirty="0">
                 <a:solidFill>
                   <a:srgbClr val="52605A"/>
                 </a:solidFill>
@@ -8375,7 +8375,7 @@
               <a:buNone/>
             </a:pPr>
             <a:r>
-              <a:rPr lang="en-US" sz="520" dirty="0">
+              <a:rPr lang="en-US" sz="650" dirty="0">
                 <a:solidFill>
                   <a:srgbClr val="52605A"/>
                 </a:solidFill>
@@ -8385,7 +8385,7 @@
               </a:rPr>
               <a:t>。</a:t>
             </a:r>
-            <a:endParaRPr lang="en-US" sz="520" dirty="0"/>
+            <a:endParaRPr lang="en-US" sz="650" dirty="0"/>
           </a:p>
         </p:txBody>
       </p:sp>
@@ -8397,7 +8397,7 @@
         </p:nvSpPr>
         <p:spPr>
           <a:xfrm>
-            <a:off x="403850" y="-64468"/>
+            <a:off x="403850" y="6498000"/>
             <a:ext cx="1146477" cy="95012"/>
           </a:xfrm>
           <a:prstGeom prst="rect">
@@ -8415,7 +8415,7 @@
               <a:buNone/>
             </a:pPr>
             <a:r>
-              <a:rPr lang="en-US" sz="550" dirty="0">
+              <a:rPr lang="en-US" sz="687" dirty="0">
                 <a:solidFill>
                   <a:srgbClr val="8A948E"/>
                 </a:solidFill>
@@ -8425,7 +8425,7 @@
               </a:rPr>
               <a:t>T-Agent 进展汇报 · 第 3 页 / 共 4 页</a:t>
             </a:r>
-            <a:endParaRPr lang="en-US" sz="550" dirty="0"/>
+            <a:endParaRPr lang="en-US" sz="687" dirty="0"/>
           </a:p>
         </p:txBody>
       </p:sp>
@@ -8441,7 +8441,7 @@
           <a:blip r:embed="rId17">
             <a:extLst>
               <a:ext uri="{96DAC541-7B7A-43D3-8B79-37D633B846F1}">
-                <asvg:svgBlip xmlns:asvg="http://schemas.microsoft.com/office/drawing/2016/SVG/main" r:embed="rId18"/>
+                <ns3:svgBlip r:embed="rId18"/>
               </a:ext>
             </a:extLst>
           </a:blip>
@@ -8451,7 +8451,7 @@
         </p:blipFill>
         <p:spPr>
           <a:xfrm>
-            <a:off x="595556" y="2226259"/>
+            <a:off x="595556" y="1696673"/>
             <a:ext cx="7379256" cy="291370"/>
           </a:xfrm>
           <a:prstGeom prst="rect">
@@ -8471,7 +8471,7 @@
           <a:blip r:embed="rId19">
             <a:extLst>
               <a:ext uri="{96DAC541-7B7A-43D3-8B79-37D633B846F1}">
-                <asvg:svgBlip xmlns:asvg="http://schemas.microsoft.com/office/drawing/2016/SVG/main" r:embed="rId20"/>
+                <ns3:svgBlip r:embed="rId20"/>
               </a:ext>
             </a:extLst>
           </a:blip>
@@ -8481,7 +8481,7 @@
         </p:blipFill>
         <p:spPr>
           <a:xfrm>
-            <a:off x="595556" y="2563848"/>
+            <a:off x="595556" y="2203394"/>
             <a:ext cx="7379256" cy="291370"/>
           </a:xfrm>
           <a:prstGeom prst="rect">
@@ -8501,7 +8501,7 @@
           <a:blip r:embed="rId21">
             <a:extLst>
               <a:ext uri="{96DAC541-7B7A-43D3-8B79-37D633B846F1}">
-                <asvg:svgBlip xmlns:asvg="http://schemas.microsoft.com/office/drawing/2016/SVG/main" r:embed="rId22"/>
+                <ns3:svgBlip r:embed="rId22"/>
               </a:ext>
             </a:extLst>
           </a:blip>
@@ -8511,7 +8511,7 @@
         </p:blipFill>
         <p:spPr>
           <a:xfrm>
-            <a:off x="595556" y="2901437"/>
+            <a:off x="595556" y="2710116"/>
             <a:ext cx="7379256" cy="291370"/>
           </a:xfrm>
           <a:prstGeom prst="rect">
@@ -8531,7 +8531,7 @@
           <a:blip r:embed="rId23">
             <a:extLst>
               <a:ext uri="{96DAC541-7B7A-43D3-8B79-37D633B846F1}">
-                <asvg:svgBlip xmlns:asvg="http://schemas.microsoft.com/office/drawing/2016/SVG/main" r:embed="rId24"/>
+                <ns3:svgBlip r:embed="rId24"/>
               </a:ext>
             </a:extLst>
           </a:blip>
@@ -8541,7 +8541,7 @@
         </p:blipFill>
         <p:spPr>
           <a:xfrm>
-            <a:off x="595556" y="3239026"/>
+            <a:off x="595556" y="3216837"/>
             <a:ext cx="7379256" cy="291370"/>
           </a:xfrm>
           <a:prstGeom prst="rect">
@@ -8561,7 +8561,7 @@
           <a:blip r:embed="rId25">
             <a:extLst>
               <a:ext uri="{96DAC541-7B7A-43D3-8B79-37D633B846F1}">
-                <asvg:svgBlip xmlns:asvg="http://schemas.microsoft.com/office/drawing/2016/SVG/main" r:embed="rId26"/>
+                <ns3:svgBlip r:embed="rId26"/>
               </a:ext>
             </a:extLst>
           </a:blip>
@@ -8571,7 +8571,7 @@
         </p:blipFill>
         <p:spPr>
           <a:xfrm>
-            <a:off x="595556" y="3576615"/>
+            <a:off x="595556" y="3723558"/>
             <a:ext cx="7379256" cy="291370"/>
           </a:xfrm>
           <a:prstGeom prst="rect">
@@ -8591,7 +8591,7 @@
           <a:blip r:embed="rId27">
             <a:extLst>
               <a:ext uri="{96DAC541-7B7A-43D3-8B79-37D633B846F1}">
-                <asvg:svgBlip xmlns:asvg="http://schemas.microsoft.com/office/drawing/2016/SVG/main" r:embed="rId28"/>
+                <ns3:svgBlip r:embed="rId28"/>
               </a:ext>
             </a:extLst>
           </a:blip>
@@ -8601,7 +8601,7 @@
         </p:blipFill>
         <p:spPr>
           <a:xfrm>
-            <a:off x="665133" y="3620954"/>
+            <a:off x="665133" y="3767897"/>
             <a:ext cx="3585115" cy="202692"/>
           </a:xfrm>
           <a:prstGeom prst="rect">
@@ -8621,7 +8621,7 @@
           <a:blip r:embed="rId29">
             <a:extLst>
               <a:ext uri="{96DAC541-7B7A-43D3-8B79-37D633B846F1}">
-                <asvg:svgBlip xmlns:asvg="http://schemas.microsoft.com/office/drawing/2016/SVG/main" r:embed="rId30"/>
+                <ns3:svgBlip r:embed="rId30"/>
               </a:ext>
             </a:extLst>
           </a:blip>
@@ -8631,7 +8631,7 @@
         </p:blipFill>
         <p:spPr>
           <a:xfrm>
-            <a:off x="4313737" y="3620954"/>
+            <a:off x="4313737" y="3767897"/>
             <a:ext cx="3585115" cy="202692"/>
           </a:xfrm>
           <a:prstGeom prst="rect">
@@ -8651,7 +8651,7 @@
           <a:blip r:embed="rId31">
             <a:extLst>
               <a:ext uri="{96DAC541-7B7A-43D3-8B79-37D633B846F1}">
-                <asvg:svgBlip xmlns:asvg="http://schemas.microsoft.com/office/drawing/2016/SVG/main" r:embed="rId32"/>
+                <ns3:svgBlip r:embed="rId32"/>
               </a:ext>
             </a:extLst>
           </a:blip>
@@ -8661,7 +8661,7 @@
         </p:blipFill>
         <p:spPr>
           <a:xfrm>
-            <a:off x="595556" y="3914204"/>
+            <a:off x="595556" y="4230279"/>
             <a:ext cx="7379256" cy="291370"/>
           </a:xfrm>
           <a:prstGeom prst="rect">
@@ -8681,7 +8681,7 @@
           <a:blip r:embed="rId33">
             <a:extLst>
               <a:ext uri="{96DAC541-7B7A-43D3-8B79-37D633B846F1}">
-                <asvg:svgBlip xmlns:asvg="http://schemas.microsoft.com/office/drawing/2016/SVG/main" r:embed="rId34"/>
+                <ns3:svgBlip r:embed="rId34"/>
               </a:ext>
             </a:extLst>
           </a:blip>
@@ -8691,7 +8691,7 @@
         </p:blipFill>
         <p:spPr>
           <a:xfrm>
-            <a:off x="595556" y="4251793"/>
+            <a:off x="595556" y="4737000"/>
             <a:ext cx="7379256" cy="291370"/>
           </a:xfrm>
           <a:prstGeom prst="rect">
@@ -8711,7 +8711,7 @@
           <a:blip r:embed="rId35">
             <a:extLst>
               <a:ext uri="{96DAC541-7B7A-43D3-8B79-37D633B846F1}">
-                <asvg:svgBlip xmlns:asvg="http://schemas.microsoft.com/office/drawing/2016/SVG/main" r:embed="rId36"/>
+                <ns3:svgBlip r:embed="rId36"/>
               </a:ext>
             </a:extLst>
           </a:blip>
@@ -8721,7 +8721,7 @@
         </p:blipFill>
         <p:spPr>
           <a:xfrm>
-            <a:off x="665133" y="4296132"/>
+            <a:off x="665133" y="4781339"/>
             <a:ext cx="3585115" cy="202692"/>
           </a:xfrm>
           <a:prstGeom prst="rect">
@@ -8741,7 +8741,7 @@
           <a:blip r:embed="rId37">
             <a:extLst>
               <a:ext uri="{96DAC541-7B7A-43D3-8B79-37D633B846F1}">
-                <asvg:svgBlip xmlns:asvg="http://schemas.microsoft.com/office/drawing/2016/SVG/main" r:embed="rId38"/>
+                <ns3:svgBlip r:embed="rId38"/>
               </a:ext>
             </a:extLst>
           </a:blip>
@@ -8751,7 +8751,7 @@
         </p:blipFill>
         <p:spPr>
           <a:xfrm>
-            <a:off x="4313737" y="4296132"/>
+            <a:off x="4313737" y="4781339"/>
             <a:ext cx="3585115" cy="202692"/>
           </a:xfrm>
           <a:prstGeom prst="rect">
@@ -8771,7 +8771,7 @@
           <a:blip r:embed="rId39">
             <a:extLst>
               <a:ext uri="{96DAC541-7B7A-43D3-8B79-37D633B846F1}">
-                <asvg:svgBlip xmlns:asvg="http://schemas.microsoft.com/office/drawing/2016/SVG/main" r:embed="rId40"/>
+                <ns3:svgBlip r:embed="rId40"/>
               </a:ext>
             </a:extLst>
           </a:blip>
@@ -8781,7 +8781,7 @@
         </p:blipFill>
         <p:spPr>
           <a:xfrm>
-            <a:off x="595556" y="4589382"/>
+            <a:off x="595556" y="5243721"/>
             <a:ext cx="7379256" cy="291370"/>
           </a:xfrm>
           <a:prstGeom prst="rect">
@@ -8801,7 +8801,7 @@
           <a:blip r:embed="rId41">
             <a:extLst>
               <a:ext uri="{96DAC541-7B7A-43D3-8B79-37D633B846F1}">
-                <asvg:svgBlip xmlns:asvg="http://schemas.microsoft.com/office/drawing/2016/SVG/main" r:embed="rId42"/>
+                <ns3:svgBlip r:embed="rId42"/>
               </a:ext>
             </a:extLst>
           </a:blip>
@@ -8811,7 +8811,7 @@
         </p:blipFill>
         <p:spPr>
           <a:xfrm>
-            <a:off x="8063490" y="2225318"/>
+            <a:off x="8063490" y="1649247"/>
             <a:ext cx="3692795" cy="107680"/>
           </a:xfrm>
           <a:prstGeom prst="rect">
@@ -8831,7 +8831,7 @@
           <a:blip r:embed="rId43">
             <a:extLst>
               <a:ext uri="{96DAC541-7B7A-43D3-8B79-37D633B846F1}">
-                <asvg:svgBlip xmlns:asvg="http://schemas.microsoft.com/office/drawing/2016/SVG/main" r:embed="rId44"/>
+                <ns3:svgBlip r:embed="rId44"/>
               </a:ext>
             </a:extLst>
           </a:blip>
@@ -8841,7 +8841,7 @@
         </p:blipFill>
         <p:spPr>
           <a:xfrm>
-            <a:off x="8063490" y="2395845"/>
+            <a:off x="8063490" y="1960742"/>
             <a:ext cx="3692795" cy="329375"/>
           </a:xfrm>
           <a:prstGeom prst="rect">
@@ -8861,7 +8861,7 @@
           <a:blip r:embed="rId45">
             <a:extLst>
               <a:ext uri="{96DAC541-7B7A-43D3-8B79-37D633B846F1}">
-                <asvg:svgBlip xmlns:asvg="http://schemas.microsoft.com/office/drawing/2016/SVG/main" r:embed="rId46"/>
+                <ns3:svgBlip r:embed="rId46"/>
               </a:ext>
             </a:extLst>
           </a:blip>
@@ -8871,7 +8871,7 @@
         </p:blipFill>
         <p:spPr>
           <a:xfrm>
-            <a:off x="8063490" y="2787571"/>
+            <a:off x="8063490" y="2548723"/>
             <a:ext cx="3692795" cy="329375"/>
           </a:xfrm>
           <a:prstGeom prst="rect">
@@ -8891,7 +8891,7 @@
           <a:blip r:embed="rId47">
             <a:extLst>
               <a:ext uri="{96DAC541-7B7A-43D3-8B79-37D633B846F1}">
-                <asvg:svgBlip xmlns:asvg="http://schemas.microsoft.com/office/drawing/2016/SVG/main" r:embed="rId48"/>
+                <ns3:svgBlip r:embed="rId48"/>
               </a:ext>
             </a:extLst>
           </a:blip>
@@ -8901,7 +8901,7 @@
         </p:blipFill>
         <p:spPr>
           <a:xfrm>
-            <a:off x="8063490" y="3179297"/>
+            <a:off x="8063490" y="3136704"/>
             <a:ext cx="3692795" cy="329375"/>
           </a:xfrm>
           <a:prstGeom prst="rect">
@@ -8921,7 +8921,7 @@
           <a:blip r:embed="rId49">
             <a:extLst>
               <a:ext uri="{96DAC541-7B7A-43D3-8B79-37D633B846F1}">
-                <asvg:svgBlip xmlns:asvg="http://schemas.microsoft.com/office/drawing/2016/SVG/main" r:embed="rId50"/>
+                <ns3:svgBlip r:embed="rId50"/>
               </a:ext>
             </a:extLst>
           </a:blip>
@@ -8931,7 +8931,7 @@
         </p:blipFill>
         <p:spPr>
           <a:xfrm>
-            <a:off x="8063490" y="3571023"/>
+            <a:off x="8063490" y="3724684"/>
             <a:ext cx="3692795" cy="329375"/>
           </a:xfrm>
           <a:prstGeom prst="rect">
@@ -8948,7 +8948,7 @@
 </file>
 
 <file path=ppt/slides/slide4.xml><?xml version="1.0" encoding="utf-8"?>
-<p:sld xmlns:a="http://schemas.openxmlformats.org/drawingml/2006/main" xmlns:r="http://schemas.openxmlformats.org/officeDocument/2006/relationships" xmlns:p="http://schemas.openxmlformats.org/presentationml/2006/main">
+<p:sld xmlns:a="http://schemas.openxmlformats.org/drawingml/2006/main" xmlns:ns3="http://schemas.microsoft.com/office/drawing/2016/SVG/main" xmlns:p="http://schemas.openxmlformats.org/presentationml/2006/main" xmlns:r="http://schemas.openxmlformats.org/officeDocument/2006/relationships">
   <p:cSld name="Slide 4">
     <p:spTree>
       <p:nvGrpSpPr>
@@ -8972,8 +8972,8 @@
         </p:nvSpPr>
         <p:spPr>
           <a:xfrm>
-            <a:off x="0" y="1702951"/>
-            <a:ext cx="12161520" cy="3452098"/>
+            <a:off x="0" y="320040"/>
+            <a:ext cx="12161520" cy="6217920"/>
           </a:xfrm>
           <a:prstGeom prst="rect">
             <a:avLst/>
@@ -8992,8 +8992,8 @@
         </p:nvSpPr>
         <p:spPr>
           <a:xfrm>
-            <a:off x="405384" y="1993232"/>
-            <a:ext cx="11350752" cy="120348"/>
+            <a:off x="405384" y="842894"/>
+            <a:ext cx="11350752" cy="216770"/>
           </a:xfrm>
           <a:prstGeom prst="rect">
             <a:avLst/>
@@ -9010,7 +9010,7 @@
               <a:buNone/>
             </a:pPr>
             <a:r>
-              <a:rPr lang="en-US" sz="700" b="1" spc="100" kern="0" dirty="0">
+              <a:rPr lang="en-US" sz="875" b="1" spc="100" kern="0" dirty="0">
                 <a:solidFill>
                   <a:srgbClr val="478D54"/>
                 </a:solidFill>
@@ -9020,7 +9020,7 @@
               </a:rPr>
               <a:t>效果 · 进展 · 计划</a:t>
             </a:r>
-            <a:endParaRPr lang="en-US" sz="700" dirty="0"/>
+            <a:endParaRPr lang="en-US" sz="875" dirty="0"/>
           </a:p>
         </p:txBody>
       </p:sp>
@@ -9032,8 +9032,8 @@
         </p:nvSpPr>
         <p:spPr>
           <a:xfrm>
-            <a:off x="405384" y="2138917"/>
-            <a:ext cx="11350752" cy="253365"/>
+            <a:off x="405384" y="1105302"/>
+            <a:ext cx="11350752" cy="456361"/>
           </a:xfrm>
           <a:prstGeom prst="rect">
             <a:avLst/>
@@ -9053,7 +9053,7 @@
               <a:buNone/>
             </a:pPr>
             <a:r>
-              <a:rPr lang="en-US" sz="1500" b="1" dirty="0">
+              <a:rPr lang="en-US" sz="1875" b="1" dirty="0">
                 <a:solidFill>
                   <a:srgbClr val="1F2A24"/>
                 </a:solidFill>
@@ -9063,7 +9063,7 @@
               </a:rPr>
               <a:t>效果演示 · 当前进展 · 下一步计划</a:t>
             </a:r>
-            <a:endParaRPr lang="en-US" sz="1500" dirty="0"/>
+            <a:endParaRPr lang="en-US" sz="1875" dirty="0"/>
           </a:p>
         </p:txBody>
       </p:sp>
@@ -9075,8 +9075,8 @@
         </p:nvSpPr>
         <p:spPr>
           <a:xfrm>
-            <a:off x="405384" y="2468291"/>
-            <a:ext cx="380048" cy="25337"/>
+            <a:off x="405384" y="1698570"/>
+            <a:ext cx="380048" cy="45637"/>
           </a:xfrm>
           <a:prstGeom prst="roundRect">
             <a:avLst>
@@ -9097,8 +9097,8 @@
         </p:nvSpPr>
         <p:spPr>
           <a:xfrm>
-            <a:off x="406621" y="2569637"/>
-            <a:ext cx="5472684" cy="120348"/>
+            <a:off x="406621" y="1881115"/>
+            <a:ext cx="5472684" cy="216770"/>
           </a:xfrm>
           <a:prstGeom prst="rect">
             <a:avLst/>
@@ -9115,7 +9115,7 @@
               <a:buNone/>
             </a:pPr>
             <a:r>
-              <a:rPr lang="en-US" sz="700" b="1" dirty="0">
+              <a:rPr lang="en-US" sz="875" b="1" dirty="0">
                 <a:solidFill>
                   <a:srgbClr val="356B41"/>
                 </a:solidFill>
@@ -9125,7 +9125,7 @@
               </a:rPr>
               <a:t>① 演示录屏</a:t>
             </a:r>
-            <a:endParaRPr lang="en-US" sz="700" dirty="0"/>
+            <a:endParaRPr lang="en-US" sz="875" dirty="0"/>
           </a:p>
         </p:txBody>
       </p:sp>
@@ -9137,8 +9137,8 @@
         </p:nvSpPr>
         <p:spPr>
           <a:xfrm>
-            <a:off x="406621" y="2741451"/>
-            <a:ext cx="5472684" cy="1279493"/>
+            <a:off x="406621" y="2190586"/>
+            <a:ext cx="5472684" cy="2304623"/>
           </a:xfrm>
           <a:prstGeom prst="roundRect">
             <a:avLst>
@@ -9164,7 +9164,7 @@
         </p:nvSpPr>
         <p:spPr>
           <a:xfrm>
-            <a:off x="3038450" y="2993232"/>
+            <a:off x="3038450" y="2773504"/>
             <a:ext cx="209026" cy="323040"/>
           </a:xfrm>
           <a:prstGeom prst="rect">
@@ -9182,7 +9182,7 @@
               <a:buNone/>
             </a:pPr>
             <a:r>
-              <a:rPr lang="en-US" sz="1900" dirty="0">
+              <a:rPr lang="en-US" sz="2375" dirty="0">
                 <a:solidFill>
                   <a:srgbClr val="478D54"/>
                 </a:solidFill>
@@ -9192,7 +9192,7 @@
               </a:rPr>
               <a:t>▶</a:t>
             </a:r>
-            <a:endParaRPr lang="en-US" sz="1900" dirty="0"/>
+            <a:endParaRPr lang="en-US" sz="2375" dirty="0"/>
           </a:p>
         </p:txBody>
       </p:sp>
@@ -9204,8 +9204,8 @@
         </p:nvSpPr>
         <p:spPr>
           <a:xfrm>
-            <a:off x="2743864" y="3373279"/>
-            <a:ext cx="798100" cy="120348"/>
+            <a:off x="2743864" y="3328635"/>
+            <a:ext cx="798100" cy="216770"/>
           </a:xfrm>
           <a:prstGeom prst="rect">
             <a:avLst/>
@@ -9222,7 +9222,7 @@
               <a:buNone/>
             </a:pPr>
             <a:r>
-              <a:rPr lang="en-US" sz="700" dirty="0">
+              <a:rPr lang="en-US" sz="875" dirty="0">
                 <a:solidFill>
                   <a:srgbClr val="52605A"/>
                 </a:solidFill>
@@ -9232,7 +9232,7 @@
               </a:rPr>
               <a:t>演示录屏（待插入）</a:t>
             </a:r>
-            <a:endParaRPr lang="en-US" sz="700" dirty="0"/>
+            <a:endParaRPr lang="en-US" sz="875" dirty="0"/>
           </a:p>
         </p:txBody>
       </p:sp>
@@ -9244,8 +9244,8 @@
         </p:nvSpPr>
         <p:spPr>
           <a:xfrm>
-            <a:off x="2354365" y="3549051"/>
-            <a:ext cx="1577197" cy="221694"/>
+            <a:off x="2354365" y="3645235"/>
+            <a:ext cx="1577197" cy="399315"/>
           </a:xfrm>
           <a:prstGeom prst="rect">
             <a:avLst/>
@@ -9265,7 +9265,7 @@
               <a:buNone/>
             </a:pPr>
             <a:r>
-              <a:rPr lang="en-US" sz="570" dirty="0">
+              <a:rPr lang="en-US" sz="712" dirty="0">
                 <a:solidFill>
                   <a:srgbClr val="8A948E"/>
                 </a:solidFill>
@@ -9278,7 +9278,7 @@
             <a:pPr algn="ctr" indent="0" marL="0">
               <a:buNone/>
             </a:pPr>
-            <a:endParaRPr lang="en-US" sz="570" dirty="0"/>
+            <a:endParaRPr lang="en-US" sz="712" dirty="0"/>
           </a:p>
           <a:p>
             <a:pPr algn="ctr" indent="0" marL="0">
@@ -9288,7 +9288,7 @@
               <a:buNone/>
             </a:pPr>
             <a:r>
-              <a:rPr lang="en-US" sz="570" dirty="0">
+              <a:rPr lang="en-US" sz="712" dirty="0">
                 <a:solidFill>
                   <a:srgbClr val="8A948E"/>
                 </a:solidFill>
@@ -9298,7 +9298,7 @@
               </a:rPr>
               <a:t>对比「判定方式」与「有无代码产出」</a:t>
             </a:r>
-            <a:endParaRPr lang="en-US" sz="570" dirty="0"/>
+            <a:endParaRPr lang="en-US" sz="712" dirty="0"/>
           </a:p>
         </p:txBody>
       </p:sp>
@@ -9310,8 +9310,8 @@
         </p:nvSpPr>
         <p:spPr>
           <a:xfrm>
-            <a:off x="6005988" y="2569637"/>
-            <a:ext cx="5751385" cy="120348"/>
+            <a:off x="6005988" y="1881115"/>
+            <a:ext cx="5751385" cy="216770"/>
           </a:xfrm>
           <a:prstGeom prst="rect">
             <a:avLst/>
@@ -9328,7 +9328,7 @@
               <a:buNone/>
             </a:pPr>
             <a:r>
-              <a:rPr lang="en-US" sz="700" b="1" dirty="0">
+              <a:rPr lang="en-US" sz="875" b="1" dirty="0">
                 <a:solidFill>
                   <a:srgbClr val="356B41"/>
                 </a:solidFill>
@@ -9338,7 +9338,7 @@
               </a:rPr>
               <a:t>② 当前进展</a:t>
             </a:r>
-            <a:endParaRPr lang="en-US" sz="700" dirty="0"/>
+            <a:endParaRPr lang="en-US" sz="875" dirty="0"/>
           </a:p>
         </p:txBody>
       </p:sp>
@@ -9350,8 +9350,8 @@
         </p:nvSpPr>
         <p:spPr>
           <a:xfrm>
-            <a:off x="6005988" y="2740659"/>
-            <a:ext cx="5751385" cy="164687"/>
+            <a:off x="6005988" y="2189159"/>
+            <a:ext cx="5751385" cy="296634"/>
           </a:xfrm>
           <a:prstGeom prst="rect">
             <a:avLst/>
@@ -9368,7 +9368,7 @@
               <a:buNone/>
             </a:pPr>
             <a:r>
-              <a:rPr lang="en-US" sz="570" b="1" dirty="0">
+              <a:rPr lang="en-US" sz="712" b="1" dirty="0">
                 <a:solidFill>
                   <a:srgbClr val="FFFFFF"/>
                 </a:solidFill>
@@ -9388,7 +9388,7 @@
               <a:buNone/>
             </a:pPr>
             <a:r>
-              <a:rPr lang="en-US" sz="800" dirty="0">
+              <a:rPr lang="en-US" sz="1000" dirty="0">
                 <a:solidFill>
                   <a:srgbClr val="1F2A24"/>
                 </a:solidFill>
@@ -9402,7 +9402,7 @@
               <a:buNone/>
             </a:pPr>
             <a:r>
-              <a:rPr lang="en-US" sz="570" b="1" dirty="0">
+              <a:rPr lang="en-US" sz="712" b="1" dirty="0">
                 <a:solidFill>
                   <a:srgbClr val="FFFFFF"/>
                 </a:solidFill>
@@ -9422,7 +9422,7 @@
               <a:buNone/>
             </a:pPr>
             <a:r>
-              <a:rPr lang="en-US" sz="800" dirty="0">
+              <a:rPr lang="en-US" sz="1000" dirty="0">
                 <a:solidFill>
                   <a:srgbClr val="1F2A24"/>
                 </a:solidFill>
@@ -9436,7 +9436,7 @@
               <a:buNone/>
             </a:pPr>
             <a:r>
-              <a:rPr lang="en-US" sz="570" b="1" dirty="0">
+              <a:rPr lang="en-US" sz="712" b="1" dirty="0">
                 <a:solidFill>
                   <a:srgbClr val="FFFFFF"/>
                 </a:solidFill>
@@ -9456,7 +9456,7 @@
               <a:buNone/>
             </a:pPr>
             <a:r>
-              <a:rPr lang="en-US" sz="800" dirty="0">
+              <a:rPr lang="en-US" sz="1000" dirty="0">
                 <a:solidFill>
                   <a:srgbClr val="1F2A24"/>
                 </a:solidFill>
@@ -9470,7 +9470,7 @@
               <a:buNone/>
             </a:pPr>
             <a:r>
-              <a:rPr lang="en-US" sz="570" b="1" dirty="0">
+              <a:rPr lang="en-US" sz="712" b="1" dirty="0">
                 <a:solidFill>
                   <a:srgbClr val="FFFFFF"/>
                 </a:solidFill>
@@ -9490,7 +9490,7 @@
               <a:buNone/>
             </a:pPr>
             <a:r>
-              <a:rPr lang="en-US" sz="800" dirty="0">
+              <a:rPr lang="en-US" sz="1000" dirty="0">
                 <a:solidFill>
                   <a:srgbClr val="1F2A24"/>
                 </a:solidFill>
@@ -9504,7 +9504,7 @@
               <a:buNone/>
             </a:pPr>
             <a:r>
-              <a:rPr lang="en-US" sz="570" b="1" dirty="0">
+              <a:rPr lang="en-US" sz="712" b="1" dirty="0">
                 <a:solidFill>
                   <a:srgbClr val="C47F1A"/>
                 </a:solidFill>
@@ -9517,7 +9517,7 @@
               </a:rPr>
               <a:t>内网验证 ⟳</a:t>
             </a:r>
-            <a:endParaRPr lang="en-US" sz="570" dirty="0"/>
+            <a:endParaRPr lang="en-US" sz="712" dirty="0"/>
           </a:p>
         </p:txBody>
       </p:sp>
@@ -9529,8 +9529,8 @@
         </p:nvSpPr>
         <p:spPr>
           <a:xfrm>
-            <a:off x="6005988" y="2968687"/>
-            <a:ext cx="5751385" cy="101346"/>
+            <a:off x="6005988" y="2599884"/>
+            <a:ext cx="5751385" cy="182544"/>
           </a:xfrm>
           <a:prstGeom prst="rect">
             <a:avLst/>
@@ -9550,7 +9550,7 @@
               <a:buNone/>
             </a:pPr>
             <a:r>
-              <a:rPr lang="en-US" sz="620" b="1" dirty="0">
+              <a:rPr lang="en-US" sz="775" b="1" dirty="0">
                 <a:solidFill>
                   <a:srgbClr val="356B41"/>
                 </a:solidFill>
@@ -9560,7 +9560,7 @@
               </a:rPr>
               <a:t>真实环境 live 验证（DeepSeek + 真实 Chrome）</a:t>
             </a:r>
-            <a:endParaRPr lang="en-US" sz="620" dirty="0"/>
+            <a:endParaRPr lang="en-US" sz="775" dirty="0"/>
           </a:p>
         </p:txBody>
       </p:sp>
@@ -9572,8 +9572,8 @@
         </p:nvSpPr>
         <p:spPr>
           <a:xfrm>
-            <a:off x="6005988" y="3108038"/>
-            <a:ext cx="5751385" cy="120348"/>
+            <a:off x="6005988" y="2850883"/>
+            <a:ext cx="5751385" cy="216770"/>
           </a:xfrm>
           <a:prstGeom prst="rect">
             <a:avLst/>
@@ -9596,7 +9596,7 @@
               <a:buNone/>
             </a:pPr>
             <a:r>
-              <a:rPr lang="en-US" sz="550" b="1" dirty="0">
+              <a:rPr lang="en-US" sz="687" b="1" dirty="0">
                 <a:solidFill>
                   <a:srgbClr val="FFFFFF"/>
                 </a:solidFill>
@@ -9616,7 +9616,7 @@
               <a:buNone/>
             </a:pPr>
             <a:r>
-              <a:rPr lang="en-US" sz="620" dirty="0">
+              <a:rPr lang="en-US" sz="775" dirty="0">
                 <a:solidFill>
                   <a:srgbClr val="1F2A24"/>
                 </a:solidFill>
@@ -9633,7 +9633,7 @@
               <a:buNone/>
             </a:pPr>
             <a:r>
-              <a:rPr lang="en-US" sz="620" b="1" dirty="0">
+              <a:rPr lang="en-US" sz="775" b="1" dirty="0">
                 <a:solidFill>
                   <a:srgbClr val="1F2A24"/>
                 </a:solidFill>
@@ -9643,7 +9643,7 @@
               </a:rPr>
               <a:t>多轮稳定复现</a:t>
             </a:r>
-            <a:endParaRPr lang="en-US" sz="550" dirty="0"/>
+            <a:endParaRPr lang="en-US" sz="687" dirty="0"/>
           </a:p>
         </p:txBody>
       </p:sp>
@@ -9655,8 +9655,8 @@
         </p:nvSpPr>
         <p:spPr>
           <a:xfrm>
-            <a:off x="6005988" y="3266391"/>
-            <a:ext cx="5751385" cy="120348"/>
+            <a:off x="6005988" y="3136108"/>
+            <a:ext cx="5751385" cy="216770"/>
           </a:xfrm>
           <a:prstGeom prst="rect">
             <a:avLst/>
@@ -9679,7 +9679,7 @@
               <a:buNone/>
             </a:pPr>
             <a:r>
-              <a:rPr lang="en-US" sz="550" b="1" dirty="0">
+              <a:rPr lang="en-US" sz="687" b="1" dirty="0">
                 <a:solidFill>
                   <a:srgbClr val="FFFFFF"/>
                 </a:solidFill>
@@ -9699,7 +9699,7 @@
               <a:buNone/>
             </a:pPr>
             <a:r>
-              <a:rPr lang="en-US" sz="620" dirty="0">
+              <a:rPr lang="en-US" sz="775" dirty="0">
                 <a:solidFill>
                   <a:srgbClr val="1F2A24"/>
                 </a:solidFill>
@@ -9716,7 +9716,7 @@
               <a:buNone/>
             </a:pPr>
             <a:r>
-              <a:rPr lang="en-US" sz="620" b="1" dirty="0">
+              <a:rPr lang="en-US" sz="775" b="1" dirty="0">
                 <a:solidFill>
                   <a:srgbClr val="1F2A24"/>
                 </a:solidFill>
@@ -9733,7 +9733,7 @@
               <a:buNone/>
             </a:pPr>
             <a:r>
-              <a:rPr lang="en-US" sz="620" dirty="0">
+              <a:rPr lang="en-US" sz="775" dirty="0">
                 <a:solidFill>
                   <a:srgbClr val="1F2A24"/>
                 </a:solidFill>
@@ -9743,7 +9743,7 @@
               </a:rPr>
               <a:t> + 2 次自动自愈</a:t>
             </a:r>
-            <a:endParaRPr lang="en-US" sz="550" dirty="0"/>
+            <a:endParaRPr lang="en-US" sz="687" dirty="0"/>
           </a:p>
         </p:txBody>
       </p:sp>
@@ -9755,8 +9755,8 @@
         </p:nvSpPr>
         <p:spPr>
           <a:xfrm>
-            <a:off x="6005988" y="3424744"/>
-            <a:ext cx="5751385" cy="120348"/>
+            <a:off x="6005988" y="3421334"/>
+            <a:ext cx="5751385" cy="216770"/>
           </a:xfrm>
           <a:prstGeom prst="rect">
             <a:avLst/>
@@ -9779,7 +9779,7 @@
               <a:buNone/>
             </a:pPr>
             <a:r>
-              <a:rPr lang="en-US" sz="550" b="1" dirty="0">
+              <a:rPr lang="en-US" sz="687" b="1" dirty="0">
                 <a:solidFill>
                   <a:srgbClr val="FFFFFF"/>
                 </a:solidFill>
@@ -9799,7 +9799,7 @@
               <a:buNone/>
             </a:pPr>
             <a:r>
-              <a:rPr lang="en-US" sz="620" dirty="0">
+              <a:rPr lang="en-US" sz="775" dirty="0">
                 <a:solidFill>
                   <a:srgbClr val="1F2A24"/>
                 </a:solidFill>
@@ -9816,7 +9816,7 @@
               <a:buNone/>
             </a:pPr>
             <a:r>
-              <a:rPr lang="en-US" sz="620" b="1" dirty="0">
+              <a:rPr lang="en-US" sz="775" b="1" dirty="0">
                 <a:solidFill>
                   <a:srgbClr val="1F2A24"/>
                 </a:solidFill>
@@ -9826,7 +9826,7 @@
               </a:rPr>
               <a:t>Playwright 真实回放通过</a:t>
             </a:r>
-            <a:endParaRPr lang="en-US" sz="550" dirty="0"/>
+            <a:endParaRPr lang="en-US" sz="687" dirty="0"/>
           </a:p>
         </p:txBody>
       </p:sp>
@@ -9838,8 +9838,8 @@
         </p:nvSpPr>
         <p:spPr>
           <a:xfrm>
-            <a:off x="6005988" y="3583097"/>
-            <a:ext cx="5751385" cy="120348"/>
+            <a:off x="6005988" y="3706559"/>
+            <a:ext cx="5751385" cy="216770"/>
           </a:xfrm>
           <a:prstGeom prst="rect">
             <a:avLst/>
@@ -9862,7 +9862,7 @@
               <a:buNone/>
             </a:pPr>
             <a:r>
-              <a:rPr lang="en-US" sz="550" b="1" dirty="0">
+              <a:rPr lang="en-US" sz="687" b="1" dirty="0">
                 <a:solidFill>
                   <a:srgbClr val="FFFFFF"/>
                 </a:solidFill>
@@ -9882,7 +9882,7 @@
               <a:buNone/>
             </a:pPr>
             <a:r>
-              <a:rPr lang="en-US" sz="620" dirty="0">
+              <a:rPr lang="en-US" sz="775" dirty="0">
                 <a:solidFill>
                   <a:srgbClr val="1F2A24"/>
                 </a:solidFill>
@@ -9899,7 +9899,7 @@
               <a:buNone/>
             </a:pPr>
             <a:r>
-              <a:rPr lang="en-US" sz="620" b="1" dirty="0">
+              <a:rPr lang="en-US" sz="775" b="1" dirty="0">
                 <a:solidFill>
                   <a:srgbClr val="1F2A24"/>
                 </a:solidFill>
@@ -9909,7 +9909,7 @@
               </a:rPr>
               <a:t>步数 7→3</a:t>
             </a:r>
-            <a:endParaRPr lang="en-US" sz="550" dirty="0"/>
+            <a:endParaRPr lang="en-US" sz="687" dirty="0"/>
           </a:p>
         </p:txBody>
       </p:sp>
@@ -9921,8 +9921,8 @@
         </p:nvSpPr>
         <p:spPr>
           <a:xfrm>
-            <a:off x="6005988" y="3741451"/>
-            <a:ext cx="5751385" cy="120348"/>
+            <a:off x="6005988" y="3991786"/>
+            <a:ext cx="5751385" cy="216770"/>
           </a:xfrm>
           <a:prstGeom prst="rect">
             <a:avLst/>
@@ -9945,7 +9945,7 @@
               <a:buNone/>
             </a:pPr>
             <a:r>
-              <a:rPr lang="en-US" sz="550" b="1" dirty="0">
+              <a:rPr lang="en-US" sz="687" b="1" dirty="0">
                 <a:solidFill>
                   <a:srgbClr val="FFFFFF"/>
                 </a:solidFill>
@@ -9965,7 +9965,7 @@
               <a:buNone/>
             </a:pPr>
             <a:r>
-              <a:rPr lang="en-US" sz="620" dirty="0">
+              <a:rPr lang="en-US" sz="775" dirty="0">
                 <a:solidFill>
                   <a:srgbClr val="1F2A24"/>
                 </a:solidFill>
@@ -9982,7 +9982,7 @@
               <a:buNone/>
             </a:pPr>
             <a:r>
-              <a:rPr lang="en-US" sz="620" b="1" dirty="0">
+              <a:rPr lang="en-US" sz="775" b="1" dirty="0">
                 <a:solidFill>
                   <a:srgbClr val="1F2A24"/>
                 </a:solidFill>
@@ -9999,7 +9999,7 @@
               <a:buNone/>
             </a:pPr>
             <a:r>
-              <a:rPr lang="en-US" sz="620" dirty="0">
+              <a:rPr lang="en-US" sz="775" dirty="0">
                 <a:solidFill>
                   <a:srgbClr val="1F2A24"/>
                 </a:solidFill>
@@ -10009,7 +10009,7 @@
               </a:rPr>
               <a:t> 端到端跑通</a:t>
             </a:r>
-            <a:endParaRPr lang="en-US" sz="550" dirty="0"/>
+            <a:endParaRPr lang="en-US" sz="687" dirty="0"/>
           </a:p>
         </p:txBody>
       </p:sp>
@@ -10021,8 +10021,8 @@
         </p:nvSpPr>
         <p:spPr>
           <a:xfrm>
-            <a:off x="6005988" y="3913264"/>
-            <a:ext cx="5751385" cy="107680"/>
+            <a:off x="6005988" y="4301256"/>
+            <a:ext cx="5751385" cy="193953"/>
           </a:xfrm>
           <a:prstGeom prst="rect">
             <a:avLst/>
@@ -10045,7 +10045,7 @@
               <a:buNone/>
             </a:pPr>
             <a:r>
-              <a:rPr lang="en-US" sz="570" dirty="0">
+              <a:rPr lang="en-US" sz="712" dirty="0">
                 <a:solidFill>
                   <a:srgbClr val="52605A"/>
                 </a:solidFill>
@@ -10062,7 +10062,7 @@
               <a:buNone/>
             </a:pPr>
             <a:r>
-              <a:rPr lang="en-US" sz="570" b="1" dirty="0">
+              <a:rPr lang="en-US" sz="712" b="1" dirty="0">
                 <a:solidFill>
                   <a:srgbClr val="52605A"/>
                 </a:solidFill>
@@ -10082,7 +10082,7 @@
               <a:buNone/>
             </a:pPr>
             <a:r>
-              <a:rPr lang="en-US" sz="570" dirty="0">
+              <a:rPr lang="en-US" sz="712" dirty="0">
                 <a:solidFill>
                   <a:srgbClr val="52605A"/>
                 </a:solidFill>
@@ -10099,7 +10099,7 @@
               <a:buNone/>
             </a:pPr>
             <a:r>
-              <a:rPr lang="en-US" sz="570" b="1" dirty="0">
+              <a:rPr lang="en-US" sz="712" b="1" dirty="0">
                 <a:solidFill>
                   <a:srgbClr val="1F2A24"/>
                 </a:solidFill>
@@ -10119,7 +10119,7 @@
               <a:buNone/>
             </a:pPr>
             <a:r>
-              <a:rPr lang="en-US" sz="570" dirty="0">
+              <a:rPr lang="en-US" sz="712" dirty="0">
                 <a:solidFill>
                   <a:srgbClr val="52605A"/>
                 </a:solidFill>
@@ -10129,7 +10129,7 @@
               </a:rPr>
               <a:t> 验证。</a:t>
             </a:r>
-            <a:endParaRPr lang="en-US" sz="570" dirty="0"/>
+            <a:endParaRPr lang="en-US" sz="712" dirty="0"/>
           </a:p>
         </p:txBody>
       </p:sp>
@@ -10141,8 +10141,8 @@
         </p:nvSpPr>
         <p:spPr>
           <a:xfrm>
-            <a:off x="405384" y="4097745"/>
-            <a:ext cx="11350752" cy="120348"/>
+            <a:off x="405384" y="4633543"/>
+            <a:ext cx="11350752" cy="216770"/>
           </a:xfrm>
           <a:prstGeom prst="rect">
             <a:avLst/>
@@ -10162,7 +10162,7 @@
               <a:buNone/>
             </a:pPr>
             <a:r>
-              <a:rPr lang="en-US" sz="700" b="1" dirty="0">
+              <a:rPr lang="en-US" sz="875" b="1" dirty="0">
                 <a:solidFill>
                   <a:srgbClr val="356B41"/>
                 </a:solidFill>
@@ -10172,7 +10172,7 @@
               </a:rPr>
               <a:t>③ 下一步计划</a:t>
             </a:r>
-            <a:endParaRPr lang="en-US" sz="700" dirty="0"/>
+            <a:endParaRPr lang="en-US" sz="875" dirty="0"/>
           </a:p>
         </p:txBody>
       </p:sp>
@@ -10184,8 +10184,8 @@
         </p:nvSpPr>
         <p:spPr>
           <a:xfrm>
-            <a:off x="405384" y="4269063"/>
-            <a:ext cx="1076801" cy="481394"/>
+            <a:off x="405384" y="4942121"/>
+            <a:ext cx="1076801" cy="867087"/>
           </a:xfrm>
           <a:prstGeom prst="roundRect">
             <a:avLst>
@@ -10206,8 +10206,8 @@
         </p:nvSpPr>
         <p:spPr>
           <a:xfrm>
-            <a:off x="538401" y="4332108"/>
-            <a:ext cx="836105" cy="95012"/>
+            <a:off x="538401" y="5055678"/>
+            <a:ext cx="836105" cy="171135"/>
           </a:xfrm>
           <a:prstGeom prst="rect">
             <a:avLst/>
@@ -10224,7 +10224,7 @@
               <a:buNone/>
             </a:pPr>
             <a:r>
-              <a:rPr lang="en-US" sz="550" b="1" dirty="0">
+              <a:rPr lang="en-US" sz="687" b="1" dirty="0">
                 <a:solidFill>
                   <a:srgbClr val="356B41"/>
                 </a:solidFill>
@@ -10234,7 +10234,7 @@
               </a:rPr>
               <a:t>里程碑 1</a:t>
             </a:r>
-            <a:endParaRPr lang="en-US" sz="550" dirty="0"/>
+            <a:endParaRPr lang="en-US" sz="687" dirty="0"/>
           </a:p>
         </p:txBody>
       </p:sp>
@@ -10246,8 +10246,8 @@
         </p:nvSpPr>
         <p:spPr>
           <a:xfrm>
-            <a:off x="538401" y="4433751"/>
-            <a:ext cx="836105" cy="145685"/>
+            <a:off x="538401" y="5238757"/>
+            <a:ext cx="836105" cy="262407"/>
           </a:xfrm>
           <a:prstGeom prst="rect">
             <a:avLst/>
@@ -10267,7 +10267,7 @@
               <a:buNone/>
             </a:pPr>
             <a:r>
-              <a:rPr lang="en-US" sz="1050" b="1" dirty="0">
+              <a:rPr lang="en-US" sz="1312" b="1" dirty="0">
                 <a:solidFill>
                   <a:srgbClr val="478D54"/>
                 </a:solidFill>
@@ -10277,7 +10277,7 @@
               </a:rPr>
               <a:t>6 / 30</a:t>
             </a:r>
-            <a:endParaRPr lang="en-US" sz="1050" dirty="0"/>
+            <a:endParaRPr lang="en-US" sz="1312" dirty="0"/>
           </a:p>
         </p:txBody>
       </p:sp>
@@ -10289,8 +10289,8 @@
         </p:nvSpPr>
         <p:spPr>
           <a:xfrm>
-            <a:off x="538401" y="4586066"/>
-            <a:ext cx="836105" cy="101346"/>
+            <a:off x="538401" y="5513107"/>
+            <a:ext cx="836105" cy="182544"/>
           </a:xfrm>
           <a:prstGeom prst="rect">
             <a:avLst/>
@@ -10307,7 +10307,7 @@
               <a:buNone/>
             </a:pPr>
             <a:r>
-              <a:rPr lang="en-US" sz="620" dirty="0">
+              <a:rPr lang="en-US" sz="775" dirty="0">
                 <a:solidFill>
                   <a:srgbClr val="1F2A24"/>
                 </a:solidFill>
@@ -10317,7 +10317,7 @@
               </a:rPr>
               <a:t>交付 1 期计划</a:t>
             </a:r>
-            <a:endParaRPr lang="en-US" sz="620" dirty="0"/>
+            <a:endParaRPr lang="en-US" sz="775" dirty="0"/>
           </a:p>
         </p:txBody>
       </p:sp>
@@ -10329,8 +10329,8 @@
         </p:nvSpPr>
         <p:spPr>
           <a:xfrm>
-            <a:off x="1570863" y="4269063"/>
-            <a:ext cx="10185273" cy="481394"/>
+            <a:off x="1570863" y="4942121"/>
+            <a:ext cx="10185273" cy="867087"/>
           </a:xfrm>
           <a:prstGeom prst="roundRect">
             <a:avLst>
@@ -10357,7 +10357,7 @@
               <a:buNone/>
             </a:pPr>
             <a:r>
-              <a:rPr lang="en-US" sz="600" dirty="0">
+              <a:rPr lang="en-US" sz="750" dirty="0">
                 <a:solidFill>
                   <a:srgbClr val="8A948E"/>
                 </a:solidFill>
@@ -10367,7 +10367,7 @@
               </a:rPr>
               <a:t>后续里程碑（待补充）</a:t>
             </a:r>
-            <a:endParaRPr lang="en-US" sz="600" dirty="0"/>
+            <a:endParaRPr lang="en-US" sz="750" dirty="0"/>
           </a:p>
         </p:txBody>
       </p:sp>
@@ -10379,7 +10379,7 @@
         </p:nvSpPr>
         <p:spPr>
           <a:xfrm>
-            <a:off x="403850" y="-3863062"/>
+            <a:off x="403850" y="6498000"/>
             <a:ext cx="1146477" cy="95012"/>
           </a:xfrm>
           <a:prstGeom prst="rect">
@@ -10397,7 +10397,7 @@
               <a:buNone/>
             </a:pPr>
             <a:r>
-              <a:rPr lang="en-US" sz="550" dirty="0">
+              <a:rPr lang="en-US" sz="687" dirty="0">
                 <a:solidFill>
                   <a:srgbClr val="8A948E"/>
                 </a:solidFill>
@@ -10407,7 +10407,7 @@
               </a:rPr>
               <a:t>T-Agent 进展汇报 · 第 4 页 / 共 4 页</a:t>
             </a:r>
-            <a:endParaRPr lang="en-US" sz="550" dirty="0"/>
+            <a:endParaRPr lang="en-US" sz="687" dirty="0"/>
           </a:p>
         </p:txBody>
       </p:sp>
@@ -10423,7 +10423,7 @@
           <a:blip r:embed="rId1">
             <a:extLst>
               <a:ext uri="{96DAC541-7B7A-43D3-8B79-37D633B846F1}">
-                <asvg:svgBlip xmlns:asvg="http://schemas.microsoft.com/office/drawing/2016/SVG/main" r:embed="rId2"/>
+                <ns3:svgBlip r:embed="rId2"/>
               </a:ext>
             </a:extLst>
           </a:blip>
@@ -10433,7 +10433,7 @@
         </p:blipFill>
         <p:spPr>
           <a:xfrm>
-            <a:off x="406621" y="2569637"/>
+            <a:off x="406621" y="1929326"/>
             <a:ext cx="5472684" cy="120348"/>
           </a:xfrm>
           <a:prstGeom prst="rect">
@@ -10453,7 +10453,7 @@
           <a:blip r:embed="rId3">
             <a:extLst>
               <a:ext uri="{96DAC541-7B7A-43D3-8B79-37D633B846F1}">
-                <asvg:svgBlip xmlns:asvg="http://schemas.microsoft.com/office/drawing/2016/SVG/main" r:embed="rId4"/>
+                <ns3:svgBlip r:embed="rId4"/>
               </a:ext>
             </a:extLst>
           </a:blip>
@@ -10463,7 +10463,7 @@
         </p:blipFill>
         <p:spPr>
           <a:xfrm>
-            <a:off x="6005988" y="2569637"/>
+            <a:off x="6005988" y="1929326"/>
             <a:ext cx="5751385" cy="120348"/>
           </a:xfrm>
           <a:prstGeom prst="rect">
@@ -10483,7 +10483,7 @@
           <a:blip r:embed="rId5">
             <a:extLst>
               <a:ext uri="{96DAC541-7B7A-43D3-8B79-37D633B846F1}">
-                <asvg:svgBlip xmlns:asvg="http://schemas.microsoft.com/office/drawing/2016/SVG/main" r:embed="rId6"/>
+                <ns3:svgBlip r:embed="rId6"/>
               </a:ext>
             </a:extLst>
           </a:blip>
@@ -10493,7 +10493,7 @@
         </p:blipFill>
         <p:spPr>
           <a:xfrm>
-            <a:off x="405384" y="4097745"/>
+            <a:off x="405384" y="4681755"/>
             <a:ext cx="11350752" cy="120348"/>
           </a:xfrm>
           <a:prstGeom prst="rect">
@@ -10513,7 +10513,7 @@
           <a:blip r:embed="rId7">
             <a:extLst>
               <a:ext uri="{96DAC541-7B7A-43D3-8B79-37D633B846F1}">
-                <asvg:svgBlip xmlns:asvg="http://schemas.microsoft.com/office/drawing/2016/SVG/main" r:embed="rId8"/>
+                <ns3:svgBlip r:embed="rId8"/>
               </a:ext>
             </a:extLst>
           </a:blip>
@@ -10523,7 +10523,7 @@
         </p:blipFill>
         <p:spPr>
           <a:xfrm>
-            <a:off x="405384" y="4269063"/>
+            <a:off x="405384" y="5134968"/>
             <a:ext cx="1076801" cy="481394"/>
           </a:xfrm>
           <a:prstGeom prst="rect">

--- a/presentation_editable-1780906961494.pptx
+++ b/presentation_editable-1780906961494.pptx
@@ -1181,7 +1181,7 @@
               <a:buNone/>
             </a:pPr>
             <a:r>
-              <a:rPr lang="en-US" sz="875" b="1" spc="100" kern="0" dirty="0">
+              <a:rPr lang="en-US" sz="1700" b="1" spc="100" kern="0" dirty="0">
                 <a:solidFill>
                   <a:srgbClr val="478D54"/>
                 </a:solidFill>
@@ -1191,7 +1191,7 @@
               </a:rPr>
               <a:t>进度汇报</a:t>
             </a:r>
-            <a:endParaRPr lang="en-US" sz="875" dirty="0"/>
+            <a:endParaRPr lang="en-US" sz="1700" dirty="0"/>
           </a:p>
         </p:txBody>
       </p:sp>
@@ -1267,7 +1267,7 @@
               <a:buNone/>
             </a:pPr>
             <a:r>
-              <a:rPr lang="en-US" sz="937" b="1" dirty="0">
+              <a:rPr lang="en-US" sz="1100" b="1" dirty="0">
                 <a:solidFill>
                   <a:srgbClr val="52605A"/>
                 </a:solidFill>
@@ -1287,7 +1287,7 @@
               <a:buNone/>
             </a:pPr>
             <a:r>
-              <a:rPr lang="en-US" sz="937" dirty="0">
+              <a:rPr lang="en-US" sz="1100" dirty="0">
                 <a:solidFill>
                   <a:srgbClr val="52605A"/>
                 </a:solidFill>
@@ -1304,7 +1304,7 @@
               <a:buNone/>
             </a:pPr>
             <a:r>
-              <a:rPr lang="en-US" sz="937" b="1" dirty="0">
+              <a:rPr lang="en-US" sz="1100" b="1" dirty="0">
                 <a:solidFill>
                   <a:srgbClr val="52605A"/>
                 </a:solidFill>
@@ -1324,7 +1324,7 @@
               <a:buNone/>
             </a:pPr>
             <a:r>
-              <a:rPr lang="en-US" sz="937" dirty="0">
+              <a:rPr lang="en-US" sz="1100" dirty="0">
                 <a:solidFill>
                   <a:srgbClr val="52605A"/>
                 </a:solidFill>
@@ -1334,7 +1334,7 @@
               </a:rPr>
               <a:t>内网 Web 业务回归长期依赖人工，自动化脚本编写门槛高、随页面改版频繁失效，维护成本压垮收益。</a:t>
             </a:r>
-            <a:endParaRPr lang="en-US" sz="937" dirty="0"/>
+            <a:endParaRPr lang="en-US" sz="1100" dirty="0"/>
           </a:p>
         </p:txBody>
       </p:sp>
@@ -2856,7 +2856,7 @@
               <a:buNone/>
             </a:pPr>
             <a:r>
-              <a:rPr lang="en-US" sz="875" b="1" spc="100" kern="0" dirty="0">
+              <a:rPr lang="en-US" sz="1700" b="1" spc="100" kern="0" dirty="0">
                 <a:solidFill>
                   <a:srgbClr val="478D54"/>
                 </a:solidFill>
@@ -2866,7 +2866,7 @@
               </a:rPr>
               <a:t>调研与技术路线</a:t>
             </a:r>
-            <a:endParaRPr lang="en-US" sz="875" dirty="0"/>
+            <a:endParaRPr lang="en-US" sz="1700" dirty="0"/>
           </a:p>
         </p:txBody>
       </p:sp>
@@ -2964,7 +2964,7 @@
               <a:buNone/>
             </a:pPr>
             <a:r>
-              <a:rPr lang="en-US" sz="875" b="1" dirty="0">
+              <a:rPr lang="en-US" sz="1700" b="1" dirty="0">
                 <a:solidFill>
                   <a:srgbClr val="356B41"/>
                 </a:solidFill>
@@ -2974,7 +2974,7 @@
               </a:rPr>
               <a:t>① openclaw 试点效果</a:t>
             </a:r>
-            <a:endParaRPr lang="en-US" sz="875" dirty="0"/>
+            <a:endParaRPr lang="en-US" sz="1700" dirty="0"/>
           </a:p>
         </p:txBody>
       </p:sp>
@@ -3038,7 +3038,7 @@
               <a:buNone/>
             </a:pPr>
             <a:r>
-              <a:rPr lang="en-US" sz="775" b="1" dirty="0">
+              <a:rPr lang="en-US" sz="1100" b="1" dirty="0">
                 <a:solidFill>
                   <a:srgbClr val="356B41"/>
                 </a:solidFill>
@@ -3055,7 +3055,7 @@
               <a:buNone/>
             </a:pPr>
             <a:r>
-              <a:rPr lang="en-US" sz="775" dirty="0">
+              <a:rPr lang="en-US" sz="1100" dirty="0">
                 <a:solidFill>
                   <a:srgbClr val="1F2A24"/>
                 </a:solidFill>
@@ -3069,7 +3069,7 @@
               <a:buNone/>
             </a:pPr>
             <a:r>
-              <a:rPr lang="en-US" sz="775" b="1" dirty="0">
+              <a:rPr lang="en-US" sz="1100" b="1" dirty="0">
                 <a:solidFill>
                   <a:srgbClr val="1F2A24"/>
                 </a:solidFill>
@@ -3086,7 +3086,7 @@
               <a:buNone/>
             </a:pPr>
             <a:r>
-              <a:rPr lang="en-US" sz="775" dirty="0">
+              <a:rPr lang="en-US" sz="1100" dirty="0">
                 <a:solidFill>
                   <a:srgbClr val="1F2A24"/>
                 </a:solidFill>
@@ -3096,7 +3096,7 @@
               </a:rPr>
               <a:t>。 试点方式：用其浏览器能力直接跑 Web 自动化用例。</a:t>
             </a:r>
-            <a:endParaRPr lang="en-US" sz="775" dirty="0"/>
+            <a:endParaRPr lang="en-US" sz="1100" dirty="0"/>
           </a:p>
         </p:txBody>
       </p:sp>
@@ -3132,7 +3132,7 @@
               <a:buNone/>
             </a:pPr>
             <a:r>
-              <a:rPr lang="en-US" sz="687" b="1" dirty="0">
+              <a:rPr lang="en-US" sz="1100" b="1" dirty="0">
                 <a:solidFill>
                   <a:srgbClr val="FFFFFF"/>
                 </a:solidFill>
@@ -3152,7 +3152,7 @@
               <a:buNone/>
             </a:pPr>
             <a:r>
-              <a:rPr lang="en-US" sz="775" dirty="0">
+              <a:rPr lang="en-US" sz="1100" dirty="0">
                 <a:solidFill>
                   <a:srgbClr val="1F2A24"/>
                 </a:solidFill>
@@ -3162,7 +3162,7 @@
               </a:rPr>
               <a:t>简单流程能跑通——AI 可自主操作浏览器完成点击/输入</a:t>
             </a:r>
-            <a:endParaRPr lang="en-US" sz="687" dirty="0"/>
+            <a:endParaRPr lang="en-US" sz="1100" dirty="0"/>
           </a:p>
         </p:txBody>
       </p:sp>
@@ -3198,7 +3198,7 @@
               <a:buNone/>
             </a:pPr>
             <a:r>
-              <a:rPr lang="en-US" sz="687" b="1" dirty="0">
+              <a:rPr lang="en-US" sz="1100" b="1" dirty="0">
                 <a:solidFill>
                   <a:srgbClr val="FFFFFF"/>
                 </a:solidFill>
@@ -3218,7 +3218,7 @@
               <a:buNone/>
             </a:pPr>
             <a:r>
-              <a:rPr lang="en-US" sz="775" dirty="0">
+              <a:rPr lang="en-US" sz="1100" dirty="0">
                 <a:solidFill>
                   <a:srgbClr val="1F2A24"/>
                 </a:solidFill>
@@ -3235,7 +3235,7 @@
               <a:buNone/>
             </a:pPr>
             <a:r>
-              <a:rPr lang="en-US" sz="775" b="1" dirty="0">
+              <a:rPr lang="en-US" sz="1100" b="1" dirty="0">
                 <a:solidFill>
                   <a:srgbClr val="1F2A24"/>
                 </a:solidFill>
@@ -3245,7 +3245,7 @@
               </a:rPr>
               <a:t>不可复现</a:t>
             </a:r>
-            <a:endParaRPr lang="en-US" sz="687" dirty="0"/>
+            <a:endParaRPr lang="en-US" sz="1100" dirty="0"/>
           </a:p>
         </p:txBody>
       </p:sp>
@@ -3281,7 +3281,7 @@
               <a:buNone/>
             </a:pPr>
             <a:r>
-              <a:rPr lang="en-US" sz="687" b="1" dirty="0">
+              <a:rPr lang="en-US" sz="1100" b="1" dirty="0">
                 <a:solidFill>
                   <a:srgbClr val="FFFFFF"/>
                 </a:solidFill>
@@ -3301,7 +3301,7 @@
               <a:buNone/>
             </a:pPr>
             <a:r>
-              <a:rPr lang="en-US" sz="775" dirty="0">
+              <a:rPr lang="en-US" sz="1100" dirty="0">
                 <a:solidFill>
                   <a:srgbClr val="1F2A24"/>
                 </a:solidFill>
@@ -3318,7 +3318,7 @@
               <a:buNone/>
             </a:pPr>
             <a:r>
-              <a:rPr lang="en-US" sz="775" b="1" dirty="0">
+              <a:rPr lang="en-US" sz="1100" b="1" dirty="0">
                 <a:solidFill>
                   <a:srgbClr val="1F2A24"/>
                 </a:solidFill>
@@ -3335,7 +3335,7 @@
               <a:buNone/>
             </a:pPr>
             <a:r>
-              <a:rPr lang="en-US" sz="775" dirty="0">
+              <a:rPr lang="en-US" sz="1100" dirty="0">
                 <a:solidFill>
                   <a:srgbClr val="1F2A24"/>
                 </a:solidFill>
@@ -3345,7 +3345,7 @@
               </a:rPr>
               <a:t>，回归每次重烧算力</a:t>
             </a:r>
-            <a:endParaRPr lang="en-US" sz="687" dirty="0"/>
+            <a:endParaRPr lang="en-US" sz="1100" dirty="0"/>
           </a:p>
         </p:txBody>
       </p:sp>
@@ -3381,7 +3381,7 @@
               <a:buNone/>
             </a:pPr>
             <a:r>
-              <a:rPr lang="en-US" sz="687" b="1" dirty="0">
+              <a:rPr lang="en-US" sz="1100" b="1" dirty="0">
                 <a:solidFill>
                   <a:srgbClr val="FFFFFF"/>
                 </a:solidFill>
@@ -3401,7 +3401,7 @@
               <a:buNone/>
             </a:pPr>
             <a:r>
-              <a:rPr lang="en-US" sz="775" dirty="0">
+              <a:rPr lang="en-US" sz="1100" dirty="0">
                 <a:solidFill>
                   <a:srgbClr val="1F2A24"/>
                 </a:solidFill>
@@ -3418,7 +3418,7 @@
               <a:buNone/>
             </a:pPr>
             <a:r>
-              <a:rPr lang="en-US" sz="775" b="1" dirty="0">
+              <a:rPr lang="en-US" sz="1100" b="1" dirty="0">
                 <a:solidFill>
                   <a:srgbClr val="1F2A24"/>
                 </a:solidFill>
@@ -3428,7 +3428,7 @@
               </a:rPr>
               <a:t>测试工程能力</a:t>
             </a:r>
-            <a:endParaRPr lang="en-US" sz="687" dirty="0"/>
+            <a:endParaRPr lang="en-US" sz="1100" dirty="0"/>
           </a:p>
         </p:txBody>
       </p:sp>
@@ -3464,7 +3464,7 @@
               <a:buNone/>
             </a:pPr>
             <a:r>
-              <a:rPr lang="en-US" sz="687" b="1" dirty="0">
+              <a:rPr lang="en-US" sz="1100" b="1" dirty="0">
                 <a:solidFill>
                   <a:srgbClr val="FFFFFF"/>
                 </a:solidFill>
@@ -3484,7 +3484,7 @@
               <a:buNone/>
             </a:pPr>
             <a:r>
-              <a:rPr lang="en-US" sz="775" dirty="0">
+              <a:rPr lang="en-US" sz="1100" dirty="0">
                 <a:solidFill>
                   <a:srgbClr val="1F2A24"/>
                 </a:solidFill>
@@ -3501,7 +3501,7 @@
               <a:buNone/>
             </a:pPr>
             <a:r>
-              <a:rPr lang="en-US" sz="775" b="1" dirty="0">
+              <a:rPr lang="en-US" sz="1100" b="1" dirty="0">
                 <a:solidFill>
                   <a:srgbClr val="1F2A24"/>
                 </a:solidFill>
@@ -3511,7 +3511,7 @@
               </a:rPr>
               <a:t>内网部署与合规裁剪成本高</a:t>
             </a:r>
-            <a:endParaRPr lang="en-US" sz="687" dirty="0"/>
+            <a:endParaRPr lang="en-US" sz="1100" dirty="0"/>
           </a:p>
         </p:txBody>
       </p:sp>
@@ -3551,7 +3551,7 @@
               <a:buNone/>
             </a:pPr>
             <a:r>
-              <a:rPr lang="en-US" sz="812" dirty="0">
+              <a:rPr lang="en-US" sz="1100" dirty="0">
                 <a:solidFill>
                   <a:srgbClr val="8A948E"/>
                 </a:solidFill>
@@ -3561,7 +3561,7 @@
               </a:rPr>
               <a:t>试点录屏（待插入）</a:t>
             </a:r>
-            <a:endParaRPr lang="en-US" sz="812" dirty="0"/>
+            <a:endParaRPr lang="en-US" sz="1100" dirty="0"/>
           </a:p>
         </p:txBody>
       </p:sp>
@@ -3594,7 +3594,7 @@
               <a:buNone/>
             </a:pPr>
             <a:r>
-              <a:rPr lang="en-US" sz="875" b="1" dirty="0">
+              <a:rPr lang="en-US" sz="1700" b="1" dirty="0">
                 <a:solidFill>
                   <a:srgbClr val="356B41"/>
                 </a:solidFill>
@@ -3604,7 +3604,7 @@
               </a:rPr>
               <a:t>② 基于 openclaw 二次开发　vs　自研 AI-Agent</a:t>
             </a:r>
-            <a:endParaRPr lang="en-US" sz="875" dirty="0"/>
+            <a:endParaRPr lang="en-US" sz="1700" dirty="0"/>
           </a:p>
         </p:txBody>
       </p:sp>
@@ -5381,7 +5381,7 @@
               <a:buNone/>
             </a:pPr>
             <a:r>
-              <a:rPr lang="en-US" sz="875" b="1" dirty="0">
+              <a:rPr lang="en-US" sz="1100" b="1" dirty="0">
                 <a:solidFill>
                   <a:srgbClr val="FFFFFF"/>
                 </a:solidFill>
@@ -5398,7 +5398,7 @@
               <a:buNone/>
             </a:pPr>
             <a:r>
-              <a:rPr lang="en-US" sz="875" b="1" dirty="0">
+              <a:rPr lang="en-US" sz="1100" b="1" dirty="0">
                 <a:solidFill>
                   <a:srgbClr val="BFE7C7"/>
                 </a:solidFill>
@@ -5418,7 +5418,7 @@
               <a:buNone/>
             </a:pPr>
             <a:r>
-              <a:rPr lang="en-US" sz="875" b="1" dirty="0">
+              <a:rPr lang="en-US" sz="1100" b="1" dirty="0">
                 <a:solidFill>
                   <a:srgbClr val="FFFFFF"/>
                 </a:solidFill>
@@ -5435,7 +5435,7 @@
               <a:buNone/>
             </a:pPr>
             <a:r>
-              <a:rPr lang="en-US" sz="875" b="1" dirty="0">
+              <a:rPr lang="en-US" sz="1100" b="1" dirty="0">
                 <a:solidFill>
                   <a:srgbClr val="BFE7C7"/>
                 </a:solidFill>
@@ -5455,7 +5455,7 @@
               <a:buNone/>
             </a:pPr>
             <a:r>
-              <a:rPr lang="en-US" sz="875" b="1" dirty="0">
+              <a:rPr lang="en-US" sz="1100" b="1" dirty="0">
                 <a:solidFill>
                   <a:srgbClr val="FFFFFF"/>
                 </a:solidFill>
@@ -5472,7 +5472,7 @@
               <a:buNone/>
             </a:pPr>
             <a:r>
-              <a:rPr lang="en-US" sz="875" b="1" dirty="0">
+              <a:rPr lang="en-US" sz="1100" b="1" dirty="0">
                 <a:solidFill>
                   <a:srgbClr val="FFFFFF"/>
                 </a:solidFill>
@@ -5492,7 +5492,7 @@
               <a:buNone/>
             </a:pPr>
             <a:r>
-              <a:rPr lang="en-US" sz="875" b="1" dirty="0">
+              <a:rPr lang="en-US" sz="1100" b="1" dirty="0">
                 <a:solidFill>
                   <a:srgbClr val="FFFFFF"/>
                 </a:solidFill>
@@ -5502,7 +5502,7 @@
               </a:rPr>
               <a:t>。</a:t>
             </a:r>
-            <a:endParaRPr lang="en-US" sz="875" dirty="0"/>
+            <a:endParaRPr lang="en-US" sz="1100" dirty="0"/>
           </a:p>
         </p:txBody>
       </p:sp>
@@ -5677,7 +5677,7 @@
               <a:buNone/>
             </a:pPr>
             <a:r>
-              <a:rPr lang="en-US" sz="875" b="1" spc="100" kern="0" dirty="0">
+              <a:rPr lang="en-US" sz="1700" b="1" spc="100" kern="0" dirty="0">
                 <a:solidFill>
                   <a:srgbClr val="478D54"/>
                 </a:solidFill>
@@ -5687,7 +5687,7 @@
               </a:rPr>
               <a:t>自研方案</a:t>
             </a:r>
-            <a:endParaRPr lang="en-US" sz="875" dirty="0"/>
+            <a:endParaRPr lang="en-US" sz="1700" dirty="0"/>
           </a:p>
         </p:txBody>
       </p:sp>
@@ -7511,7 +7511,7 @@
               <a:buNone/>
             </a:pPr>
             <a:r>
-              <a:rPr lang="en-US" sz="812" b="1" dirty="0">
+              <a:rPr lang="en-US" sz="1700" b="1" dirty="0">
                 <a:solidFill>
                   <a:srgbClr val="356B41"/>
                 </a:solidFill>
@@ -7521,7 +7521,7 @@
               </a:rPr>
               <a:t>工程化优点 · 可用 / 可管 / 可沉淀</a:t>
             </a:r>
-            <a:endParaRPr lang="en-US" sz="812" dirty="0"/>
+            <a:endParaRPr lang="en-US" sz="1700" dirty="0"/>
           </a:p>
         </p:txBody>
       </p:sp>
@@ -7573,7 +7573,7 @@
               <a:buNone/>
             </a:pPr>
             <a:r>
-              <a:rPr lang="en-US" sz="775" b="1" dirty="0">
+              <a:rPr lang="en-US" sz="1700" b="1" dirty="0">
                 <a:solidFill>
                   <a:srgbClr val="356B41"/>
                 </a:solidFill>
@@ -7587,7 +7587,7 @@
               <a:buNone/>
             </a:pPr>
             <a:r>
-              <a:rPr lang="en-US" sz="587" b="1" dirty="0">
+              <a:rPr lang="en-US" sz="1700" b="1" dirty="0">
                 <a:solidFill>
                   <a:srgbClr val="FFFFFF"/>
                 </a:solidFill>
@@ -7600,7 +7600,7 @@
               </a:rPr>
               <a:t>阶段 2 · 6</a:t>
             </a:r>
-            <a:endParaRPr lang="en-US" sz="775" dirty="0"/>
+            <a:endParaRPr lang="en-US" sz="1700" dirty="0"/>
           </a:p>
         </p:txBody>
       </p:sp>
@@ -7636,7 +7636,7 @@
               <a:buNone/>
             </a:pPr>
             <a:r>
-              <a:rPr lang="en-US" sz="687" dirty="0">
+              <a:rPr lang="en-US" sz="1100" dirty="0">
                 <a:solidFill>
                   <a:srgbClr val="52605A"/>
                 </a:solidFill>
@@ -7653,7 +7653,7 @@
               <a:buNone/>
             </a:pPr>
             <a:r>
-              <a:rPr lang="en-US" sz="687" b="1" dirty="0">
+              <a:rPr lang="en-US" sz="1100" b="1" dirty="0">
                 <a:solidFill>
                   <a:srgbClr val="52605A"/>
                 </a:solidFill>
@@ -7673,7 +7673,7 @@
               <a:buNone/>
             </a:pPr>
             <a:r>
-              <a:rPr lang="en-US" sz="687" dirty="0">
+              <a:rPr lang="en-US" sz="1100" dirty="0">
                 <a:solidFill>
                   <a:srgbClr val="52605A"/>
                 </a:solidFill>
@@ -7683,7 +7683,7 @@
               </a:rPr>
               <a:t>。</a:t>
             </a:r>
-            <a:endParaRPr lang="en-US" sz="687" dirty="0"/>
+            <a:endParaRPr lang="en-US" sz="1100" dirty="0"/>
           </a:p>
         </p:txBody>
       </p:sp>
@@ -7735,7 +7735,7 @@
               <a:buNone/>
             </a:pPr>
             <a:r>
-              <a:rPr lang="en-US" sz="775" b="1" dirty="0">
+              <a:rPr lang="en-US" sz="1700" b="1" dirty="0">
                 <a:solidFill>
                   <a:srgbClr val="356B41"/>
                 </a:solidFill>
@@ -7749,7 +7749,7 @@
               <a:buNone/>
             </a:pPr>
             <a:r>
-              <a:rPr lang="en-US" sz="587" b="1" dirty="0">
+              <a:rPr lang="en-US" sz="1700" b="1" dirty="0">
                 <a:solidFill>
                   <a:srgbClr val="FFFFFF"/>
                 </a:solidFill>
@@ -7762,7 +7762,7 @@
               </a:rPr>
               <a:t>阶段 2</a:t>
             </a:r>
-            <a:endParaRPr lang="en-US" sz="775" dirty="0"/>
+            <a:endParaRPr lang="en-US" sz="1700" dirty="0"/>
           </a:p>
         </p:txBody>
       </p:sp>
@@ -7798,7 +7798,7 @@
               <a:buNone/>
             </a:pPr>
             <a:r>
-              <a:rPr lang="en-US" sz="687" dirty="0">
+              <a:rPr lang="en-US" sz="1100" dirty="0">
                 <a:solidFill>
                   <a:srgbClr val="52605A"/>
                 </a:solidFill>
@@ -7815,7 +7815,7 @@
               <a:buNone/>
             </a:pPr>
             <a:r>
-              <a:rPr lang="en-US" sz="687" b="1" dirty="0">
+              <a:rPr lang="en-US" sz="1100" b="1" dirty="0">
                 <a:solidFill>
                   <a:srgbClr val="52605A"/>
                 </a:solidFill>
@@ -7835,7 +7835,7 @@
               <a:buNone/>
             </a:pPr>
             <a:r>
-              <a:rPr lang="en-US" sz="687" dirty="0">
+              <a:rPr lang="en-US" sz="1100" dirty="0">
                 <a:solidFill>
                   <a:srgbClr val="52605A"/>
                 </a:solidFill>
@@ -7845,7 +7845,7 @@
               </a:rPr>
               <a:t>，一处定义处处复用。</a:t>
             </a:r>
-            <a:endParaRPr lang="en-US" sz="687" dirty="0"/>
+            <a:endParaRPr lang="en-US" sz="1100" dirty="0"/>
           </a:p>
         </p:txBody>
       </p:sp>
@@ -7897,7 +7897,7 @@
               <a:buNone/>
             </a:pPr>
             <a:r>
-              <a:rPr lang="en-US" sz="775" b="1" dirty="0">
+              <a:rPr lang="en-US" sz="1700" b="1" dirty="0">
                 <a:solidFill>
                   <a:srgbClr val="356B41"/>
                 </a:solidFill>
@@ -7911,7 +7911,7 @@
               <a:buNone/>
             </a:pPr>
             <a:r>
-              <a:rPr lang="en-US" sz="587" b="1" dirty="0">
+              <a:rPr lang="en-US" sz="1700" b="1" dirty="0">
                 <a:solidFill>
                   <a:srgbClr val="FFFFFF"/>
                 </a:solidFill>
@@ -7924,7 +7924,7 @@
               </a:rPr>
               <a:t>阶段 3 · 4</a:t>
             </a:r>
-            <a:endParaRPr lang="en-US" sz="775" dirty="0"/>
+            <a:endParaRPr lang="en-US" sz="1700" dirty="0"/>
           </a:p>
         </p:txBody>
       </p:sp>
@@ -7960,7 +7960,7 @@
               <a:buNone/>
             </a:pPr>
             <a:r>
-              <a:rPr lang="en-US" sz="687" dirty="0">
+              <a:rPr lang="en-US" sz="1100" dirty="0">
                 <a:solidFill>
                   <a:srgbClr val="52605A"/>
                 </a:solidFill>
@@ -7977,7 +7977,7 @@
               <a:buNone/>
             </a:pPr>
             <a:r>
-              <a:rPr lang="en-US" sz="687" b="1" dirty="0">
+              <a:rPr lang="en-US" sz="1100" b="1" dirty="0">
                 <a:solidFill>
                   <a:srgbClr val="52605A"/>
                 </a:solidFill>
@@ -7997,7 +7997,7 @@
               <a:buNone/>
             </a:pPr>
             <a:r>
-              <a:rPr lang="en-US" sz="687" dirty="0">
+              <a:rPr lang="en-US" sz="1100" dirty="0">
                 <a:solidFill>
                   <a:srgbClr val="52605A"/>
                 </a:solidFill>
@@ -8014,7 +8014,7 @@
               <a:buNone/>
             </a:pPr>
             <a:r>
-              <a:rPr lang="en-US" sz="687" b="1" dirty="0">
+              <a:rPr lang="en-US" sz="1100" b="1" dirty="0">
                 <a:solidFill>
                   <a:srgbClr val="52605A"/>
                 </a:solidFill>
@@ -8034,7 +8034,7 @@
               <a:buNone/>
             </a:pPr>
             <a:r>
-              <a:rPr lang="en-US" sz="687" dirty="0">
+              <a:rPr lang="en-US" sz="1100" dirty="0">
                 <a:solidFill>
                   <a:srgbClr val="52605A"/>
                 </a:solidFill>
@@ -8044,7 +8044,7 @@
               </a:rPr>
               <a:t>取业务真值。</a:t>
             </a:r>
-            <a:endParaRPr lang="en-US" sz="687" dirty="0"/>
+            <a:endParaRPr lang="en-US" sz="1100" dirty="0"/>
           </a:p>
         </p:txBody>
       </p:sp>
@@ -8096,7 +8096,7 @@
               <a:buNone/>
             </a:pPr>
             <a:r>
-              <a:rPr lang="en-US" sz="775" b="1" dirty="0">
+              <a:rPr lang="en-US" sz="1700" b="1" dirty="0">
                 <a:solidFill>
                   <a:srgbClr val="356B41"/>
                 </a:solidFill>
@@ -8110,7 +8110,7 @@
               <a:buNone/>
             </a:pPr>
             <a:r>
-              <a:rPr lang="en-US" sz="587" b="1" dirty="0">
+              <a:rPr lang="en-US" sz="1700" b="1" dirty="0">
                 <a:solidFill>
                   <a:srgbClr val="FFFFFF"/>
                 </a:solidFill>
@@ -8123,7 +8123,7 @@
               </a:rPr>
               <a:t>阶段 1 · 3 · 5</a:t>
             </a:r>
-            <a:endParaRPr lang="en-US" sz="775" dirty="0"/>
+            <a:endParaRPr lang="en-US" sz="1700" dirty="0"/>
           </a:p>
         </p:txBody>
       </p:sp>
@@ -8159,7 +8159,7 @@
               <a:buNone/>
             </a:pPr>
             <a:r>
-              <a:rPr lang="en-US" sz="687" dirty="0">
+              <a:rPr lang="en-US" sz="1100" dirty="0">
                 <a:solidFill>
                   <a:srgbClr val="52605A"/>
                 </a:solidFill>
@@ -8176,7 +8176,7 @@
               <a:buNone/>
             </a:pPr>
             <a:r>
-              <a:rPr lang="en-US" sz="687" b="1" dirty="0">
+              <a:rPr lang="en-US" sz="1100" b="1" dirty="0">
                 <a:solidFill>
                   <a:srgbClr val="52605A"/>
                 </a:solidFill>
@@ -8196,7 +8196,7 @@
               <a:buNone/>
             </a:pPr>
             <a:r>
-              <a:rPr lang="en-US" sz="687" dirty="0">
+              <a:rPr lang="en-US" sz="1100" dirty="0">
                 <a:solidFill>
                   <a:srgbClr val="52605A"/>
                 </a:solidFill>
@@ -8206,7 +8206,7 @@
               </a:rPr>
               <a:t>定位；执行期增量沉淀、可前端维护。</a:t>
             </a:r>
-            <a:endParaRPr lang="en-US" sz="687" dirty="0"/>
+            <a:endParaRPr lang="en-US" sz="1100" dirty="0"/>
           </a:p>
         </p:txBody>
       </p:sp>
@@ -8244,7 +8244,7 @@
               <a:buNone/>
             </a:pPr>
             <a:r>
-              <a:rPr lang="en-US" sz="650" b="1" dirty="0">
+              <a:rPr lang="en-US" sz="1100" b="1" dirty="0">
                 <a:solidFill>
                   <a:srgbClr val="52605A"/>
                 </a:solidFill>
@@ -8264,7 +8264,7 @@
               <a:buNone/>
             </a:pPr>
             <a:r>
-              <a:rPr lang="en-US" sz="650" dirty="0">
+              <a:rPr lang="en-US" sz="1100" dirty="0">
                 <a:solidFill>
                   <a:srgbClr val="52605A"/>
                 </a:solidFill>
@@ -8281,7 +8281,7 @@
               <a:buNone/>
             </a:pPr>
             <a:r>
-              <a:rPr lang="en-US" sz="650" b="1" dirty="0">
+              <a:rPr lang="en-US" sz="1100" b="1" dirty="0">
                 <a:solidFill>
                   <a:srgbClr val="52605A"/>
                 </a:solidFill>
@@ -8301,7 +8301,7 @@
               <a:buNone/>
             </a:pPr>
             <a:r>
-              <a:rPr lang="en-US" sz="650" dirty="0">
+              <a:rPr lang="en-US" sz="1100" dirty="0">
                 <a:solidFill>
                   <a:srgbClr val="52605A"/>
                 </a:solidFill>
@@ -8318,7 +8318,7 @@
               <a:buNone/>
             </a:pPr>
             <a:r>
-              <a:rPr lang="en-US" sz="650" b="1" dirty="0">
+              <a:rPr lang="en-US" sz="1100" b="1" dirty="0">
                 <a:solidFill>
                   <a:srgbClr val="52605A"/>
                 </a:solidFill>
@@ -8338,7 +8338,7 @@
               <a:buNone/>
             </a:pPr>
             <a:r>
-              <a:rPr lang="en-US" sz="650" dirty="0">
+              <a:rPr lang="en-US" sz="1100" dirty="0">
                 <a:solidFill>
                   <a:srgbClr val="52605A"/>
                 </a:solidFill>
@@ -8355,7 +8355,7 @@
               <a:buNone/>
             </a:pPr>
             <a:r>
-              <a:rPr lang="en-US" sz="650" b="1" dirty="0">
+              <a:rPr lang="en-US" sz="1100" b="1" dirty="0">
                 <a:solidFill>
                   <a:srgbClr val="52605A"/>
                 </a:solidFill>
@@ -8375,7 +8375,7 @@
               <a:buNone/>
             </a:pPr>
             <a:r>
-              <a:rPr lang="en-US" sz="650" dirty="0">
+              <a:rPr lang="en-US" sz="1100" dirty="0">
                 <a:solidFill>
                   <a:srgbClr val="52605A"/>
                 </a:solidFill>
@@ -8385,7 +8385,7 @@
               </a:rPr>
               <a:t>。</a:t>
             </a:r>
-            <a:endParaRPr lang="en-US" sz="650" dirty="0"/>
+            <a:endParaRPr lang="en-US" sz="1100" dirty="0"/>
           </a:p>
         </p:txBody>
       </p:sp>
@@ -9010,7 +9010,7 @@
               <a:buNone/>
             </a:pPr>
             <a:r>
-              <a:rPr lang="en-US" sz="875" b="1" spc="100" kern="0" dirty="0">
+              <a:rPr lang="en-US" sz="1700" b="1" spc="100" kern="0" dirty="0">
                 <a:solidFill>
                   <a:srgbClr val="478D54"/>
                 </a:solidFill>
@@ -9020,7 +9020,7 @@
               </a:rPr>
               <a:t>效果 · 进展 · 计划</a:t>
             </a:r>
-            <a:endParaRPr lang="en-US" sz="875" dirty="0"/>
+            <a:endParaRPr lang="en-US" sz="1700" dirty="0"/>
           </a:p>
         </p:txBody>
       </p:sp>
@@ -9115,7 +9115,7 @@
               <a:buNone/>
             </a:pPr>
             <a:r>
-              <a:rPr lang="en-US" sz="875" b="1" dirty="0">
+              <a:rPr lang="en-US" sz="1700" b="1" dirty="0">
                 <a:solidFill>
                   <a:srgbClr val="356B41"/>
                 </a:solidFill>
@@ -9125,7 +9125,7 @@
               </a:rPr>
               <a:t>① 演示录屏</a:t>
             </a:r>
-            <a:endParaRPr lang="en-US" sz="875" dirty="0"/>
+            <a:endParaRPr lang="en-US" sz="1700" dirty="0"/>
           </a:p>
         </p:txBody>
       </p:sp>
@@ -9222,7 +9222,7 @@
               <a:buNone/>
             </a:pPr>
             <a:r>
-              <a:rPr lang="en-US" sz="875" dirty="0">
+              <a:rPr lang="en-US" sz="1100" dirty="0">
                 <a:solidFill>
                   <a:srgbClr val="52605A"/>
                 </a:solidFill>
@@ -9232,7 +9232,7 @@
               </a:rPr>
               <a:t>演示录屏（待插入）</a:t>
             </a:r>
-            <a:endParaRPr lang="en-US" sz="875" dirty="0"/>
+            <a:endParaRPr lang="en-US" sz="1100" dirty="0"/>
           </a:p>
         </p:txBody>
       </p:sp>
@@ -9265,7 +9265,7 @@
               <a:buNone/>
             </a:pPr>
             <a:r>
-              <a:rPr lang="en-US" sz="712" dirty="0">
+              <a:rPr lang="en-US" sz="1100" dirty="0">
                 <a:solidFill>
                   <a:srgbClr val="8A948E"/>
                 </a:solidFill>
@@ -9278,7 +9278,7 @@
             <a:pPr algn="ctr" indent="0" marL="0">
               <a:buNone/>
             </a:pPr>
-            <a:endParaRPr lang="en-US" sz="712" dirty="0"/>
+            <a:endParaRPr lang="en-US" sz="1100" dirty="0"/>
           </a:p>
           <a:p>
             <a:pPr algn="ctr" indent="0" marL="0">
@@ -9288,7 +9288,7 @@
               <a:buNone/>
             </a:pPr>
             <a:r>
-              <a:rPr lang="en-US" sz="712" dirty="0">
+              <a:rPr lang="en-US" sz="1100" dirty="0">
                 <a:solidFill>
                   <a:srgbClr val="8A948E"/>
                 </a:solidFill>
@@ -9298,7 +9298,7 @@
               </a:rPr>
               <a:t>对比「判定方式」与「有无代码产出」</a:t>
             </a:r>
-            <a:endParaRPr lang="en-US" sz="712" dirty="0"/>
+            <a:endParaRPr lang="en-US" sz="1100" dirty="0"/>
           </a:p>
         </p:txBody>
       </p:sp>
@@ -9328,7 +9328,7 @@
               <a:buNone/>
             </a:pPr>
             <a:r>
-              <a:rPr lang="en-US" sz="875" b="1" dirty="0">
+              <a:rPr lang="en-US" sz="1700" b="1" dirty="0">
                 <a:solidFill>
                   <a:srgbClr val="356B41"/>
                 </a:solidFill>
@@ -9338,7 +9338,7 @@
               </a:rPr>
               <a:t>② 当前进展</a:t>
             </a:r>
-            <a:endParaRPr lang="en-US" sz="875" dirty="0"/>
+            <a:endParaRPr lang="en-US" sz="1700" dirty="0"/>
           </a:p>
         </p:txBody>
       </p:sp>
@@ -9550,7 +9550,7 @@
               <a:buNone/>
             </a:pPr>
             <a:r>
-              <a:rPr lang="en-US" sz="775" b="1" dirty="0">
+              <a:rPr lang="en-US" sz="1100" b="1" dirty="0">
                 <a:solidFill>
                   <a:srgbClr val="356B41"/>
                 </a:solidFill>
@@ -9560,7 +9560,7 @@
               </a:rPr>
               <a:t>真实环境 live 验证（DeepSeek + 真实 Chrome）</a:t>
             </a:r>
-            <a:endParaRPr lang="en-US" sz="775" dirty="0"/>
+            <a:endParaRPr lang="en-US" sz="1100" dirty="0"/>
           </a:p>
         </p:txBody>
       </p:sp>
@@ -9596,7 +9596,7 @@
               <a:buNone/>
             </a:pPr>
             <a:r>
-              <a:rPr lang="en-US" sz="687" b="1" dirty="0">
+              <a:rPr lang="en-US" sz="1100" b="1" dirty="0">
                 <a:solidFill>
                   <a:srgbClr val="FFFFFF"/>
                 </a:solidFill>
@@ -9616,7 +9616,7 @@
               <a:buNone/>
             </a:pPr>
             <a:r>
-              <a:rPr lang="en-US" sz="775" dirty="0">
+              <a:rPr lang="en-US" sz="1100" dirty="0">
                 <a:solidFill>
                   <a:srgbClr val="1F2A24"/>
                 </a:solidFill>
@@ -9633,7 +9633,7 @@
               <a:buNone/>
             </a:pPr>
             <a:r>
-              <a:rPr lang="en-US" sz="775" b="1" dirty="0">
+              <a:rPr lang="en-US" sz="1100" b="1" dirty="0">
                 <a:solidFill>
                   <a:srgbClr val="1F2A24"/>
                 </a:solidFill>
@@ -9643,7 +9643,7 @@
               </a:rPr>
               <a:t>多轮稳定复现</a:t>
             </a:r>
-            <a:endParaRPr lang="en-US" sz="687" dirty="0"/>
+            <a:endParaRPr lang="en-US" sz="1100" dirty="0"/>
           </a:p>
         </p:txBody>
       </p:sp>
@@ -9679,7 +9679,7 @@
               <a:buNone/>
             </a:pPr>
             <a:r>
-              <a:rPr lang="en-US" sz="687" b="1" dirty="0">
+              <a:rPr lang="en-US" sz="1100" b="1" dirty="0">
                 <a:solidFill>
                   <a:srgbClr val="FFFFFF"/>
                 </a:solidFill>
@@ -9699,7 +9699,7 @@
               <a:buNone/>
             </a:pPr>
             <a:r>
-              <a:rPr lang="en-US" sz="775" dirty="0">
+              <a:rPr lang="en-US" sz="1100" dirty="0">
                 <a:solidFill>
                   <a:srgbClr val="1F2A24"/>
                 </a:solidFill>
@@ -9716,7 +9716,7 @@
               <a:buNone/>
             </a:pPr>
             <a:r>
-              <a:rPr lang="en-US" sz="775" b="1" dirty="0">
+              <a:rPr lang="en-US" sz="1100" b="1" dirty="0">
                 <a:solidFill>
                   <a:srgbClr val="1F2A24"/>
                 </a:solidFill>
@@ -9733,7 +9733,7 @@
               <a:buNone/>
             </a:pPr>
             <a:r>
-              <a:rPr lang="en-US" sz="775" dirty="0">
+              <a:rPr lang="en-US" sz="1100" dirty="0">
                 <a:solidFill>
                   <a:srgbClr val="1F2A24"/>
                 </a:solidFill>
@@ -9743,7 +9743,7 @@
               </a:rPr>
               <a:t> + 2 次自动自愈</a:t>
             </a:r>
-            <a:endParaRPr lang="en-US" sz="687" dirty="0"/>
+            <a:endParaRPr lang="en-US" sz="1100" dirty="0"/>
           </a:p>
         </p:txBody>
       </p:sp>
@@ -9779,7 +9779,7 @@
               <a:buNone/>
             </a:pPr>
             <a:r>
-              <a:rPr lang="en-US" sz="687" b="1" dirty="0">
+              <a:rPr lang="en-US" sz="1100" b="1" dirty="0">
                 <a:solidFill>
                   <a:srgbClr val="FFFFFF"/>
                 </a:solidFill>
@@ -9799,7 +9799,7 @@
               <a:buNone/>
             </a:pPr>
             <a:r>
-              <a:rPr lang="en-US" sz="775" dirty="0">
+              <a:rPr lang="en-US" sz="1100" dirty="0">
                 <a:solidFill>
                   <a:srgbClr val="1F2A24"/>
                 </a:solidFill>
@@ -9816,7 +9816,7 @@
               <a:buNone/>
             </a:pPr>
             <a:r>
-              <a:rPr lang="en-US" sz="775" b="1" dirty="0">
+              <a:rPr lang="en-US" sz="1100" b="1" dirty="0">
                 <a:solidFill>
                   <a:srgbClr val="1F2A24"/>
                 </a:solidFill>
@@ -9826,7 +9826,7 @@
               </a:rPr>
               <a:t>Playwright 真实回放通过</a:t>
             </a:r>
-            <a:endParaRPr lang="en-US" sz="687" dirty="0"/>
+            <a:endParaRPr lang="en-US" sz="1100" dirty="0"/>
           </a:p>
         </p:txBody>
       </p:sp>
@@ -9862,7 +9862,7 @@
               <a:buNone/>
             </a:pPr>
             <a:r>
-              <a:rPr lang="en-US" sz="687" b="1" dirty="0">
+              <a:rPr lang="en-US" sz="1100" b="1" dirty="0">
                 <a:solidFill>
                   <a:srgbClr val="FFFFFF"/>
                 </a:solidFill>
@@ -9882,7 +9882,7 @@
               <a:buNone/>
             </a:pPr>
             <a:r>
-              <a:rPr lang="en-US" sz="775" dirty="0">
+              <a:rPr lang="en-US" sz="1100" dirty="0">
                 <a:solidFill>
                   <a:srgbClr val="1F2A24"/>
                 </a:solidFill>
@@ -9899,7 +9899,7 @@
               <a:buNone/>
             </a:pPr>
             <a:r>
-              <a:rPr lang="en-US" sz="775" b="1" dirty="0">
+              <a:rPr lang="en-US" sz="1100" b="1" dirty="0">
                 <a:solidFill>
                   <a:srgbClr val="1F2A24"/>
                 </a:solidFill>
@@ -9909,7 +9909,7 @@
               </a:rPr>
               <a:t>步数 7→3</a:t>
             </a:r>
-            <a:endParaRPr lang="en-US" sz="687" dirty="0"/>
+            <a:endParaRPr lang="en-US" sz="1100" dirty="0"/>
           </a:p>
         </p:txBody>
       </p:sp>
@@ -9945,7 +9945,7 @@
               <a:buNone/>
             </a:pPr>
             <a:r>
-              <a:rPr lang="en-US" sz="687" b="1" dirty="0">
+              <a:rPr lang="en-US" sz="1100" b="1" dirty="0">
                 <a:solidFill>
                   <a:srgbClr val="FFFFFF"/>
                 </a:solidFill>
@@ -9965,7 +9965,7 @@
               <a:buNone/>
             </a:pPr>
             <a:r>
-              <a:rPr lang="en-US" sz="775" dirty="0">
+              <a:rPr lang="en-US" sz="1100" dirty="0">
                 <a:solidFill>
                   <a:srgbClr val="1F2A24"/>
                 </a:solidFill>
@@ -9982,7 +9982,7 @@
               <a:buNone/>
             </a:pPr>
             <a:r>
-              <a:rPr lang="en-US" sz="775" b="1" dirty="0">
+              <a:rPr lang="en-US" sz="1100" b="1" dirty="0">
                 <a:solidFill>
                   <a:srgbClr val="1F2A24"/>
                 </a:solidFill>
@@ -9999,7 +9999,7 @@
               <a:buNone/>
             </a:pPr>
             <a:r>
-              <a:rPr lang="en-US" sz="775" dirty="0">
+              <a:rPr lang="en-US" sz="1100" dirty="0">
                 <a:solidFill>
                   <a:srgbClr val="1F2A24"/>
                 </a:solidFill>
@@ -10009,7 +10009,7 @@
               </a:rPr>
               <a:t> 端到端跑通</a:t>
             </a:r>
-            <a:endParaRPr lang="en-US" sz="687" dirty="0"/>
+            <a:endParaRPr lang="en-US" sz="1100" dirty="0"/>
           </a:p>
         </p:txBody>
       </p:sp>
@@ -10045,7 +10045,7 @@
               <a:buNone/>
             </a:pPr>
             <a:r>
-              <a:rPr lang="en-US" sz="712" dirty="0">
+              <a:rPr lang="en-US" sz="1100" dirty="0">
                 <a:solidFill>
                   <a:srgbClr val="52605A"/>
                 </a:solidFill>
@@ -10062,7 +10062,7 @@
               <a:buNone/>
             </a:pPr>
             <a:r>
-              <a:rPr lang="en-US" sz="712" b="1" dirty="0">
+              <a:rPr lang="en-US" sz="1100" b="1" dirty="0">
                 <a:solidFill>
                   <a:srgbClr val="52605A"/>
                 </a:solidFill>
@@ -10082,7 +10082,7 @@
               <a:buNone/>
             </a:pPr>
             <a:r>
-              <a:rPr lang="en-US" sz="712" dirty="0">
+              <a:rPr lang="en-US" sz="1100" dirty="0">
                 <a:solidFill>
                   <a:srgbClr val="52605A"/>
                 </a:solidFill>
@@ -10099,7 +10099,7 @@
               <a:buNone/>
             </a:pPr>
             <a:r>
-              <a:rPr lang="en-US" sz="712" b="1" dirty="0">
+              <a:rPr lang="en-US" sz="1100" b="1" dirty="0">
                 <a:solidFill>
                   <a:srgbClr val="1F2A24"/>
                 </a:solidFill>
@@ -10119,7 +10119,7 @@
               <a:buNone/>
             </a:pPr>
             <a:r>
-              <a:rPr lang="en-US" sz="712" dirty="0">
+              <a:rPr lang="en-US" sz="1100" dirty="0">
                 <a:solidFill>
                   <a:srgbClr val="52605A"/>
                 </a:solidFill>
@@ -10129,7 +10129,7 @@
               </a:rPr>
               <a:t> 验证。</a:t>
             </a:r>
-            <a:endParaRPr lang="en-US" sz="712" dirty="0"/>
+            <a:endParaRPr lang="en-US" sz="1100" dirty="0"/>
           </a:p>
         </p:txBody>
       </p:sp>
@@ -10162,7 +10162,7 @@
               <a:buNone/>
             </a:pPr>
             <a:r>
-              <a:rPr lang="en-US" sz="875" b="1" dirty="0">
+              <a:rPr lang="en-US" sz="1700" b="1" dirty="0">
                 <a:solidFill>
                   <a:srgbClr val="356B41"/>
                 </a:solidFill>
@@ -10172,7 +10172,7 @@
               </a:rPr>
               <a:t>③ 下一步计划</a:t>
             </a:r>
-            <a:endParaRPr lang="en-US" sz="875" dirty="0"/>
+            <a:endParaRPr lang="en-US" sz="1700" dirty="0"/>
           </a:p>
         </p:txBody>
       </p:sp>
@@ -10224,7 +10224,7 @@
               <a:buNone/>
             </a:pPr>
             <a:r>
-              <a:rPr lang="en-US" sz="687" b="1" dirty="0">
+              <a:rPr lang="en-US" sz="1100" b="1" dirty="0">
                 <a:solidFill>
                   <a:srgbClr val="356B41"/>
                 </a:solidFill>
@@ -10234,7 +10234,7 @@
               </a:rPr>
               <a:t>里程碑 1</a:t>
             </a:r>
-            <a:endParaRPr lang="en-US" sz="687" dirty="0"/>
+            <a:endParaRPr lang="en-US" sz="1100" dirty="0"/>
           </a:p>
         </p:txBody>
       </p:sp>
@@ -10307,7 +10307,7 @@
               <a:buNone/>
             </a:pPr>
             <a:r>
-              <a:rPr lang="en-US" sz="775" dirty="0">
+              <a:rPr lang="en-US" sz="1100" dirty="0">
                 <a:solidFill>
                   <a:srgbClr val="1F2A24"/>
                 </a:solidFill>
@@ -10317,7 +10317,7 @@
               </a:rPr>
               <a:t>交付 1 期计划</a:t>
             </a:r>
-            <a:endParaRPr lang="en-US" sz="775" dirty="0"/>
+            <a:endParaRPr lang="en-US" sz="1100" dirty="0"/>
           </a:p>
         </p:txBody>
       </p:sp>
@@ -10357,7 +10357,7 @@
               <a:buNone/>
             </a:pPr>
             <a:r>
-              <a:rPr lang="en-US" sz="750" dirty="0">
+              <a:rPr lang="en-US" sz="1100" dirty="0">
                 <a:solidFill>
                   <a:srgbClr val="8A948E"/>
                 </a:solidFill>
@@ -10367,7 +10367,7 @@
               </a:rPr>
               <a:t>后续里程碑（待补充）</a:t>
             </a:r>
-            <a:endParaRPr lang="en-US" sz="750" dirty="0"/>
+            <a:endParaRPr lang="en-US" sz="1100" dirty="0"/>
           </a:p>
         </p:txBody>
       </p:sp>
